--- a/data-eng/decks/w4d5s2.pptx
+++ b/data-eng/decks/w4d5s2.pptx
@@ -15,6 +15,7 @@
     <p:sldId id="263" r:id="rId14"/>
     <p:sldId id="264" r:id="rId15"/>
     <p:sldId id="265" r:id="rId16"/>
+    <p:sldId id="266" r:id="rId17"/>
   </p:sldIdLst>
   <p:sldSz cx="18288000" cy="10287000" type="screen4x3"/>
   <p:notesSz cx="6858000" cy="9144000"/>
@@ -3099,7 +3100,7 @@
       <p:grpSpPr/>
       <p:sp>
         <p:nvSpPr>
-          <p:cNvPr id="2" name="Oval 1"/>
+          <p:cNvPr id="2" name="deckgen:decor"/>
           <p:cNvSpPr/>
           <p:nvPr/>
         </p:nvSpPr>
@@ -3129,7 +3130,7 @@
       </p:sp>
       <p:sp>
         <p:nvSpPr>
-          <p:cNvPr id="3" name="Oval 2"/>
+          <p:cNvPr id="3" name="deckgen:decor"/>
           <p:cNvSpPr/>
           <p:nvPr/>
         </p:nvSpPr>
@@ -3159,7 +3160,7 @@
       </p:sp>
       <p:sp>
         <p:nvSpPr>
-          <p:cNvPr id="4" name="Oval 3"/>
+          <p:cNvPr id="4" name="deckgen:decor"/>
           <p:cNvSpPr/>
           <p:nvPr/>
         </p:nvSpPr>
@@ -3189,7 +3190,7 @@
       </p:sp>
       <p:sp>
         <p:nvSpPr>
-          <p:cNvPr id="5" name="Rectangle 4"/>
+          <p:cNvPr id="5" name="deckgen:decor"/>
           <p:cNvSpPr/>
           <p:nvPr/>
         </p:nvSpPr>
@@ -3219,7 +3220,7 @@
       </p:sp>
       <p:sp>
         <p:nvSpPr>
-          <p:cNvPr id="6" name="Oval 5"/>
+          <p:cNvPr id="6" name="deckgen:decor"/>
           <p:cNvSpPr/>
           <p:nvPr/>
         </p:nvSpPr>
@@ -3249,7 +3250,7 @@
       </p:sp>
       <p:sp>
         <p:nvSpPr>
-          <p:cNvPr id="7" name="Oval 6"/>
+          <p:cNvPr id="7" name="deckgen:decor"/>
           <p:cNvSpPr/>
           <p:nvPr/>
         </p:nvSpPr>
@@ -3279,7 +3280,7 @@
       </p:sp>
       <p:sp>
         <p:nvSpPr>
-          <p:cNvPr id="8" name="Oval 7"/>
+          <p:cNvPr id="8" name="deckgen:decor"/>
           <p:cNvSpPr/>
           <p:nvPr/>
         </p:nvSpPr>
@@ -3309,7 +3310,7 @@
       </p:sp>
       <p:sp>
         <p:nvSpPr>
-          <p:cNvPr id="9" name="Oval 8"/>
+          <p:cNvPr id="9" name="deckgen:decor"/>
           <p:cNvSpPr/>
           <p:nvPr/>
         </p:nvSpPr>
@@ -3339,7 +3340,7 @@
       </p:sp>
       <p:sp>
         <p:nvSpPr>
-          <p:cNvPr id="10" name="Rectangle 9"/>
+          <p:cNvPr id="10" name="deckgen:decor"/>
           <p:cNvSpPr/>
           <p:nvPr/>
         </p:nvSpPr>
@@ -3515,7 +3516,7 @@
                 <a:ea typeface="Pretendard"/>
                 <a:cs typeface="Pretendard"/>
               </a:rPr>
-              <a:t>양방향으로 쓰고 읽고, 일부러 다르게 보게도</a:t>
+              <a:t>양방향으로 쓰고 읽고, 같은 테이블인지 확인</a:t>
             </a:r>
           </a:p>
         </p:txBody>
@@ -3599,7 +3600,1215 @@
       <p:grpSpPr/>
       <p:sp>
         <p:nvSpPr>
-          <p:cNvPr id="2" name="Oval 1"/>
+          <p:cNvPr id="2" name="deckgen:decor"/>
+          <p:cNvSpPr/>
+          <p:nvPr/>
+        </p:nvSpPr>
+        <p:spPr>
+          <a:xfrm>
+            <a:off x="15811500" y="8382000"/>
+            <a:ext cx="4953000" cy="4953000"/>
+          </a:xfrm>
+          <a:prstGeom prst="ellipse">
+            <a:avLst/>
+          </a:prstGeom>
+          <a:solidFill>
+            <a:srgbClr val="F3F6FC"/>
+          </a:solidFill>
+          <a:ln>
+            <a:noFill/>
+          </a:ln>
+          <a:effectLst/>
+        </p:spPr>
+        <p:txBody>
+          <a:bodyPr rtlCol="0" anchor="ctr" wrap="square"/>
+          <a:lstStyle/>
+          <a:p>
+            <a:pPr algn="ctr"/>
+          </a:p>
+        </p:txBody>
+      </p:sp>
+      <p:sp>
+        <p:nvSpPr>
+          <p:cNvPr id="3" name="deckgen:decor"/>
+          <p:cNvSpPr/>
+          <p:nvPr/>
+        </p:nvSpPr>
+        <p:spPr>
+          <a:xfrm>
+            <a:off x="16859250" y="9429750"/>
+            <a:ext cx="2857500" cy="2857500"/>
+          </a:xfrm>
+          <a:prstGeom prst="ellipse">
+            <a:avLst/>
+          </a:prstGeom>
+          <a:solidFill>
+            <a:srgbClr val="FFFFFF"/>
+          </a:solidFill>
+          <a:ln>
+            <a:noFill/>
+          </a:ln>
+          <a:effectLst/>
+        </p:spPr>
+        <p:txBody>
+          <a:bodyPr rtlCol="0" anchor="ctr" wrap="square"/>
+          <a:lstStyle/>
+          <a:p>
+            <a:pPr algn="ctr"/>
+          </a:p>
+        </p:txBody>
+      </p:sp>
+      <p:sp>
+        <p:nvSpPr>
+          <p:cNvPr id="4" name="deckgen:decor"/>
+          <p:cNvSpPr/>
+          <p:nvPr/>
+        </p:nvSpPr>
+        <p:spPr>
+          <a:xfrm>
+            <a:off x="-1428750" y="1428750"/>
+            <a:ext cx="2857500" cy="2857500"/>
+          </a:xfrm>
+          <a:prstGeom prst="ellipse">
+            <a:avLst/>
+          </a:prstGeom>
+          <a:solidFill>
+            <a:srgbClr val="F7F8FA"/>
+          </a:solidFill>
+          <a:ln>
+            <a:noFill/>
+          </a:ln>
+          <a:effectLst/>
+        </p:spPr>
+        <p:txBody>
+          <a:bodyPr rtlCol="0" anchor="ctr" wrap="square"/>
+          <a:lstStyle/>
+          <a:p>
+            <a:pPr algn="ctr"/>
+          </a:p>
+        </p:txBody>
+      </p:sp>
+      <p:sp>
+        <p:nvSpPr>
+          <p:cNvPr id="5" name="TextBox 4"/>
+          <p:cNvSpPr txBox="1"/>
+          <p:nvPr/>
+        </p:nvSpPr>
+        <p:spPr>
+          <a:xfrm>
+            <a:off x="1143000" y="838200"/>
+            <a:ext cx="16002000" cy="342900"/>
+          </a:xfrm>
+          <a:prstGeom prst="rect">
+            <a:avLst/>
+          </a:prstGeom>
+          <a:noFill/>
+        </p:spPr>
+        <p:txBody>
+          <a:bodyPr wrap="square" lIns="0" rIns="0" tIns="0" bIns="0" anchor="t">
+            <a:spAutoFit/>
+          </a:bodyPr>
+          <a:lstStyle/>
+          <a:p>
+            <a:pPr algn="l">
+              <a:lnSpc>
+                <a:spcPct val="100000"/>
+              </a:lnSpc>
+            </a:pPr>
+            <a:r>
+              <a:rPr sz="1950" b="1" spc="160">
+                <a:solidFill>
+                  <a:srgbClr val="1E5BC6"/>
+                </a:solidFill>
+                <a:latin typeface="Pretendard"/>
+                <a:ea typeface="Pretendard"/>
+                <a:cs typeface="Pretendard"/>
+              </a:rPr>
+              <a:t>확인 포인트</a:t>
+            </a:r>
+          </a:p>
+        </p:txBody>
+      </p:sp>
+      <p:sp>
+        <p:nvSpPr>
+          <p:cNvPr id="6" name="TextBox 5"/>
+          <p:cNvSpPr txBox="1"/>
+          <p:nvPr/>
+        </p:nvSpPr>
+        <p:spPr>
+          <a:xfrm>
+            <a:off x="1143000" y="1162050"/>
+            <a:ext cx="16002000" cy="762000"/>
+          </a:xfrm>
+          <a:prstGeom prst="rect">
+            <a:avLst/>
+          </a:prstGeom>
+          <a:noFill/>
+        </p:spPr>
+        <p:txBody>
+          <a:bodyPr wrap="square" lIns="0" rIns="0" tIns="0" bIns="0" anchor="t">
+            <a:spAutoFit/>
+          </a:bodyPr>
+          <a:lstStyle/>
+          <a:p>
+            <a:pPr algn="l">
+              <a:lnSpc>
+                <a:spcPct val="100000"/>
+              </a:lnSpc>
+            </a:pPr>
+            <a:r>
+              <a:rPr sz="5100" b="1">
+                <a:solidFill>
+                  <a:srgbClr val="0D2B5E"/>
+                </a:solidFill>
+                <a:latin typeface="Pretendard"/>
+                <a:ea typeface="Pretendard"/>
+                <a:cs typeface="Pretendard"/>
+              </a:rPr>
+              <a:t>이 1.5시간이 끝날 때 확인할 것</a:t>
+            </a:r>
+          </a:p>
+        </p:txBody>
+      </p:sp>
+      <p:sp>
+        <p:nvSpPr>
+          <p:cNvPr id="7" name="Rectangle 6"/>
+          <p:cNvSpPr/>
+          <p:nvPr/>
+        </p:nvSpPr>
+        <p:spPr>
+          <a:xfrm>
+            <a:off x="1143000" y="2038350"/>
+            <a:ext cx="16002000" cy="28575"/>
+          </a:xfrm>
+          <a:prstGeom prst="rect">
+            <a:avLst/>
+          </a:prstGeom>
+          <a:solidFill>
+            <a:srgbClr val="0D2B5E"/>
+          </a:solidFill>
+          <a:ln>
+            <a:noFill/>
+          </a:ln>
+          <a:effectLst/>
+        </p:spPr>
+        <p:txBody>
+          <a:bodyPr rtlCol="0" anchor="ctr" wrap="square"/>
+          <a:lstStyle/>
+          <a:p>
+            <a:pPr algn="ctr"/>
+          </a:p>
+        </p:txBody>
+      </p:sp>
+      <p:sp>
+        <p:nvSpPr>
+          <p:cNvPr id="8" name="Rounded Rectangle 7"/>
+          <p:cNvSpPr/>
+          <p:nvPr/>
+        </p:nvSpPr>
+        <p:spPr>
+          <a:xfrm>
+            <a:off x="1143000" y="2867025"/>
+            <a:ext cx="16002000" cy="742950"/>
+          </a:xfrm>
+          <a:prstGeom prst="roundRect">
+            <a:avLst>
+              <a:gd name="adj" fmla="val 6410"/>
+            </a:avLst>
+          </a:prstGeom>
+          <a:solidFill>
+            <a:srgbClr val="FAFBFD"/>
+          </a:solidFill>
+          <a:ln w="9525">
+            <a:solidFill>
+              <a:srgbClr val="DCE1E8"/>
+            </a:solidFill>
+          </a:ln>
+          <a:effectLst/>
+        </p:spPr>
+        <p:txBody>
+          <a:bodyPr rtlCol="0" anchor="ctr" wrap="square"/>
+          <a:lstStyle/>
+          <a:p>
+            <a:pPr algn="ctr"/>
+          </a:p>
+        </p:txBody>
+      </p:sp>
+      <p:sp>
+        <p:nvSpPr>
+          <p:cNvPr id="9" name="Oval 8"/>
+          <p:cNvSpPr/>
+          <p:nvPr/>
+        </p:nvSpPr>
+        <p:spPr>
+          <a:xfrm>
+            <a:off x="1390650" y="2971800"/>
+            <a:ext cx="533400" cy="533400"/>
+          </a:xfrm>
+          <a:prstGeom prst="ellipse">
+            <a:avLst/>
+          </a:prstGeom>
+          <a:solidFill>
+            <a:srgbClr val="0D2B5E"/>
+          </a:solidFill>
+          <a:ln>
+            <a:noFill/>
+          </a:ln>
+          <a:effectLst/>
+        </p:spPr>
+        <p:txBody>
+          <a:bodyPr rtlCol="0" anchor="ctr" wrap="square"/>
+          <a:lstStyle/>
+          <a:p>
+            <a:pPr algn="ctr"/>
+          </a:p>
+        </p:txBody>
+      </p:sp>
+      <p:sp>
+        <p:nvSpPr>
+          <p:cNvPr id="10" name="TextBox 9"/>
+          <p:cNvSpPr txBox="1"/>
+          <p:nvPr/>
+        </p:nvSpPr>
+        <p:spPr>
+          <a:xfrm>
+            <a:off x="1390650" y="3095625"/>
+            <a:ext cx="533400" cy="323850"/>
+          </a:xfrm>
+          <a:prstGeom prst="rect">
+            <a:avLst/>
+          </a:prstGeom>
+          <a:noFill/>
+        </p:spPr>
+        <p:txBody>
+          <a:bodyPr wrap="square" lIns="0" rIns="0" tIns="0" bIns="0" anchor="t">
+            <a:spAutoFit/>
+          </a:bodyPr>
+          <a:lstStyle/>
+          <a:p>
+            <a:pPr algn="ctr">
+              <a:lnSpc>
+                <a:spcPct val="100000"/>
+              </a:lnSpc>
+            </a:pPr>
+            <a:r>
+              <a:rPr sz="2100" b="1">
+                <a:solidFill>
+                  <a:srgbClr val="FFFFFF"/>
+                </a:solidFill>
+                <a:latin typeface="Pretendard"/>
+                <a:ea typeface="Pretendard"/>
+                <a:cs typeface="Pretendard"/>
+              </a:rPr>
+              <a:t>1</a:t>
+            </a:r>
+          </a:p>
+        </p:txBody>
+      </p:sp>
+      <p:sp>
+        <p:nvSpPr>
+          <p:cNvPr id="11" name="TextBox 10"/>
+          <p:cNvSpPr txBox="1"/>
+          <p:nvPr/>
+        </p:nvSpPr>
+        <p:spPr>
+          <a:xfrm>
+            <a:off x="2190750" y="2867025"/>
+            <a:ext cx="14573250" cy="742950"/>
+          </a:xfrm>
+          <a:prstGeom prst="rect">
+            <a:avLst/>
+          </a:prstGeom>
+          <a:noFill/>
+        </p:spPr>
+        <p:txBody>
+          <a:bodyPr wrap="square" lIns="0" rIns="0" tIns="0" bIns="0" anchor="ctr">
+            <a:spAutoFit/>
+          </a:bodyPr>
+          <a:lstStyle/>
+          <a:p>
+            <a:pPr algn="l">
+              <a:lnSpc>
+                <a:spcPct val="100000"/>
+              </a:lnSpc>
+            </a:pPr>
+            <a:r>
+              <a:rPr sz="2100" b="1">
+                <a:solidFill>
+                  <a:srgbClr val="0D2B5E"/>
+                </a:solidFill>
+                <a:latin typeface="Pretendard"/>
+                <a:ea typeface="Pretendard"/>
+                <a:cs typeface="Pretendard"/>
+              </a:rPr>
+              <a:t>다섯 컨테이너 Up · Trino "6" · Spark 6 으로 시작했다</a:t>
+            </a:r>
+          </a:p>
+        </p:txBody>
+      </p:sp>
+      <p:sp>
+        <p:nvSpPr>
+          <p:cNvPr id="12" name="Rounded Rectangle 11"/>
+          <p:cNvSpPr/>
+          <p:nvPr/>
+        </p:nvSpPr>
+        <p:spPr>
+          <a:xfrm>
+            <a:off x="1143000" y="3724275"/>
+            <a:ext cx="16002000" cy="742950"/>
+          </a:xfrm>
+          <a:prstGeom prst="roundRect">
+            <a:avLst>
+              <a:gd name="adj" fmla="val 6410"/>
+            </a:avLst>
+          </a:prstGeom>
+          <a:solidFill>
+            <a:srgbClr val="FAFBFD"/>
+          </a:solidFill>
+          <a:ln w="9525">
+            <a:solidFill>
+              <a:srgbClr val="DCE1E8"/>
+            </a:solidFill>
+          </a:ln>
+          <a:effectLst/>
+        </p:spPr>
+        <p:txBody>
+          <a:bodyPr rtlCol="0" anchor="ctr" wrap="square"/>
+          <a:lstStyle/>
+          <a:p>
+            <a:pPr algn="ctr"/>
+          </a:p>
+        </p:txBody>
+      </p:sp>
+      <p:sp>
+        <p:nvSpPr>
+          <p:cNvPr id="13" name="Oval 12"/>
+          <p:cNvSpPr/>
+          <p:nvPr/>
+        </p:nvSpPr>
+        <p:spPr>
+          <a:xfrm>
+            <a:off x="1390650" y="3829050"/>
+            <a:ext cx="533400" cy="533400"/>
+          </a:xfrm>
+          <a:prstGeom prst="ellipse">
+            <a:avLst/>
+          </a:prstGeom>
+          <a:solidFill>
+            <a:srgbClr val="0D2B5E"/>
+          </a:solidFill>
+          <a:ln>
+            <a:noFill/>
+          </a:ln>
+          <a:effectLst/>
+        </p:spPr>
+        <p:txBody>
+          <a:bodyPr rtlCol="0" anchor="ctr" wrap="square"/>
+          <a:lstStyle/>
+          <a:p>
+            <a:pPr algn="ctr"/>
+          </a:p>
+        </p:txBody>
+      </p:sp>
+      <p:sp>
+        <p:nvSpPr>
+          <p:cNvPr id="14" name="TextBox 13"/>
+          <p:cNvSpPr txBox="1"/>
+          <p:nvPr/>
+        </p:nvSpPr>
+        <p:spPr>
+          <a:xfrm>
+            <a:off x="1390650" y="3952875"/>
+            <a:ext cx="533400" cy="323850"/>
+          </a:xfrm>
+          <a:prstGeom prst="rect">
+            <a:avLst/>
+          </a:prstGeom>
+          <a:noFill/>
+        </p:spPr>
+        <p:txBody>
+          <a:bodyPr wrap="square" lIns="0" rIns="0" tIns="0" bIns="0" anchor="t">
+            <a:spAutoFit/>
+          </a:bodyPr>
+          <a:lstStyle/>
+          <a:p>
+            <a:pPr algn="ctr">
+              <a:lnSpc>
+                <a:spcPct val="100000"/>
+              </a:lnSpc>
+            </a:pPr>
+            <a:r>
+              <a:rPr sz="2100" b="1">
+                <a:solidFill>
+                  <a:srgbClr val="FFFFFF"/>
+                </a:solidFill>
+                <a:latin typeface="Pretendard"/>
+                <a:ea typeface="Pretendard"/>
+                <a:cs typeface="Pretendard"/>
+              </a:rPr>
+              <a:t>2</a:t>
+            </a:r>
+          </a:p>
+        </p:txBody>
+      </p:sp>
+      <p:sp>
+        <p:nvSpPr>
+          <p:cNvPr id="15" name="TextBox 14"/>
+          <p:cNvSpPr txBox="1"/>
+          <p:nvPr/>
+        </p:nvSpPr>
+        <p:spPr>
+          <a:xfrm>
+            <a:off x="2190750" y="3724275"/>
+            <a:ext cx="14573250" cy="742950"/>
+          </a:xfrm>
+          <a:prstGeom prst="rect">
+            <a:avLst/>
+          </a:prstGeom>
+          <a:noFill/>
+        </p:spPr>
+        <p:txBody>
+          <a:bodyPr wrap="square" lIns="0" rIns="0" tIns="0" bIns="0" anchor="ctr">
+            <a:spAutoFit/>
+          </a:bodyPr>
+          <a:lstStyle/>
+          <a:p>
+            <a:pPr algn="l">
+              <a:lnSpc>
+                <a:spcPct val="100000"/>
+              </a:lnSpc>
+            </a:pPr>
+            <a:r>
+              <a:rPr sz="2100" b="1">
+                <a:solidFill>
+                  <a:srgbClr val="0D2B5E"/>
+                </a:solidFill>
+                <a:latin typeface="Pretendard"/>
+                <a:ea typeface="Pretendard"/>
+                <a:cs typeface="Pretendard"/>
+              </a:rPr>
+              <a:t>INSERT: 1 row · count 7 · Spark 끝 줄에 8 jung</a:t>
+            </a:r>
+          </a:p>
+        </p:txBody>
+      </p:sp>
+      <p:sp>
+        <p:nvSpPr>
+          <p:cNvPr id="16" name="Rounded Rectangle 15"/>
+          <p:cNvSpPr/>
+          <p:nvPr/>
+        </p:nvSpPr>
+        <p:spPr>
+          <a:xfrm>
+            <a:off x="1143000" y="4581525"/>
+            <a:ext cx="16002000" cy="742950"/>
+          </a:xfrm>
+          <a:prstGeom prst="roundRect">
+            <a:avLst>
+              <a:gd name="adj" fmla="val 6410"/>
+            </a:avLst>
+          </a:prstGeom>
+          <a:solidFill>
+            <a:srgbClr val="FAFBFD"/>
+          </a:solidFill>
+          <a:ln w="9525">
+            <a:solidFill>
+              <a:srgbClr val="DCE1E8"/>
+            </a:solidFill>
+          </a:ln>
+          <a:effectLst/>
+        </p:spPr>
+        <p:txBody>
+          <a:bodyPr rtlCol="0" anchor="ctr" wrap="square"/>
+          <a:lstStyle/>
+          <a:p>
+            <a:pPr algn="ctr"/>
+          </a:p>
+        </p:txBody>
+      </p:sp>
+      <p:sp>
+        <p:nvSpPr>
+          <p:cNvPr id="17" name="Oval 16"/>
+          <p:cNvSpPr/>
+          <p:nvPr/>
+        </p:nvSpPr>
+        <p:spPr>
+          <a:xfrm>
+            <a:off x="1390650" y="4686300"/>
+            <a:ext cx="533400" cy="533400"/>
+          </a:xfrm>
+          <a:prstGeom prst="ellipse">
+            <a:avLst/>
+          </a:prstGeom>
+          <a:solidFill>
+            <a:srgbClr val="0D2B5E"/>
+          </a:solidFill>
+          <a:ln>
+            <a:noFill/>
+          </a:ln>
+          <a:effectLst/>
+        </p:spPr>
+        <p:txBody>
+          <a:bodyPr rtlCol="0" anchor="ctr" wrap="square"/>
+          <a:lstStyle/>
+          <a:p>
+            <a:pPr algn="ctr"/>
+          </a:p>
+        </p:txBody>
+      </p:sp>
+      <p:sp>
+        <p:nvSpPr>
+          <p:cNvPr id="18" name="TextBox 17"/>
+          <p:cNvSpPr txBox="1"/>
+          <p:nvPr/>
+        </p:nvSpPr>
+        <p:spPr>
+          <a:xfrm>
+            <a:off x="1390650" y="4810125"/>
+            <a:ext cx="533400" cy="323850"/>
+          </a:xfrm>
+          <a:prstGeom prst="rect">
+            <a:avLst/>
+          </a:prstGeom>
+          <a:noFill/>
+        </p:spPr>
+        <p:txBody>
+          <a:bodyPr wrap="square" lIns="0" rIns="0" tIns="0" bIns="0" anchor="t">
+            <a:spAutoFit/>
+          </a:bodyPr>
+          <a:lstStyle/>
+          <a:p>
+            <a:pPr algn="ctr">
+              <a:lnSpc>
+                <a:spcPct val="100000"/>
+              </a:lnSpc>
+            </a:pPr>
+            <a:r>
+              <a:rPr sz="2100" b="1">
+                <a:solidFill>
+                  <a:srgbClr val="FFFFFF"/>
+                </a:solidFill>
+                <a:latin typeface="Pretendard"/>
+                <a:ea typeface="Pretendard"/>
+                <a:cs typeface="Pretendard"/>
+              </a:rPr>
+              <a:t>3</a:t>
+            </a:r>
+          </a:p>
+        </p:txBody>
+      </p:sp>
+      <p:sp>
+        <p:nvSpPr>
+          <p:cNvPr id="19" name="TextBox 18"/>
+          <p:cNvSpPr txBox="1"/>
+          <p:nvPr/>
+        </p:nvSpPr>
+        <p:spPr>
+          <a:xfrm>
+            <a:off x="2190750" y="4581525"/>
+            <a:ext cx="14573250" cy="742950"/>
+          </a:xfrm>
+          <a:prstGeom prst="rect">
+            <a:avLst/>
+          </a:prstGeom>
+          <a:noFill/>
+        </p:spPr>
+        <p:txBody>
+          <a:bodyPr wrap="square" lIns="0" rIns="0" tIns="0" bIns="0" anchor="ctr">
+            <a:spAutoFit/>
+          </a:bodyPr>
+          <a:lstStyle/>
+          <a:p>
+            <a:pPr algn="l">
+              <a:lnSpc>
+                <a:spcPct val="100000"/>
+              </a:lnSpc>
+            </a:pPr>
+            <a:r>
+              <a:rPr sz="2100" b="1">
+                <a:solidFill>
+                  <a:srgbClr val="0D2B5E"/>
+                </a:solidFill>
+                <a:latin typeface="Pretendard"/>
+                <a:ea typeface="Pretendard"/>
+                <a:cs typeface="Pretendard"/>
+              </a:rPr>
+              <a:t>DESCRIBE 끝에 memo varchar · 4 | choi | vip 한 줄</a:t>
+            </a:r>
+          </a:p>
+        </p:txBody>
+      </p:sp>
+      <p:sp>
+        <p:nvSpPr>
+          <p:cNvPr id="20" name="Rounded Rectangle 19"/>
+          <p:cNvSpPr/>
+          <p:nvPr/>
+        </p:nvSpPr>
+        <p:spPr>
+          <a:xfrm>
+            <a:off x="1143000" y="5438775"/>
+            <a:ext cx="16002000" cy="742950"/>
+          </a:xfrm>
+          <a:prstGeom prst="roundRect">
+            <a:avLst>
+              <a:gd name="adj" fmla="val 6410"/>
+            </a:avLst>
+          </a:prstGeom>
+          <a:solidFill>
+            <a:srgbClr val="FAFBFD"/>
+          </a:solidFill>
+          <a:ln w="9525">
+            <a:solidFill>
+              <a:srgbClr val="DCE1E8"/>
+            </a:solidFill>
+          </a:ln>
+          <a:effectLst/>
+        </p:spPr>
+        <p:txBody>
+          <a:bodyPr rtlCol="0" anchor="ctr" wrap="square"/>
+          <a:lstStyle/>
+          <a:p>
+            <a:pPr algn="ctr"/>
+          </a:p>
+        </p:txBody>
+      </p:sp>
+      <p:sp>
+        <p:nvSpPr>
+          <p:cNvPr id="21" name="Oval 20"/>
+          <p:cNvSpPr/>
+          <p:nvPr/>
+        </p:nvSpPr>
+        <p:spPr>
+          <a:xfrm>
+            <a:off x="1390650" y="5543550"/>
+            <a:ext cx="533400" cy="533400"/>
+          </a:xfrm>
+          <a:prstGeom prst="ellipse">
+            <a:avLst/>
+          </a:prstGeom>
+          <a:solidFill>
+            <a:srgbClr val="0D2B5E"/>
+          </a:solidFill>
+          <a:ln>
+            <a:noFill/>
+          </a:ln>
+          <a:effectLst/>
+        </p:spPr>
+        <p:txBody>
+          <a:bodyPr rtlCol="0" anchor="ctr" wrap="square"/>
+          <a:lstStyle/>
+          <a:p>
+            <a:pPr algn="ctr"/>
+          </a:p>
+        </p:txBody>
+      </p:sp>
+      <p:sp>
+        <p:nvSpPr>
+          <p:cNvPr id="22" name="TextBox 21"/>
+          <p:cNvSpPr txBox="1"/>
+          <p:nvPr/>
+        </p:nvSpPr>
+        <p:spPr>
+          <a:xfrm>
+            <a:off x="1390650" y="5667375"/>
+            <a:ext cx="533400" cy="323850"/>
+          </a:xfrm>
+          <a:prstGeom prst="rect">
+            <a:avLst/>
+          </a:prstGeom>
+          <a:noFill/>
+        </p:spPr>
+        <p:txBody>
+          <a:bodyPr wrap="square" lIns="0" rIns="0" tIns="0" bIns="0" anchor="t">
+            <a:spAutoFit/>
+          </a:bodyPr>
+          <a:lstStyle/>
+          <a:p>
+            <a:pPr algn="ctr">
+              <a:lnSpc>
+                <a:spcPct val="100000"/>
+              </a:lnSpc>
+            </a:pPr>
+            <a:r>
+              <a:rPr sz="2100" b="1">
+                <a:solidFill>
+                  <a:srgbClr val="FFFFFF"/>
+                </a:solidFill>
+                <a:latin typeface="Pretendard"/>
+                <a:ea typeface="Pretendard"/>
+                <a:cs typeface="Pretendard"/>
+              </a:rPr>
+              <a:t>4</a:t>
+            </a:r>
+          </a:p>
+        </p:txBody>
+      </p:sp>
+      <p:sp>
+        <p:nvSpPr>
+          <p:cNvPr id="23" name="TextBox 22"/>
+          <p:cNvSpPr txBox="1"/>
+          <p:nvPr/>
+        </p:nvSpPr>
+        <p:spPr>
+          <a:xfrm>
+            <a:off x="2190750" y="5438775"/>
+            <a:ext cx="14573250" cy="742950"/>
+          </a:xfrm>
+          <a:prstGeom prst="rect">
+            <a:avLst/>
+          </a:prstGeom>
+          <a:noFill/>
+        </p:spPr>
+        <p:txBody>
+          <a:bodyPr wrap="square" lIns="0" rIns="0" tIns="0" bIns="0" anchor="ctr">
+            <a:spAutoFit/>
+          </a:bodyPr>
+          <a:lstStyle/>
+          <a:p>
+            <a:pPr algn="l">
+              <a:lnSpc>
+                <a:spcPct val="100000"/>
+              </a:lnSpc>
+            </a:pPr>
+            <a:r>
+              <a:rPr sz="2100" b="1">
+                <a:solidFill>
+                  <a:srgbClr val="0D2B5E"/>
+                </a:solidFill>
+                <a:latin typeface="Pretendard"/>
+                <a:ea typeface="Pretendard"/>
+                <a:cs typeface="Pretendard"/>
+              </a:rPr>
+              <a:t>스냅샷 개수가 Spark · Trino 에서 같다(실측 9 · "9")</a:t>
+            </a:r>
+          </a:p>
+        </p:txBody>
+      </p:sp>
+      <p:sp>
+        <p:nvSpPr>
+          <p:cNvPr id="24" name="Rounded Rectangle 23"/>
+          <p:cNvSpPr/>
+          <p:nvPr/>
+        </p:nvSpPr>
+        <p:spPr>
+          <a:xfrm>
+            <a:off x="1143000" y="6296025"/>
+            <a:ext cx="16002000" cy="742950"/>
+          </a:xfrm>
+          <a:prstGeom prst="roundRect">
+            <a:avLst>
+              <a:gd name="adj" fmla="val 6410"/>
+            </a:avLst>
+          </a:prstGeom>
+          <a:solidFill>
+            <a:srgbClr val="FAFBFD"/>
+          </a:solidFill>
+          <a:ln w="9525">
+            <a:solidFill>
+              <a:srgbClr val="DCE1E8"/>
+            </a:solidFill>
+          </a:ln>
+          <a:effectLst/>
+        </p:spPr>
+        <p:txBody>
+          <a:bodyPr rtlCol="0" anchor="ctr" wrap="square"/>
+          <a:lstStyle/>
+          <a:p>
+            <a:pPr algn="ctr"/>
+          </a:p>
+        </p:txBody>
+      </p:sp>
+      <p:sp>
+        <p:nvSpPr>
+          <p:cNvPr id="25" name="Oval 24"/>
+          <p:cNvSpPr/>
+          <p:nvPr/>
+        </p:nvSpPr>
+        <p:spPr>
+          <a:xfrm>
+            <a:off x="1390650" y="6400800"/>
+            <a:ext cx="533400" cy="533400"/>
+          </a:xfrm>
+          <a:prstGeom prst="ellipse">
+            <a:avLst/>
+          </a:prstGeom>
+          <a:solidFill>
+            <a:srgbClr val="0D2B5E"/>
+          </a:solidFill>
+          <a:ln>
+            <a:noFill/>
+          </a:ln>
+          <a:effectLst/>
+        </p:spPr>
+        <p:txBody>
+          <a:bodyPr rtlCol="0" anchor="ctr" wrap="square"/>
+          <a:lstStyle/>
+          <a:p>
+            <a:pPr algn="ctr"/>
+          </a:p>
+        </p:txBody>
+      </p:sp>
+      <p:sp>
+        <p:nvSpPr>
+          <p:cNvPr id="26" name="TextBox 25"/>
+          <p:cNvSpPr txBox="1"/>
+          <p:nvPr/>
+        </p:nvSpPr>
+        <p:spPr>
+          <a:xfrm>
+            <a:off x="1390650" y="6524625"/>
+            <a:ext cx="533400" cy="323850"/>
+          </a:xfrm>
+          <a:prstGeom prst="rect">
+            <a:avLst/>
+          </a:prstGeom>
+          <a:noFill/>
+        </p:spPr>
+        <p:txBody>
+          <a:bodyPr wrap="square" lIns="0" rIns="0" tIns="0" bIns="0" anchor="t">
+            <a:spAutoFit/>
+          </a:bodyPr>
+          <a:lstStyle/>
+          <a:p>
+            <a:pPr algn="ctr">
+              <a:lnSpc>
+                <a:spcPct val="100000"/>
+              </a:lnSpc>
+            </a:pPr>
+            <a:r>
+              <a:rPr sz="2100" b="1">
+                <a:solidFill>
+                  <a:srgbClr val="FFFFFF"/>
+                </a:solidFill>
+                <a:latin typeface="Pretendard"/>
+                <a:ea typeface="Pretendard"/>
+                <a:cs typeface="Pretendard"/>
+              </a:rPr>
+              <a:t>5</a:t>
+            </a:r>
+          </a:p>
+        </p:txBody>
+      </p:sp>
+      <p:sp>
+        <p:nvSpPr>
+          <p:cNvPr id="27" name="TextBox 26"/>
+          <p:cNvSpPr txBox="1"/>
+          <p:nvPr/>
+        </p:nvSpPr>
+        <p:spPr>
+          <a:xfrm>
+            <a:off x="2190750" y="6296025"/>
+            <a:ext cx="14573250" cy="742950"/>
+          </a:xfrm>
+          <a:prstGeom prst="rect">
+            <a:avLst/>
+          </a:prstGeom>
+          <a:noFill/>
+        </p:spPr>
+        <p:txBody>
+          <a:bodyPr wrap="square" lIns="0" rIns="0" tIns="0" bIns="0" anchor="ctr">
+            <a:spAutoFit/>
+          </a:bodyPr>
+          <a:lstStyle/>
+          <a:p>
+            <a:pPr algn="l">
+              <a:lnSpc>
+                <a:spcPct val="100000"/>
+              </a:lnSpc>
+            </a:pPr>
+            <a:r>
+              <a:rPr sz="2100" b="1">
+                <a:solidFill>
+                  <a:srgbClr val="0D2B5E"/>
+                </a:solidFill>
+                <a:latin typeface="Pretendard"/>
+                <a:ea typeface="Pretendard"/>
+                <a:cs typeface="Pretendard"/>
+              </a:rPr>
+              <a:t>iceberg · iceberg2 모두 count 7 — 지우고 restart 했다</a:t>
+            </a:r>
+          </a:p>
+        </p:txBody>
+      </p:sp>
+      <p:sp>
+        <p:nvSpPr>
+          <p:cNvPr id="28" name="Rounded Rectangle 27"/>
+          <p:cNvSpPr/>
+          <p:nvPr/>
+        </p:nvSpPr>
+        <p:spPr>
+          <a:xfrm>
+            <a:off x="1143000" y="7153275"/>
+            <a:ext cx="16002000" cy="742950"/>
+          </a:xfrm>
+          <a:prstGeom prst="roundRect">
+            <a:avLst>
+              <a:gd name="adj" fmla="val 6410"/>
+            </a:avLst>
+          </a:prstGeom>
+          <a:solidFill>
+            <a:srgbClr val="FAFBFD"/>
+          </a:solidFill>
+          <a:ln w="9525">
+            <a:solidFill>
+              <a:srgbClr val="DCE1E8"/>
+            </a:solidFill>
+          </a:ln>
+          <a:effectLst/>
+        </p:spPr>
+        <p:txBody>
+          <a:bodyPr rtlCol="0" anchor="ctr" wrap="square"/>
+          <a:lstStyle/>
+          <a:p>
+            <a:pPr algn="ctr"/>
+          </a:p>
+        </p:txBody>
+      </p:sp>
+      <p:sp>
+        <p:nvSpPr>
+          <p:cNvPr id="29" name="Oval 28"/>
+          <p:cNvSpPr/>
+          <p:nvPr/>
+        </p:nvSpPr>
+        <p:spPr>
+          <a:xfrm>
+            <a:off x="1390650" y="7258050"/>
+            <a:ext cx="533400" cy="533400"/>
+          </a:xfrm>
+          <a:prstGeom prst="ellipse">
+            <a:avLst/>
+          </a:prstGeom>
+          <a:solidFill>
+            <a:srgbClr val="0D2B5E"/>
+          </a:solidFill>
+          <a:ln>
+            <a:noFill/>
+          </a:ln>
+          <a:effectLst/>
+        </p:spPr>
+        <p:txBody>
+          <a:bodyPr rtlCol="0" anchor="ctr" wrap="square"/>
+          <a:lstStyle/>
+          <a:p>
+            <a:pPr algn="ctr"/>
+          </a:p>
+        </p:txBody>
+      </p:sp>
+      <p:sp>
+        <p:nvSpPr>
+          <p:cNvPr id="30" name="TextBox 29"/>
+          <p:cNvSpPr txBox="1"/>
+          <p:nvPr/>
+        </p:nvSpPr>
+        <p:spPr>
+          <a:xfrm>
+            <a:off x="1390650" y="7381875"/>
+            <a:ext cx="533400" cy="323850"/>
+          </a:xfrm>
+          <a:prstGeom prst="rect">
+            <a:avLst/>
+          </a:prstGeom>
+          <a:noFill/>
+        </p:spPr>
+        <p:txBody>
+          <a:bodyPr wrap="square" lIns="0" rIns="0" tIns="0" bIns="0" anchor="t">
+            <a:spAutoFit/>
+          </a:bodyPr>
+          <a:lstStyle/>
+          <a:p>
+            <a:pPr algn="ctr">
+              <a:lnSpc>
+                <a:spcPct val="100000"/>
+              </a:lnSpc>
+            </a:pPr>
+            <a:r>
+              <a:rPr sz="2100" b="1">
+                <a:solidFill>
+                  <a:srgbClr val="FFFFFF"/>
+                </a:solidFill>
+                <a:latin typeface="Pretendard"/>
+                <a:ea typeface="Pretendard"/>
+                <a:cs typeface="Pretendard"/>
+              </a:rPr>
+              <a:t>6</a:t>
+            </a:r>
+          </a:p>
+        </p:txBody>
+      </p:sp>
+      <p:sp>
+        <p:nvSpPr>
+          <p:cNvPr id="31" name="TextBox 30"/>
+          <p:cNvSpPr txBox="1"/>
+          <p:nvPr/>
+        </p:nvSpPr>
+        <p:spPr>
+          <a:xfrm>
+            <a:off x="2190750" y="7153275"/>
+            <a:ext cx="14573250" cy="742950"/>
+          </a:xfrm>
+          <a:prstGeom prst="rect">
+            <a:avLst/>
+          </a:prstGeom>
+          <a:noFill/>
+        </p:spPr>
+        <p:txBody>
+          <a:bodyPr wrap="square" lIns="0" rIns="0" tIns="0" bIns="0" anchor="ctr">
+            <a:spAutoFit/>
+          </a:bodyPr>
+          <a:lstStyle/>
+          <a:p>
+            <a:pPr algn="l">
+              <a:lnSpc>
+                <a:spcPct val="100000"/>
+              </a:lnSpc>
+            </a:pPr>
+            <a:r>
+              <a:rPr sz="2100" b="1">
+                <a:solidFill>
+                  <a:srgbClr val="0D2B5E"/>
+                </a:solidFill>
+                <a:latin typeface="Pretendard"/>
+                <a:ea typeface="Pretendard"/>
+                <a:cs typeface="Pretendard"/>
+              </a:rPr>
+              <a:t>CANNOT_SAFELY_CAST 한 줄 뒤에도 Trino count "7"</a:t>
+            </a:r>
+          </a:p>
+        </p:txBody>
+      </p:sp>
+      <p:sp>
+        <p:nvSpPr>
+          <p:cNvPr id="32" name="Rectangle 31"/>
+          <p:cNvSpPr/>
+          <p:nvPr/>
+        </p:nvSpPr>
+        <p:spPr>
+          <a:xfrm>
+            <a:off x="1143000" y="8058150"/>
+            <a:ext cx="16002000" cy="9525"/>
+          </a:xfrm>
+          <a:prstGeom prst="rect">
+            <a:avLst/>
+          </a:prstGeom>
+          <a:solidFill>
+            <a:srgbClr val="DCE1E8"/>
+          </a:solidFill>
+          <a:ln>
+            <a:noFill/>
+          </a:ln>
+          <a:effectLst/>
+        </p:spPr>
+        <p:txBody>
+          <a:bodyPr rtlCol="0" anchor="ctr" wrap="square"/>
+          <a:lstStyle/>
+          <a:p>
+            <a:pPr algn="ctr"/>
+          </a:p>
+        </p:txBody>
+      </p:sp>
+      <p:sp>
+        <p:nvSpPr>
+          <p:cNvPr id="33" name="TextBox 32"/>
+          <p:cNvSpPr txBox="1"/>
+          <p:nvPr/>
+        </p:nvSpPr>
+        <p:spPr>
+          <a:xfrm>
+            <a:off x="1143000" y="8248650"/>
+            <a:ext cx="13335000" cy="323850"/>
+          </a:xfrm>
+          <a:prstGeom prst="rect">
+            <a:avLst/>
+          </a:prstGeom>
+          <a:noFill/>
+        </p:spPr>
+        <p:txBody>
+          <a:bodyPr wrap="square" lIns="0" rIns="0" tIns="0" bIns="0" anchor="t">
+            <a:spAutoFit/>
+          </a:bodyPr>
+          <a:lstStyle/>
+          <a:p>
+            <a:pPr algn="l">
+              <a:lnSpc>
+                <a:spcPct val="100000"/>
+              </a:lnSpc>
+            </a:pPr>
+            <a:r>
+              <a:rPr sz="1725" b="0">
+                <a:solidFill>
+                  <a:srgbClr val="7D7D7D"/>
+                </a:solidFill>
+                <a:latin typeface="Pretendard"/>
+                <a:ea typeface="Pretendard"/>
+                <a:cs typeface="Pretendard"/>
+              </a:rPr>
+              <a:t>데이터 엔지니어링 &amp; RAG 파이프라인 160H · 4-5 · 실습 1.5H</a:t>
+            </a:r>
+          </a:p>
+        </p:txBody>
+      </p:sp>
+      <p:sp>
+        <p:nvSpPr>
+          <p:cNvPr id="34" name="TextBox 33"/>
+          <p:cNvSpPr txBox="1"/>
+          <p:nvPr/>
+        </p:nvSpPr>
+        <p:spPr>
+          <a:xfrm>
+            <a:off x="15240000" y="8248650"/>
+            <a:ext cx="1905000" cy="323850"/>
+          </a:xfrm>
+          <a:prstGeom prst="rect">
+            <a:avLst/>
+          </a:prstGeom>
+          <a:noFill/>
+        </p:spPr>
+        <p:txBody>
+          <a:bodyPr wrap="square" lIns="0" rIns="0" tIns="0" bIns="0" anchor="t">
+            <a:spAutoFit/>
+          </a:bodyPr>
+          <a:lstStyle/>
+          <a:p>
+            <a:pPr algn="r">
+              <a:lnSpc>
+                <a:spcPct val="100000"/>
+              </a:lnSpc>
+            </a:pPr>
+            <a:r>
+              <a:rPr sz="1725" b="0">
+                <a:solidFill>
+                  <a:srgbClr val="7D7D7D"/>
+                </a:solidFill>
+                <a:latin typeface="Pretendard"/>
+                <a:ea typeface="Pretendard"/>
+                <a:cs typeface="Pretendard"/>
+              </a:rPr>
+              <a:t>10</a:t>
+            </a:r>
+          </a:p>
+        </p:txBody>
+      </p:sp>
+    </p:spTree>
+  </p:cSld>
+  <p:clrMapOvr>
+    <a:masterClrMapping/>
+  </p:clrMapOvr>
+</p:sld>
+</file>
+
+<file path=ppt/slides/slide11.xml><?xml version="1.0" encoding="utf-8"?>
+<p:sld xmlns:a="http://schemas.openxmlformats.org/drawingml/2006/main" xmlns:p="http://schemas.openxmlformats.org/presentationml/2006/main" xmlns:r="http://schemas.openxmlformats.org/officeDocument/2006/relationships">
+  <p:cSld>
+    <p:spTree>
+      <p:nvGrpSpPr>
+        <p:cNvPr id="1" name=""/>
+        <p:cNvGrpSpPr/>
+        <p:nvPr/>
+      </p:nvGrpSpPr>
+      <p:grpSpPr/>
+      <p:sp>
+        <p:nvSpPr>
+          <p:cNvPr id="2" name="deckgen:decor"/>
           <p:cNvSpPr/>
           <p:nvPr/>
         </p:nvSpPr>
@@ -3629,7 +4838,7 @@
       </p:sp>
       <p:sp>
         <p:nvSpPr>
-          <p:cNvPr id="3" name="Oval 2"/>
+          <p:cNvPr id="3" name="deckgen:decor"/>
           <p:cNvSpPr/>
           <p:nvPr/>
         </p:nvSpPr>
@@ -3805,7 +5014,7 @@
                 <a:ea typeface="Pretendard"/>
                 <a:cs typeface="Pretendard"/>
               </a:rPr>
-              <a:t>검증에 쓴 쿼리를 한 파일로 정리하고, 아키텍처 다이어그램을 그려 제출합니다</a:t>
+              <a:t>검증에 쓴 쿼리를 한 파일로 정리하고, 아키텍처 다이어그램을 그려 제출합니다(마감 10-23 23:59)</a:t>
             </a:r>
           </a:p>
         </p:txBody>
@@ -4037,7 +5246,7 @@
                 <a:ea typeface="Pretendard"/>
                 <a:cs typeface="Pretendard"/>
               </a:rPr>
-              <a:t>구성 요소 5개·포트 4개 다이어그램</a:t>
+              <a:t>구성 요소 5개 · 포트 다이어그램</a:t>
             </a:r>
           </a:p>
         </p:txBody>
@@ -4153,7 +5362,7 @@
                 <a:ea typeface="Pretendard"/>
                 <a:cs typeface="Pretendard"/>
               </a:rPr>
-              <a:t>「없으면」열이 있는 설명 문서</a:t>
+              <a:t>「없으면」 열이 있는 설명 문서</a:t>
             </a:r>
           </a:p>
         </p:txBody>
@@ -4381,7 +5590,7 @@
                 <a:ea typeface="Pretendard"/>
                 <a:cs typeface="Pretendard"/>
               </a:rPr>
-              <a:t>count 7 · 임시 카탈로그는 지운 상태</a:t>
+              <a:t>count 7 · iceberg2 는 지운 상태</a:t>
             </a:r>
           </a:p>
         </p:txBody>
@@ -4406,7 +5615,7 @@
       <p:grpSpPr/>
       <p:sp>
         <p:nvSpPr>
-          <p:cNvPr id="2" name="Oval 1"/>
+          <p:cNvPr id="2" name="deckgen:decor"/>
           <p:cNvSpPr/>
           <p:nvPr/>
         </p:nvSpPr>
@@ -4436,7 +5645,7 @@
       </p:sp>
       <p:sp>
         <p:nvSpPr>
-          <p:cNvPr id="3" name="Oval 2"/>
+          <p:cNvPr id="3" name="deckgen:decor"/>
           <p:cNvSpPr/>
           <p:nvPr/>
         </p:nvSpPr>
@@ -4466,7 +5675,7 @@
       </p:sp>
       <p:sp>
         <p:nvSpPr>
-          <p:cNvPr id="4" name="Oval 3"/>
+          <p:cNvPr id="4" name="deckgen:decor"/>
           <p:cNvSpPr/>
           <p:nvPr/>
         </p:nvSpPr>
@@ -4747,7 +5956,7 @@
                 <a:ea typeface="Pretendard"/>
                 <a:cs typeface="Pretendard"/>
               </a:rPr>
-              <a:t>컨테이너 5개 Up 과 두 엔진의 count 6 을 확인하고 시작한다</a:t>
+              <a:t>다섯 컨테이너 Up · Trino "6" · Spark 6 을 확인하고 시작한다</a:t>
             </a:r>
           </a:p>
         </p:txBody>
@@ -5185,7 +6394,7 @@
                 <a:ea typeface="Pretendard"/>
                 <a:cs typeface="Pretendard"/>
               </a:rPr>
-              <a:t>임시 카탈로그와 실패한 쓰기로 「같은 카탈로그」의 뜻을 실감한다</a:t>
+              <a:t>이름만 다른 카탈로그와 실패한 쓰기로 「같은 테이블」을 확인한다</a:t>
             </a:r>
           </a:p>
         </p:txBody>
@@ -5260,7 +6469,7 @@
                 <a:ea typeface="Pretendard"/>
                 <a:cs typeface="Pretendard"/>
               </a:rPr>
-              <a:t>6단계의 확인 포인트를 다 지나면 두 엔진이 완전히 같은 메타데이터를 보고 있다는 뜻입니다</a:t>
+              <a:t>여섯 단계의 확인 포인트를 다 지나면 두 엔진이 같은 메타데이터를 본다는 뜻입니다</a:t>
             </a:r>
           </a:p>
         </p:txBody>
@@ -5397,7 +6606,7 @@
       <p:grpSpPr/>
       <p:sp>
         <p:nvSpPr>
-          <p:cNvPr id="2" name="Oval 1"/>
+          <p:cNvPr id="2" name="deckgen:decor"/>
           <p:cNvSpPr/>
           <p:nvPr/>
         </p:nvSpPr>
@@ -5427,7 +6636,7 @@
       </p:sp>
       <p:sp>
         <p:nvSpPr>
-          <p:cNvPr id="3" name="Oval 2"/>
+          <p:cNvPr id="3" name="deckgen:decor"/>
           <p:cNvSpPr/>
           <p:nvPr/>
         </p:nvSpPr>
@@ -5457,7 +6666,7 @@
       </p:sp>
       <p:sp>
         <p:nvSpPr>
-          <p:cNvPr id="4" name="Oval 3"/>
+          <p:cNvPr id="4" name="deckgen:decor"/>
           <p:cNvSpPr/>
           <p:nvPr/>
         </p:nvSpPr>
@@ -5562,7 +6771,7 @@
                 <a:ea typeface="Pretendard"/>
                 <a:cs typeface="Pretendard"/>
               </a:rPr>
-              <a:t>여섯 단계 — spark-sql 과 Trino CLI 를 번갈아</a:t>
+              <a:t>여섯 단계 — 셸 · trino&gt; · spark-sql 을 오가며</a:t>
             </a:r>
           </a:p>
         </p:txBody>
@@ -5633,7 +6842,7 @@
                 <a:ea typeface="Pretendard"/>
                 <a:cs typeface="Pretendard"/>
               </a:rPr>
-              <a:t>~/lakehouse 에서 docker compose exec 로 두 엔진에 번갈아 들어갑니다</a:t>
+              <a:t>~/lakehouse 에서 시작합니다 — 상자의 [Trino CLI] 는 trino&gt; 안, [Spark] 는 셸에서</a:t>
             </a:r>
           </a:p>
         </p:txBody>
@@ -5779,7 +6988,7 @@
                 <a:ea typeface="Pretendard"/>
                 <a:cs typeface="Pretendard"/>
               </a:rPr>
-              <a:t>compose ps</a:t>
+              <a:t>다섯 Up</a:t>
             </a:r>
           </a:p>
           <a:p>
@@ -5797,7 +7006,7 @@
                 <a:ea typeface="Pretendard"/>
                 <a:cs typeface="Pretendard"/>
               </a:rPr>
-              <a:t>count 6 · 6</a:t>
+              <a:t>"6" · 6</a:t>
             </a:r>
           </a:p>
         </p:txBody>
@@ -5943,7 +7152,7 @@
                 <a:ea typeface="Pretendard"/>
                 <a:cs typeface="Pretendard"/>
               </a:rPr>
-              <a:t>INSERT 8행</a:t>
+              <a:t>8번 행 INSERT</a:t>
             </a:r>
           </a:p>
           <a:p>
@@ -6107,7 +7316,7 @@
                 <a:ea typeface="Pretendard"/>
                 <a:cs typeface="Pretendard"/>
               </a:rPr>
-              <a:t>ADD COLUMN</a:t>
+              <a:t>memo 컬럼</a:t>
             </a:r>
           </a:p>
           <a:p>
@@ -6125,7 +7334,7 @@
                 <a:ea typeface="Pretendard"/>
                 <a:cs typeface="Pretendard"/>
               </a:rPr>
-              <a:t>memo = vip</a:t>
+              <a:t>4 choi vip</a:t>
             </a:r>
           </a:p>
         </p:txBody>
@@ -6271,7 +7480,7 @@
                 <a:ea typeface="Pretendard"/>
                 <a:cs typeface="Pretendard"/>
               </a:rPr>
-              <a:t>$snapshots</a:t>
+              <a:t>orders$snapshots</a:t>
             </a:r>
           </a:p>
           <a:p>
@@ -6435,7 +7644,7 @@
                 <a:ea typeface="Pretendard"/>
                 <a:cs typeface="Pretendard"/>
               </a:rPr>
-              <a:t>임시 카탈로그</a:t>
+              <a:t>iceberg2</a:t>
             </a:r>
           </a:p>
           <a:p>
@@ -6590,7 +7799,7 @@
       <p:grpSpPr/>
       <p:sp>
         <p:nvSpPr>
-          <p:cNvPr id="2" name="Oval 1"/>
+          <p:cNvPr id="2" name="deckgen:decor"/>
           <p:cNvSpPr/>
           <p:nvPr/>
         </p:nvSpPr>
@@ -6620,7 +7829,7 @@
       </p:sp>
       <p:sp>
         <p:nvSpPr>
-          <p:cNvPr id="3" name="Oval 2"/>
+          <p:cNvPr id="3" name="deckgen:decor"/>
           <p:cNvSpPr/>
           <p:nvPr/>
         </p:nvSpPr>
@@ -6650,7 +7859,7 @@
       </p:sp>
       <p:sp>
         <p:nvSpPr>
-          <p:cNvPr id="4" name="Oval 3"/>
+          <p:cNvPr id="4" name="deckgen:decor"/>
           <p:cNvSpPr/>
           <p:nvPr/>
         </p:nvSpPr>
@@ -6714,7 +7923,7 @@
                 <a:ea typeface="Pretendard"/>
                 <a:cs typeface="Pretendard"/>
               </a:rPr>
-              <a:t>1단계</a:t>
+              <a:t>오늘 쓰는 창구</a:t>
             </a:r>
           </a:p>
         </p:txBody>
@@ -6755,7 +7964,7 @@
                 <a:ea typeface="Pretendard"/>
                 <a:cs typeface="Pretendard"/>
               </a:rPr>
-              <a:t>시작 상태 확인 — 5개 Up · count 6 과 6</a:t>
+              <a:t>trino&gt; · spark-sql · 한 줄 실행</a:t>
             </a:r>
           </a:p>
         </p:txBody>
@@ -6799,7 +8008,7 @@
         <p:spPr>
           <a:xfrm>
             <a:off x="1143000" y="2781300"/>
-            <a:ext cx="970014" cy="571500"/>
+            <a:ext cx="1368742" cy="571500"/>
           </a:xfrm>
           <a:prstGeom prst="rect">
             <a:avLst/>
@@ -6829,7 +8038,7 @@
         <p:spPr>
           <a:xfrm>
             <a:off x="1143000" y="2781300"/>
-            <a:ext cx="970014" cy="571500"/>
+            <a:ext cx="1368742" cy="571500"/>
           </a:xfrm>
           <a:prstGeom prst="rect">
             <a:avLst/>
@@ -6856,7 +8065,7 @@
                 <a:ea typeface="Pretendard"/>
                 <a:cs typeface="Pretendard"/>
               </a:rPr>
-              <a:t>기동</a:t>
+              <a:t>Trino CLI</a:t>
             </a:r>
           </a:p>
         </p:txBody>
@@ -6869,8 +8078,8 @@
         </p:nvSpPr>
         <p:spPr>
           <a:xfrm>
-            <a:off x="2113014" y="2781300"/>
-            <a:ext cx="15031986" cy="571500"/>
+            <a:off x="2511742" y="2781300"/>
+            <a:ext cx="14633258" cy="571500"/>
           </a:xfrm>
           <a:prstGeom prst="rect">
             <a:avLst/>
@@ -6901,8 +8110,8 @@
         </p:nvSpPr>
         <p:spPr>
           <a:xfrm>
-            <a:off x="2265414" y="2781300"/>
-            <a:ext cx="14727186" cy="571500"/>
+            <a:off x="2664142" y="2781300"/>
+            <a:ext cx="14328458" cy="571500"/>
           </a:xfrm>
           <a:prstGeom prst="rect">
             <a:avLst/>
@@ -6929,7 +8138,7 @@
                 <a:ea typeface="Pretendard"/>
                 <a:cs typeface="Pretendard"/>
               </a:rPr>
-              <a:t>cd ~/lakehouse &amp;&amp; docker compose up -d</a:t>
+              <a:t>docker compose exec -it trino trino → trino&gt;</a:t>
             </a:r>
           </a:p>
         </p:txBody>
@@ -6943,7 +8152,7 @@
         <p:spPr>
           <a:xfrm>
             <a:off x="1143000" y="3429000"/>
-            <a:ext cx="970014" cy="571500"/>
+            <a:ext cx="1368742" cy="571500"/>
           </a:xfrm>
           <a:prstGeom prst="rect">
             <a:avLst/>
@@ -6973,7 +8182,7 @@
         <p:spPr>
           <a:xfrm>
             <a:off x="1143000" y="3429000"/>
-            <a:ext cx="970014" cy="571500"/>
+            <a:ext cx="1368742" cy="571500"/>
           </a:xfrm>
           <a:prstGeom prst="rect">
             <a:avLst/>
@@ -7000,7 +8209,7 @@
                 <a:ea typeface="Pretendard"/>
                 <a:cs typeface="Pretendard"/>
               </a:rPr>
-              <a:t>상태</a:t>
+              <a:t>나가기</a:t>
             </a:r>
           </a:p>
         </p:txBody>
@@ -7013,8 +8222,8 @@
         </p:nvSpPr>
         <p:spPr>
           <a:xfrm>
-            <a:off x="2113014" y="3429000"/>
-            <a:ext cx="15031986" cy="571500"/>
+            <a:off x="2511742" y="3429000"/>
+            <a:ext cx="14633258" cy="571500"/>
           </a:xfrm>
           <a:prstGeom prst="rect">
             <a:avLst/>
@@ -7045,8 +8254,8 @@
         </p:nvSpPr>
         <p:spPr>
           <a:xfrm>
-            <a:off x="2265414" y="3429000"/>
-            <a:ext cx="14727186" cy="571500"/>
+            <a:off x="2664142" y="3429000"/>
+            <a:ext cx="14328458" cy="571500"/>
           </a:xfrm>
           <a:prstGeom prst="rect">
             <a:avLst/>
@@ -7073,7 +8282,7 @@
                 <a:ea typeface="Pretendard"/>
                 <a:cs typeface="Pretendard"/>
               </a:rPr>
-              <a:t>docker compose ps — 5개 Up</a:t>
+              <a:t>trino&gt; 에서 quit</a:t>
             </a:r>
           </a:p>
         </p:txBody>
@@ -7087,7 +8296,7 @@
         <p:spPr>
           <a:xfrm>
             <a:off x="1143000" y="4076700"/>
-            <a:ext cx="970014" cy="571500"/>
+            <a:ext cx="1368742" cy="571500"/>
           </a:xfrm>
           <a:prstGeom prst="rect">
             <a:avLst/>
@@ -7117,7 +8326,7 @@
         <p:spPr>
           <a:xfrm>
             <a:off x="1143000" y="4076700"/>
-            <a:ext cx="970014" cy="571500"/>
+            <a:ext cx="1368742" cy="571500"/>
           </a:xfrm>
           <a:prstGeom prst="rect">
             <a:avLst/>
@@ -7144,7 +8353,7 @@
                 <a:ea typeface="Pretendard"/>
                 <a:cs typeface="Pretendard"/>
               </a:rPr>
-              <a:t>Spark</a:t>
+              <a:t>spark-sql</a:t>
             </a:r>
           </a:p>
         </p:txBody>
@@ -7157,8 +8366,8 @@
         </p:nvSpPr>
         <p:spPr>
           <a:xfrm>
-            <a:off x="2113014" y="4076700"/>
-            <a:ext cx="15031986" cy="571500"/>
+            <a:off x="2511742" y="4076700"/>
+            <a:ext cx="14633258" cy="571500"/>
           </a:xfrm>
           <a:prstGeom prst="rect">
             <a:avLst/>
@@ -7189,8 +8398,8 @@
         </p:nvSpPr>
         <p:spPr>
           <a:xfrm>
-            <a:off x="2265414" y="4076700"/>
-            <a:ext cx="14727186" cy="571500"/>
+            <a:off x="2664142" y="4076700"/>
+            <a:ext cx="14328458" cy="571500"/>
           </a:xfrm>
           <a:prstGeom prst="rect">
             <a:avLst/>
@@ -7217,7 +8426,7 @@
                 <a:ea typeface="Pretendard"/>
                 <a:cs typeface="Pretendard"/>
               </a:rPr>
-              <a:t>spark-sql -e "SELECT count(*) FROM demo.lakehouse.orders;"</a:t>
+              <a:t>docker compose exec spark-iceberg spark-sql</a:t>
             </a:r>
           </a:p>
         </p:txBody>
@@ -7231,7 +8440,7 @@
         <p:spPr>
           <a:xfrm>
             <a:off x="1143000" y="4724400"/>
-            <a:ext cx="970014" cy="571500"/>
+            <a:ext cx="1368742" cy="571500"/>
           </a:xfrm>
           <a:prstGeom prst="rect">
             <a:avLst/>
@@ -7261,7 +8470,7 @@
         <p:spPr>
           <a:xfrm>
             <a:off x="1143000" y="4724400"/>
-            <a:ext cx="970014" cy="571500"/>
+            <a:ext cx="1368742" cy="571500"/>
           </a:xfrm>
           <a:prstGeom prst="rect">
             <a:avLst/>
@@ -7288,7 +8497,7 @@
                 <a:ea typeface="Pretendard"/>
                 <a:cs typeface="Pretendard"/>
               </a:rPr>
-              <a:t>Trino</a:t>
+              <a:t>나가기</a:t>
             </a:r>
           </a:p>
         </p:txBody>
@@ -7301,8 +8510,8 @@
         </p:nvSpPr>
         <p:spPr>
           <a:xfrm>
-            <a:off x="2113014" y="4724400"/>
-            <a:ext cx="15031986" cy="571500"/>
+            <a:off x="2511742" y="4724400"/>
+            <a:ext cx="14633258" cy="571500"/>
           </a:xfrm>
           <a:prstGeom prst="rect">
             <a:avLst/>
@@ -7333,8 +8542,8 @@
         </p:nvSpPr>
         <p:spPr>
           <a:xfrm>
-            <a:off x="2265414" y="4724400"/>
-            <a:ext cx="14727186" cy="571500"/>
+            <a:off x="2664142" y="4724400"/>
+            <a:ext cx="14328458" cy="571500"/>
           </a:xfrm>
           <a:prstGeom prst="rect">
             <a:avLst/>
@@ -7361,7 +8570,7 @@
                 <a:ea typeface="Pretendard"/>
                 <a:cs typeface="Pretendard"/>
               </a:rPr>
-              <a:t>trino --execute "SELECT count(*) FROM iceberg.lakehouse.orders;"</a:t>
+              <a:t>spark-sql 에서 quit;</a:t>
             </a:r>
           </a:p>
         </p:txBody>
@@ -7375,7 +8584,7 @@
         <p:spPr>
           <a:xfrm>
             <a:off x="1143000" y="5372100"/>
-            <a:ext cx="970014" cy="571500"/>
+            <a:ext cx="1368742" cy="571500"/>
           </a:xfrm>
           <a:prstGeom prst="rect">
             <a:avLst/>
@@ -7405,7 +8614,7 @@
         <p:spPr>
           <a:xfrm>
             <a:off x="1143000" y="5372100"/>
-            <a:ext cx="970014" cy="571500"/>
+            <a:ext cx="1368742" cy="571500"/>
           </a:xfrm>
           <a:prstGeom prst="rect">
             <a:avLst/>
@@ -7432,7 +8641,7 @@
                 <a:ea typeface="Pretendard"/>
                 <a:cs typeface="Pretendard"/>
               </a:rPr>
-              <a:t>기준</a:t>
+              <a:t>한 줄 실행</a:t>
             </a:r>
           </a:p>
         </p:txBody>
@@ -7445,8 +8654,8 @@
         </p:nvSpPr>
         <p:spPr>
           <a:xfrm>
-            <a:off x="2113014" y="5372100"/>
-            <a:ext cx="15031986" cy="571500"/>
+            <a:off x="2511742" y="5372100"/>
+            <a:ext cx="14633258" cy="571500"/>
           </a:xfrm>
           <a:prstGeom prst="rect">
             <a:avLst/>
@@ -7477,8 +8686,8 @@
         </p:nvSpPr>
         <p:spPr>
           <a:xfrm>
-            <a:off x="2265414" y="5372100"/>
-            <a:ext cx="14727186" cy="571500"/>
+            <a:off x="2664142" y="5372100"/>
+            <a:ext cx="14328458" cy="571500"/>
           </a:xfrm>
           <a:prstGeom prst="rect">
             <a:avLst/>
@@ -7505,7 +8714,7 @@
                 <a:ea typeface="Pretendard"/>
                 <a:cs typeface="Pretendard"/>
               </a:rPr>
-              <a:t>두 count 가 6 으로 같아야 시작 — 다르면 4-4 로</a:t>
+              <a:t>docker compose exec -T trino trino --execute "…"</a:t>
             </a:r>
           </a:p>
         </p:txBody>
@@ -7546,7 +8755,7 @@
                 <a:ea typeface="Pretendard"/>
                 <a:cs typeface="Pretendard"/>
               </a:rPr>
-              <a:t>count 가 다르면 4-4 의 카탈로그 설정 대조부터 — 여기가 안 맞으면 오늘 실습이 전부 의미를 잃는다</a:t>
+              <a:t>trino&gt; 에서는 앞 결과가 다 나온 뒤 다음 줄을 친다 — 재시작 직후 첫 쿼리 3~9초, 그 사이 친 줄은 사라진다</a:t>
             </a:r>
           </a:p>
         </p:txBody>
@@ -7683,7 +8892,7 @@
       <p:grpSpPr/>
       <p:sp>
         <p:nvSpPr>
-          <p:cNvPr id="2" name="Oval 1"/>
+          <p:cNvPr id="2" name="deckgen:decor"/>
           <p:cNvSpPr/>
           <p:nvPr/>
         </p:nvSpPr>
@@ -7713,7 +8922,7 @@
       </p:sp>
       <p:sp>
         <p:nvSpPr>
-          <p:cNvPr id="3" name="Oval 2"/>
+          <p:cNvPr id="3" name="deckgen:decor"/>
           <p:cNvSpPr/>
           <p:nvPr/>
         </p:nvSpPr>
@@ -7743,7 +8952,7 @@
       </p:sp>
       <p:sp>
         <p:nvSpPr>
-          <p:cNvPr id="4" name="Oval 3"/>
+          <p:cNvPr id="4" name="deckgen:decor"/>
           <p:cNvSpPr/>
           <p:nvPr/>
         </p:nvSpPr>
@@ -7807,7 +9016,7 @@
                 <a:ea typeface="Pretendard"/>
                 <a:cs typeface="Pretendard"/>
               </a:rPr>
-              <a:t>2·3단계</a:t>
+              <a:t>1단계</a:t>
             </a:r>
           </a:p>
         </p:txBody>
@@ -7848,7 +9057,7 @@
                 <a:ea typeface="Pretendard"/>
                 <a:cs typeface="Pretendard"/>
               </a:rPr>
-              <a:t>양방향으로 쓰고 읽는다</a:t>
+              <a:t>시작 상태 — 다섯 Up · Trino "6" · Spark 6</a:t>
             </a:r>
           </a:p>
         </p:txBody>
@@ -7885,42 +9094,31 @@
       </p:sp>
       <p:sp>
         <p:nvSpPr>
-          <p:cNvPr id="8" name="TextBox 7"/>
-          <p:cNvSpPr txBox="1"/>
-          <p:nvPr/>
-        </p:nvSpPr>
-        <p:spPr>
-          <a:xfrm>
-            <a:off x="1143000" y="2857500"/>
-            <a:ext cx="7372350" cy="533400"/>
-          </a:xfrm>
-          <a:prstGeom prst="rect">
-            <a:avLst/>
-          </a:prstGeom>
-          <a:noFill/>
-        </p:spPr>
-        <p:txBody>
-          <a:bodyPr wrap="square" lIns="0" rIns="0" tIns="0" bIns="0" anchor="t">
-            <a:spAutoFit/>
-          </a:bodyPr>
-          <a:lstStyle/>
-          <a:p>
-            <a:pPr algn="l">
-              <a:lnSpc>
-                <a:spcPct val="110000"/>
-              </a:lnSpc>
-            </a:pPr>
-            <a:r>
-              <a:rPr sz="3150" b="1">
-                <a:solidFill>
-                  <a:srgbClr val="0D2B5E"/>
-                </a:solidFill>
-                <a:latin typeface="Pretendard"/>
-                <a:ea typeface="Pretendard"/>
-                <a:cs typeface="Pretendard"/>
-              </a:rPr>
-              <a:t>Trino 에서 쓰고 Spark 에서 읽기</a:t>
-            </a:r>
+          <p:cNvPr id="8" name="Rectangle 7"/>
+          <p:cNvSpPr/>
+          <p:nvPr/>
+        </p:nvSpPr>
+        <p:spPr>
+          <a:xfrm>
+            <a:off x="1143000" y="2781300"/>
+            <a:ext cx="970014" cy="571500"/>
+          </a:xfrm>
+          <a:prstGeom prst="rect">
+            <a:avLst/>
+          </a:prstGeom>
+          <a:solidFill>
+            <a:srgbClr val="0D2B5E"/>
+          </a:solidFill>
+          <a:ln>
+            <a:noFill/>
+          </a:ln>
+          <a:effectLst/>
+        </p:spPr>
+        <p:txBody>
+          <a:bodyPr rtlCol="0" anchor="ctr" wrap="square"/>
+          <a:lstStyle/>
+          <a:p>
+            <a:pPr algn="ctr"/>
           </a:p>
         </p:txBody>
       </p:sp>
@@ -7932,54 +9130,52 @@
         </p:nvSpPr>
         <p:spPr>
           <a:xfrm>
-            <a:off x="1143000" y="3467100"/>
-            <a:ext cx="7372350" cy="876300"/>
-          </a:xfrm>
-          <a:prstGeom prst="rect">
-            <a:avLst/>
-          </a:prstGeom>
-          <a:noFill/>
-        </p:spPr>
-        <p:txBody>
-          <a:bodyPr wrap="square" lIns="0" rIns="0" tIns="0" bIns="0" anchor="t">
-            <a:spAutoFit/>
-          </a:bodyPr>
-          <a:lstStyle/>
-          <a:p>
-            <a:pPr algn="l">
-              <a:lnSpc>
-                <a:spcPct val="146000"/>
-              </a:lnSpc>
-            </a:pPr>
-            <a:r>
-              <a:rPr sz="2250" b="0">
-                <a:solidFill>
-                  <a:srgbClr val="3D3D3D"/>
-                </a:solidFill>
-                <a:latin typeface="Pretendard"/>
-                <a:ea typeface="Pretendard"/>
-                <a:cs typeface="Pretendard"/>
-              </a:rPr>
-              <a:t>INSERT 한 행이 Spark 조회에 즉시 보인다</a:t>
-            </a:r>
-          </a:p>
-        </p:txBody>
-      </p:sp>
-      <p:sp>
-        <p:nvSpPr>
-          <p:cNvPr id="10" name="Rounded Rectangle 9"/>
-          <p:cNvSpPr/>
-          <p:nvPr/>
-        </p:nvSpPr>
-        <p:spPr>
-          <a:xfrm>
-            <a:off x="1143000" y="4610100"/>
-            <a:ext cx="7372350" cy="2857500"/>
-          </a:xfrm>
-          <a:prstGeom prst="roundRect">
-            <a:avLst>
-              <a:gd name="adj" fmla="val 1666"/>
-            </a:avLst>
+            <a:off x="1143000" y="2781300"/>
+            <a:ext cx="970014" cy="571500"/>
+          </a:xfrm>
+          <a:prstGeom prst="rect">
+            <a:avLst/>
+          </a:prstGeom>
+          <a:noFill/>
+        </p:spPr>
+        <p:txBody>
+          <a:bodyPr wrap="square" lIns="0" rIns="0" tIns="0" bIns="0" anchor="ctr">
+            <a:spAutoFit/>
+          </a:bodyPr>
+          <a:lstStyle/>
+          <a:p>
+            <a:pPr algn="ctr">
+              <a:lnSpc>
+                <a:spcPct val="100000"/>
+              </a:lnSpc>
+            </a:pPr>
+            <a:r>
+              <a:rPr sz="1800" b="1">
+                <a:solidFill>
+                  <a:srgbClr val="FFFFFF"/>
+                </a:solidFill>
+                <a:latin typeface="Pretendard"/>
+                <a:ea typeface="Pretendard"/>
+                <a:cs typeface="Pretendard"/>
+              </a:rPr>
+              <a:t>기동</a:t>
+            </a:r>
+          </a:p>
+        </p:txBody>
+      </p:sp>
+      <p:sp>
+        <p:nvSpPr>
+          <p:cNvPr id="10" name="Rectangle 9"/>
+          <p:cNvSpPr/>
+          <p:nvPr/>
+        </p:nvSpPr>
+        <p:spPr>
+          <a:xfrm>
+            <a:off x="2113014" y="2781300"/>
+            <a:ext cx="15031986" cy="571500"/>
+          </a:xfrm>
+          <a:prstGeom prst="rect">
+            <a:avLst/>
           </a:prstGeom>
           <a:solidFill>
             <a:srgbClr val="FAFBFD"/>
@@ -8001,20 +9197,61 @@
       </p:sp>
       <p:sp>
         <p:nvSpPr>
-          <p:cNvPr id="11" name="Oval 10"/>
-          <p:cNvSpPr/>
-          <p:nvPr/>
-        </p:nvSpPr>
-        <p:spPr>
-          <a:xfrm>
-            <a:off x="1447800" y="5016817"/>
-            <a:ext cx="97155" cy="97155"/>
-          </a:xfrm>
-          <a:prstGeom prst="ellipse">
-            <a:avLst/>
-          </a:prstGeom>
-          <a:solidFill>
-            <a:srgbClr val="1E5BC6"/>
+          <p:cNvPr id="11" name="TextBox 10"/>
+          <p:cNvSpPr txBox="1"/>
+          <p:nvPr/>
+        </p:nvSpPr>
+        <p:spPr>
+          <a:xfrm>
+            <a:off x="2265414" y="2781300"/>
+            <a:ext cx="14727186" cy="571500"/>
+          </a:xfrm>
+          <a:prstGeom prst="rect">
+            <a:avLst/>
+          </a:prstGeom>
+          <a:noFill/>
+        </p:spPr>
+        <p:txBody>
+          <a:bodyPr wrap="square" lIns="0" rIns="0" tIns="0" bIns="0" anchor="ctr">
+            <a:spAutoFit/>
+          </a:bodyPr>
+          <a:lstStyle/>
+          <a:p>
+            <a:pPr algn="l">
+              <a:lnSpc>
+                <a:spcPct val="115000"/>
+              </a:lnSpc>
+            </a:pPr>
+            <a:r>
+              <a:rPr sz="1800" b="0">
+                <a:solidFill>
+                  <a:srgbClr val="3D3D3D"/>
+                </a:solidFill>
+                <a:latin typeface="Pretendard"/>
+                <a:ea typeface="Pretendard"/>
+                <a:cs typeface="Pretendard"/>
+              </a:rPr>
+              <a:t>cd ~/lakehouse &amp;&amp; docker compose up -d</a:t>
+            </a:r>
+          </a:p>
+        </p:txBody>
+      </p:sp>
+      <p:sp>
+        <p:nvSpPr>
+          <p:cNvPr id="12" name="Rectangle 11"/>
+          <p:cNvSpPr/>
+          <p:nvPr/>
+        </p:nvSpPr>
+        <p:spPr>
+          <a:xfrm>
+            <a:off x="1143000" y="3429000"/>
+            <a:ext cx="970014" cy="571500"/>
+          </a:xfrm>
+          <a:prstGeom prst="rect">
+            <a:avLst/>
+          </a:prstGeom>
+          <a:solidFill>
+            <a:srgbClr val="0D2B5E"/>
           </a:solidFill>
           <a:ln>
             <a:noFill/>
@@ -8031,14 +9268,14 @@
       </p:sp>
       <p:sp>
         <p:nvSpPr>
-          <p:cNvPr id="12" name="TextBox 11"/>
-          <p:cNvSpPr txBox="1"/>
-          <p:nvPr/>
-        </p:nvSpPr>
-        <p:spPr>
-          <a:xfrm>
-            <a:off x="1633538" y="4838700"/>
-            <a:ext cx="6634162" cy="453390"/>
+          <p:cNvPr id="13" name="TextBox 12"/>
+          <p:cNvSpPr txBox="1"/>
+          <p:nvPr/>
+        </p:nvSpPr>
+        <p:spPr>
+          <a:xfrm>
+            <a:off x="1143000" y="3429000"/>
+            <a:ext cx="970014" cy="571500"/>
           </a:xfrm>
           <a:prstGeom prst="rect">
             <a:avLst/>
@@ -8051,264 +9288,38 @@
           </a:bodyPr>
           <a:lstStyle/>
           <a:p>
-            <a:pPr algn="l">
-              <a:lnSpc>
-                <a:spcPct val="120000"/>
-              </a:lnSpc>
-            </a:pPr>
-            <a:r>
-              <a:rPr sz="1575" b="0">
-                <a:solidFill>
-                  <a:srgbClr val="3D3D3D"/>
-                </a:solidFill>
-                <a:latin typeface="Pretendard"/>
-                <a:ea typeface="Pretendard"/>
-                <a:cs typeface="Pretendard"/>
-              </a:rPr>
-              <a:t>INSERT … VALUES (8, 'jung', 27000, …)</a:t>
-            </a:r>
-          </a:p>
-        </p:txBody>
-      </p:sp>
-      <p:sp>
-        <p:nvSpPr>
-          <p:cNvPr id="13" name="Oval 12"/>
-          <p:cNvSpPr/>
-          <p:nvPr/>
-        </p:nvSpPr>
-        <p:spPr>
-          <a:xfrm>
-            <a:off x="1447800" y="5527358"/>
-            <a:ext cx="97155" cy="97155"/>
-          </a:xfrm>
-          <a:prstGeom prst="ellipse">
-            <a:avLst/>
-          </a:prstGeom>
-          <a:solidFill>
-            <a:srgbClr val="1E5BC6"/>
-          </a:solidFill>
-          <a:ln>
-            <a:noFill/>
-          </a:ln>
-          <a:effectLst/>
-        </p:spPr>
-        <p:txBody>
-          <a:bodyPr rtlCol="0" anchor="ctr" wrap="square"/>
-          <a:lstStyle/>
-          <a:p>
-            <a:pPr algn="ctr"/>
-          </a:p>
-        </p:txBody>
-      </p:sp>
-      <p:sp>
-        <p:nvSpPr>
-          <p:cNvPr id="14" name="TextBox 13"/>
-          <p:cNvSpPr txBox="1"/>
-          <p:nvPr/>
-        </p:nvSpPr>
-        <p:spPr>
-          <a:xfrm>
-            <a:off x="1633538" y="5349240"/>
-            <a:ext cx="6634162" cy="453390"/>
-          </a:xfrm>
-          <a:prstGeom prst="rect">
-            <a:avLst/>
-          </a:prstGeom>
-          <a:noFill/>
-        </p:spPr>
-        <p:txBody>
-          <a:bodyPr wrap="square" lIns="0" rIns="0" tIns="0" bIns="0" anchor="ctr">
-            <a:spAutoFit/>
-          </a:bodyPr>
-          <a:lstStyle/>
-          <a:p>
-            <a:pPr algn="l">
-              <a:lnSpc>
-                <a:spcPct val="120000"/>
-              </a:lnSpc>
-            </a:pPr>
-            <a:r>
-              <a:rPr sz="1575" b="0">
-                <a:solidFill>
-                  <a:srgbClr val="3D3D3D"/>
-                </a:solidFill>
-                <a:latin typeface="Pretendard"/>
-                <a:ea typeface="Pretendard"/>
-                <a:cs typeface="Pretendard"/>
-              </a:rPr>
-              <a:t>Trino count 가 7</a:t>
-            </a:r>
-          </a:p>
-        </p:txBody>
-      </p:sp>
-      <p:sp>
-        <p:nvSpPr>
-          <p:cNvPr id="15" name="Oval 14"/>
-          <p:cNvSpPr/>
-          <p:nvPr/>
-        </p:nvSpPr>
-        <p:spPr>
-          <a:xfrm>
-            <a:off x="1447800" y="6037898"/>
-            <a:ext cx="97155" cy="97155"/>
-          </a:xfrm>
-          <a:prstGeom prst="ellipse">
-            <a:avLst/>
-          </a:prstGeom>
-          <a:solidFill>
-            <a:srgbClr val="1E5BC6"/>
-          </a:solidFill>
-          <a:ln>
-            <a:noFill/>
-          </a:ln>
-          <a:effectLst/>
-        </p:spPr>
-        <p:txBody>
-          <a:bodyPr rtlCol="0" anchor="ctr" wrap="square"/>
-          <a:lstStyle/>
-          <a:p>
-            <a:pPr algn="ctr"/>
-          </a:p>
-        </p:txBody>
-      </p:sp>
-      <p:sp>
-        <p:nvSpPr>
-          <p:cNvPr id="16" name="TextBox 15"/>
-          <p:cNvSpPr txBox="1"/>
-          <p:nvPr/>
-        </p:nvSpPr>
-        <p:spPr>
-          <a:xfrm>
-            <a:off x="1633538" y="5859780"/>
-            <a:ext cx="6634162" cy="453390"/>
-          </a:xfrm>
-          <a:prstGeom prst="rect">
-            <a:avLst/>
-          </a:prstGeom>
-          <a:noFill/>
-        </p:spPr>
-        <p:txBody>
-          <a:bodyPr wrap="square" lIns="0" rIns="0" tIns="0" bIns="0" anchor="ctr">
-            <a:spAutoFit/>
-          </a:bodyPr>
-          <a:lstStyle/>
-          <a:p>
-            <a:pPr algn="l">
-              <a:lnSpc>
-                <a:spcPct val="120000"/>
-              </a:lnSpc>
-            </a:pPr>
-            <a:r>
-              <a:rPr sz="1575" b="0">
-                <a:solidFill>
-                  <a:srgbClr val="3D3D3D"/>
-                </a:solidFill>
-                <a:latin typeface="Pretendard"/>
-                <a:ea typeface="Pretendard"/>
-                <a:cs typeface="Pretendard"/>
-              </a:rPr>
-              <a:t>Spark ORDER BY order_id 에 8(jung) 행</a:t>
-            </a:r>
-          </a:p>
-        </p:txBody>
-      </p:sp>
-      <p:sp>
-        <p:nvSpPr>
-          <p:cNvPr id="17" name="TextBox 16"/>
-          <p:cNvSpPr txBox="1"/>
-          <p:nvPr/>
-        </p:nvSpPr>
-        <p:spPr>
-          <a:xfrm>
-            <a:off x="9772650" y="2857500"/>
-            <a:ext cx="7372350" cy="533400"/>
-          </a:xfrm>
-          <a:prstGeom prst="rect">
-            <a:avLst/>
-          </a:prstGeom>
-          <a:noFill/>
-        </p:spPr>
-        <p:txBody>
-          <a:bodyPr wrap="square" lIns="0" rIns="0" tIns="0" bIns="0" anchor="t">
-            <a:spAutoFit/>
-          </a:bodyPr>
-          <a:lstStyle/>
-          <a:p>
-            <a:pPr algn="l">
-              <a:lnSpc>
-                <a:spcPct val="110000"/>
-              </a:lnSpc>
-            </a:pPr>
-            <a:r>
-              <a:rPr sz="3150" b="1">
-                <a:solidFill>
-                  <a:srgbClr val="0D2B5E"/>
-                </a:solidFill>
-                <a:latin typeface="Pretendard"/>
-                <a:ea typeface="Pretendard"/>
-                <a:cs typeface="Pretendard"/>
-              </a:rPr>
-              <a:t>Spark 에서 바꾸고 Trino 에서 확인</a:t>
-            </a:r>
-          </a:p>
-        </p:txBody>
-      </p:sp>
-      <p:sp>
-        <p:nvSpPr>
-          <p:cNvPr id="18" name="TextBox 17"/>
-          <p:cNvSpPr txBox="1"/>
-          <p:nvPr/>
-        </p:nvSpPr>
-        <p:spPr>
-          <a:xfrm>
-            <a:off x="9772650" y="3467100"/>
-            <a:ext cx="7372350" cy="876300"/>
-          </a:xfrm>
-          <a:prstGeom prst="rect">
-            <a:avLst/>
-          </a:prstGeom>
-          <a:noFill/>
-        </p:spPr>
-        <p:txBody>
-          <a:bodyPr wrap="square" lIns="0" rIns="0" tIns="0" bIns="0" anchor="t">
-            <a:spAutoFit/>
-          </a:bodyPr>
-          <a:lstStyle/>
-          <a:p>
-            <a:pPr algn="l">
-              <a:lnSpc>
-                <a:spcPct val="146000"/>
-              </a:lnSpc>
-            </a:pPr>
-            <a:r>
-              <a:rPr sz="2250" b="0">
-                <a:solidFill>
-                  <a:srgbClr val="3D3D3D"/>
-                </a:solidFill>
-                <a:latin typeface="Pretendard"/>
-                <a:ea typeface="Pretendard"/>
-                <a:cs typeface="Pretendard"/>
-              </a:rPr>
-              <a:t>스키마 진화도 카탈로그를 통해 공유된다</a:t>
-            </a:r>
-          </a:p>
-        </p:txBody>
-      </p:sp>
-      <p:sp>
-        <p:nvSpPr>
-          <p:cNvPr id="19" name="Rounded Rectangle 18"/>
-          <p:cNvSpPr/>
-          <p:nvPr/>
-        </p:nvSpPr>
-        <p:spPr>
-          <a:xfrm>
-            <a:off x="9772650" y="4610100"/>
-            <a:ext cx="7372350" cy="2857500"/>
-          </a:xfrm>
-          <a:prstGeom prst="roundRect">
-            <a:avLst>
-              <a:gd name="adj" fmla="val 1666"/>
-            </a:avLst>
+            <a:pPr algn="ctr">
+              <a:lnSpc>
+                <a:spcPct val="100000"/>
+              </a:lnSpc>
+            </a:pPr>
+            <a:r>
+              <a:rPr sz="1800" b="1">
+                <a:solidFill>
+                  <a:srgbClr val="FFFFFF"/>
+                </a:solidFill>
+                <a:latin typeface="Pretendard"/>
+                <a:ea typeface="Pretendard"/>
+                <a:cs typeface="Pretendard"/>
+              </a:rPr>
+              <a:t>상태</a:t>
+            </a:r>
+          </a:p>
+        </p:txBody>
+      </p:sp>
+      <p:sp>
+        <p:nvSpPr>
+          <p:cNvPr id="14" name="Rectangle 13"/>
+          <p:cNvSpPr/>
+          <p:nvPr/>
+        </p:nvSpPr>
+        <p:spPr>
+          <a:xfrm>
+            <a:off x="2113014" y="3429000"/>
+            <a:ext cx="15031986" cy="571500"/>
+          </a:xfrm>
+          <a:prstGeom prst="rect">
+            <a:avLst/>
           </a:prstGeom>
           <a:solidFill>
             <a:srgbClr val="FAFBFD"/>
@@ -8330,20 +9341,61 @@
       </p:sp>
       <p:sp>
         <p:nvSpPr>
-          <p:cNvPr id="20" name="Oval 19"/>
-          <p:cNvSpPr/>
-          <p:nvPr/>
-        </p:nvSpPr>
-        <p:spPr>
-          <a:xfrm>
-            <a:off x="10077450" y="5016817"/>
-            <a:ext cx="97155" cy="97155"/>
-          </a:xfrm>
-          <a:prstGeom prst="ellipse">
-            <a:avLst/>
-          </a:prstGeom>
-          <a:solidFill>
-            <a:srgbClr val="1E5BC6"/>
+          <p:cNvPr id="15" name="TextBox 14"/>
+          <p:cNvSpPr txBox="1"/>
+          <p:nvPr/>
+        </p:nvSpPr>
+        <p:spPr>
+          <a:xfrm>
+            <a:off x="2265414" y="3429000"/>
+            <a:ext cx="14727186" cy="571500"/>
+          </a:xfrm>
+          <a:prstGeom prst="rect">
+            <a:avLst/>
+          </a:prstGeom>
+          <a:noFill/>
+        </p:spPr>
+        <p:txBody>
+          <a:bodyPr wrap="square" lIns="0" rIns="0" tIns="0" bIns="0" anchor="ctr">
+            <a:spAutoFit/>
+          </a:bodyPr>
+          <a:lstStyle/>
+          <a:p>
+            <a:pPr algn="l">
+              <a:lnSpc>
+                <a:spcPct val="115000"/>
+              </a:lnSpc>
+            </a:pPr>
+            <a:r>
+              <a:rPr sz="1800" b="0">
+                <a:solidFill>
+                  <a:srgbClr val="3D3D3D"/>
+                </a:solidFill>
+                <a:latin typeface="Pretendard"/>
+                <a:ea typeface="Pretendard"/>
+                <a:cs typeface="Pretendard"/>
+              </a:rPr>
+              <a:t>docker compose ps — 다섯 컨테이너 Up</a:t>
+            </a:r>
+          </a:p>
+        </p:txBody>
+      </p:sp>
+      <p:sp>
+        <p:nvSpPr>
+          <p:cNvPr id="16" name="Rectangle 15"/>
+          <p:cNvSpPr/>
+          <p:nvPr/>
+        </p:nvSpPr>
+        <p:spPr>
+          <a:xfrm>
+            <a:off x="1143000" y="4076700"/>
+            <a:ext cx="970014" cy="571500"/>
+          </a:xfrm>
+          <a:prstGeom prst="rect">
+            <a:avLst/>
+          </a:prstGeom>
+          <a:solidFill>
+            <a:srgbClr val="0D2B5E"/>
           </a:solidFill>
           <a:ln>
             <a:noFill/>
@@ -8360,14 +9412,14 @@
       </p:sp>
       <p:sp>
         <p:nvSpPr>
-          <p:cNvPr id="21" name="TextBox 20"/>
-          <p:cNvSpPr txBox="1"/>
-          <p:nvPr/>
-        </p:nvSpPr>
-        <p:spPr>
-          <a:xfrm>
-            <a:off x="10263188" y="4838700"/>
-            <a:ext cx="6634162" cy="453390"/>
+          <p:cNvPr id="17" name="TextBox 16"/>
+          <p:cNvSpPr txBox="1"/>
+          <p:nvPr/>
+        </p:nvSpPr>
+        <p:spPr>
+          <a:xfrm>
+            <a:off x="1143000" y="4076700"/>
+            <a:ext cx="970014" cy="571500"/>
           </a:xfrm>
           <a:prstGeom prst="rect">
             <a:avLst/>
@@ -8380,13 +9432,86 @@
           </a:bodyPr>
           <a:lstStyle/>
           <a:p>
+            <a:pPr algn="ctr">
+              <a:lnSpc>
+                <a:spcPct val="100000"/>
+              </a:lnSpc>
+            </a:pPr>
+            <a:r>
+              <a:rPr sz="1800" b="1">
+                <a:solidFill>
+                  <a:srgbClr val="FFFFFF"/>
+                </a:solidFill>
+                <a:latin typeface="Pretendard"/>
+                <a:ea typeface="Pretendard"/>
+                <a:cs typeface="Pretendard"/>
+              </a:rPr>
+              <a:t>Spark</a:t>
+            </a:r>
+          </a:p>
+        </p:txBody>
+      </p:sp>
+      <p:sp>
+        <p:nvSpPr>
+          <p:cNvPr id="18" name="Rectangle 17"/>
+          <p:cNvSpPr/>
+          <p:nvPr/>
+        </p:nvSpPr>
+        <p:spPr>
+          <a:xfrm>
+            <a:off x="2113014" y="4076700"/>
+            <a:ext cx="15031986" cy="571500"/>
+          </a:xfrm>
+          <a:prstGeom prst="rect">
+            <a:avLst/>
+          </a:prstGeom>
+          <a:solidFill>
+            <a:srgbClr val="FAFBFD"/>
+          </a:solidFill>
+          <a:ln w="9525">
+            <a:solidFill>
+              <a:srgbClr val="DCE1E8"/>
+            </a:solidFill>
+          </a:ln>
+          <a:effectLst/>
+        </p:spPr>
+        <p:txBody>
+          <a:bodyPr rtlCol="0" anchor="ctr" wrap="square"/>
+          <a:lstStyle/>
+          <a:p>
+            <a:pPr algn="ctr"/>
+          </a:p>
+        </p:txBody>
+      </p:sp>
+      <p:sp>
+        <p:nvSpPr>
+          <p:cNvPr id="19" name="TextBox 18"/>
+          <p:cNvSpPr txBox="1"/>
+          <p:nvPr/>
+        </p:nvSpPr>
+        <p:spPr>
+          <a:xfrm>
+            <a:off x="2265414" y="4076700"/>
+            <a:ext cx="14727186" cy="571500"/>
+          </a:xfrm>
+          <a:prstGeom prst="rect">
+            <a:avLst/>
+          </a:prstGeom>
+          <a:noFill/>
+        </p:spPr>
+        <p:txBody>
+          <a:bodyPr wrap="square" lIns="0" rIns="0" tIns="0" bIns="0" anchor="ctr">
+            <a:spAutoFit/>
+          </a:bodyPr>
+          <a:lstStyle/>
+          <a:p>
             <a:pPr algn="l">
               <a:lnSpc>
-                <a:spcPct val="120000"/>
-              </a:lnSpc>
-            </a:pPr>
-            <a:r>
-              <a:rPr sz="1575" b="0">
+                <a:spcPct val="115000"/>
+              </a:lnSpc>
+            </a:pPr>
+            <a:r>
+              <a:rPr sz="1800" b="0">
                 <a:solidFill>
                   <a:srgbClr val="3D3D3D"/>
                 </a:solidFill>
@@ -8394,27 +9519,27 @@
                 <a:ea typeface="Pretendard"/>
                 <a:cs typeface="Pretendard"/>
               </a:rPr>
-              <a:t>ALTER TABLE … ADD COLUMN memo STRING</a:t>
-            </a:r>
-          </a:p>
-        </p:txBody>
-      </p:sp>
-      <p:sp>
-        <p:nvSpPr>
-          <p:cNvPr id="22" name="Oval 21"/>
-          <p:cNvSpPr/>
-          <p:nvPr/>
-        </p:nvSpPr>
-        <p:spPr>
-          <a:xfrm>
-            <a:off x="10077450" y="5527358"/>
-            <a:ext cx="97155" cy="97155"/>
-          </a:xfrm>
-          <a:prstGeom prst="ellipse">
-            <a:avLst/>
-          </a:prstGeom>
-          <a:solidFill>
-            <a:srgbClr val="1E5BC6"/>
+              <a:t>spark-sql -e "SELECT count(*) FROM demo.lakehouse.orders;"</a:t>
+            </a:r>
+          </a:p>
+        </p:txBody>
+      </p:sp>
+      <p:sp>
+        <p:nvSpPr>
+          <p:cNvPr id="20" name="Rectangle 19"/>
+          <p:cNvSpPr/>
+          <p:nvPr/>
+        </p:nvSpPr>
+        <p:spPr>
+          <a:xfrm>
+            <a:off x="1143000" y="4724400"/>
+            <a:ext cx="970014" cy="571500"/>
+          </a:xfrm>
+          <a:prstGeom prst="rect">
+            <a:avLst/>
+          </a:prstGeom>
+          <a:solidFill>
+            <a:srgbClr val="0D2B5E"/>
           </a:solidFill>
           <a:ln>
             <a:noFill/>
@@ -8431,14 +9556,87 @@
       </p:sp>
       <p:sp>
         <p:nvSpPr>
+          <p:cNvPr id="21" name="TextBox 20"/>
+          <p:cNvSpPr txBox="1"/>
+          <p:nvPr/>
+        </p:nvSpPr>
+        <p:spPr>
+          <a:xfrm>
+            <a:off x="1143000" y="4724400"/>
+            <a:ext cx="970014" cy="571500"/>
+          </a:xfrm>
+          <a:prstGeom prst="rect">
+            <a:avLst/>
+          </a:prstGeom>
+          <a:noFill/>
+        </p:spPr>
+        <p:txBody>
+          <a:bodyPr wrap="square" lIns="0" rIns="0" tIns="0" bIns="0" anchor="ctr">
+            <a:spAutoFit/>
+          </a:bodyPr>
+          <a:lstStyle/>
+          <a:p>
+            <a:pPr algn="ctr">
+              <a:lnSpc>
+                <a:spcPct val="100000"/>
+              </a:lnSpc>
+            </a:pPr>
+            <a:r>
+              <a:rPr sz="1800" b="1">
+                <a:solidFill>
+                  <a:srgbClr val="FFFFFF"/>
+                </a:solidFill>
+                <a:latin typeface="Pretendard"/>
+                <a:ea typeface="Pretendard"/>
+                <a:cs typeface="Pretendard"/>
+              </a:rPr>
+              <a:t>Trino</a:t>
+            </a:r>
+          </a:p>
+        </p:txBody>
+      </p:sp>
+      <p:sp>
+        <p:nvSpPr>
+          <p:cNvPr id="22" name="Rectangle 21"/>
+          <p:cNvSpPr/>
+          <p:nvPr/>
+        </p:nvSpPr>
+        <p:spPr>
+          <a:xfrm>
+            <a:off x="2113014" y="4724400"/>
+            <a:ext cx="15031986" cy="571500"/>
+          </a:xfrm>
+          <a:prstGeom prst="rect">
+            <a:avLst/>
+          </a:prstGeom>
+          <a:solidFill>
+            <a:srgbClr val="FAFBFD"/>
+          </a:solidFill>
+          <a:ln w="9525">
+            <a:solidFill>
+              <a:srgbClr val="DCE1E8"/>
+            </a:solidFill>
+          </a:ln>
+          <a:effectLst/>
+        </p:spPr>
+        <p:txBody>
+          <a:bodyPr rtlCol="0" anchor="ctr" wrap="square"/>
+          <a:lstStyle/>
+          <a:p>
+            <a:pPr algn="ctr"/>
+          </a:p>
+        </p:txBody>
+      </p:sp>
+      <p:sp>
+        <p:nvSpPr>
           <p:cNvPr id="23" name="TextBox 22"/>
           <p:cNvSpPr txBox="1"/>
           <p:nvPr/>
         </p:nvSpPr>
         <p:spPr>
           <a:xfrm>
-            <a:off x="10263188" y="5349240"/>
-            <a:ext cx="6634162" cy="453390"/>
+            <a:off x="2265414" y="4724400"/>
+            <a:ext cx="14727186" cy="571500"/>
           </a:xfrm>
           <a:prstGeom prst="rect">
             <a:avLst/>
@@ -8453,11 +9651,11 @@
           <a:p>
             <a:pPr algn="l">
               <a:lnSpc>
-                <a:spcPct val="120000"/>
-              </a:lnSpc>
-            </a:pPr>
-            <a:r>
-              <a:rPr sz="1575" b="0">
+                <a:spcPct val="115000"/>
+              </a:lnSpc>
+            </a:pPr>
+            <a:r>
+              <a:rPr sz="1800" b="0">
                 <a:solidFill>
                   <a:srgbClr val="3D3D3D"/>
                 </a:solidFill>
@@ -8465,27 +9663,27 @@
                 <a:ea typeface="Pretendard"/>
                 <a:cs typeface="Pretendard"/>
               </a:rPr>
-              <a:t>UPDATE … SET memo = 'vip' WHERE order_id = 4</a:t>
-            </a:r>
-          </a:p>
-        </p:txBody>
-      </p:sp>
-      <p:sp>
-        <p:nvSpPr>
-          <p:cNvPr id="24" name="Oval 23"/>
-          <p:cNvSpPr/>
-          <p:nvPr/>
-        </p:nvSpPr>
-        <p:spPr>
-          <a:xfrm>
-            <a:off x="10077450" y="6037898"/>
-            <a:ext cx="97155" cy="97155"/>
-          </a:xfrm>
-          <a:prstGeom prst="ellipse">
-            <a:avLst/>
-          </a:prstGeom>
-          <a:solidFill>
-            <a:srgbClr val="1E5BC6"/>
+              <a:t>exec -T trino trino --execute "SELECT count(*) …"</a:t>
+            </a:r>
+          </a:p>
+        </p:txBody>
+      </p:sp>
+      <p:sp>
+        <p:nvSpPr>
+          <p:cNvPr id="24" name="Rectangle 23"/>
+          <p:cNvSpPr/>
+          <p:nvPr/>
+        </p:nvSpPr>
+        <p:spPr>
+          <a:xfrm>
+            <a:off x="1143000" y="5372100"/>
+            <a:ext cx="970014" cy="571500"/>
+          </a:xfrm>
+          <a:prstGeom prst="rect">
+            <a:avLst/>
+          </a:prstGeom>
+          <a:solidFill>
+            <a:srgbClr val="0D2B5E"/>
           </a:solidFill>
           <a:ln>
             <a:noFill/>
@@ -8508,8 +9706,8 @@
         </p:nvSpPr>
         <p:spPr>
           <a:xfrm>
-            <a:off x="10263188" y="5859780"/>
-            <a:ext cx="6634162" cy="453390"/>
+            <a:off x="1143000" y="5372100"/>
+            <a:ext cx="970014" cy="571500"/>
           </a:xfrm>
           <a:prstGeom prst="rect">
             <a:avLst/>
@@ -8522,13 +9720,86 @@
           </a:bodyPr>
           <a:lstStyle/>
           <a:p>
+            <a:pPr algn="ctr">
+              <a:lnSpc>
+                <a:spcPct val="100000"/>
+              </a:lnSpc>
+            </a:pPr>
+            <a:r>
+              <a:rPr sz="1800" b="1">
+                <a:solidFill>
+                  <a:srgbClr val="FFFFFF"/>
+                </a:solidFill>
+                <a:latin typeface="Pretendard"/>
+                <a:ea typeface="Pretendard"/>
+                <a:cs typeface="Pretendard"/>
+              </a:rPr>
+              <a:t>실측</a:t>
+            </a:r>
+          </a:p>
+        </p:txBody>
+      </p:sp>
+      <p:sp>
+        <p:nvSpPr>
+          <p:cNvPr id="26" name="Rectangle 25"/>
+          <p:cNvSpPr/>
+          <p:nvPr/>
+        </p:nvSpPr>
+        <p:spPr>
+          <a:xfrm>
+            <a:off x="2113014" y="5372100"/>
+            <a:ext cx="15031986" cy="571500"/>
+          </a:xfrm>
+          <a:prstGeom prst="rect">
+            <a:avLst/>
+          </a:prstGeom>
+          <a:solidFill>
+            <a:srgbClr val="FAFBFD"/>
+          </a:solidFill>
+          <a:ln w="9525">
+            <a:solidFill>
+              <a:srgbClr val="DCE1E8"/>
+            </a:solidFill>
+          </a:ln>
+          <a:effectLst/>
+        </p:spPr>
+        <p:txBody>
+          <a:bodyPr rtlCol="0" anchor="ctr" wrap="square"/>
+          <a:lstStyle/>
+          <a:p>
+            <a:pPr algn="ctr"/>
+          </a:p>
+        </p:txBody>
+      </p:sp>
+      <p:sp>
+        <p:nvSpPr>
+          <p:cNvPr id="27" name="TextBox 26"/>
+          <p:cNvSpPr txBox="1"/>
+          <p:nvPr/>
+        </p:nvSpPr>
+        <p:spPr>
+          <a:xfrm>
+            <a:off x="2265414" y="5372100"/>
+            <a:ext cx="14727186" cy="571500"/>
+          </a:xfrm>
+          <a:prstGeom prst="rect">
+            <a:avLst/>
+          </a:prstGeom>
+          <a:noFill/>
+        </p:spPr>
+        <p:txBody>
+          <a:bodyPr wrap="square" lIns="0" rIns="0" tIns="0" bIns="0" anchor="ctr">
+            <a:spAutoFit/>
+          </a:bodyPr>
+          <a:lstStyle/>
+          <a:p>
             <a:pPr algn="l">
               <a:lnSpc>
-                <a:spcPct val="120000"/>
-              </a:lnSpc>
-            </a:pPr>
-            <a:r>
-              <a:rPr sz="1575" b="0">
+                <a:spcPct val="115000"/>
+              </a:lnSpc>
+            </a:pPr>
+            <a:r>
+              <a:rPr sz="1800" b="0">
                 <a:solidFill>
                   <a:srgbClr val="3D3D3D"/>
                 </a:solidFill>
@@ -8536,27 +9807,68 @@
                 <a:ea typeface="Pretendard"/>
                 <a:cs typeface="Pretendard"/>
               </a:rPr>
-              <a:t>Trino DESCRIBE 에 memo · 4 행의 memo 가 vip</a:t>
-            </a:r>
-          </a:p>
-        </p:txBody>
-      </p:sp>
-      <p:sp>
-        <p:nvSpPr>
-          <p:cNvPr id="26" name="Oval 25"/>
-          <p:cNvSpPr/>
-          <p:nvPr/>
-        </p:nvSpPr>
-        <p:spPr>
-          <a:xfrm>
-            <a:off x="8686800" y="3771900"/>
-            <a:ext cx="914400" cy="914400"/>
-          </a:xfrm>
-          <a:prstGeom prst="ellipse">
-            <a:avLst/>
-          </a:prstGeom>
-          <a:solidFill>
-            <a:srgbClr val="0D2B5E"/>
+              <a:t>Trino "6" · Spark 6 — 같아야 시작</a:t>
+            </a:r>
+          </a:p>
+        </p:txBody>
+      </p:sp>
+      <p:sp>
+        <p:nvSpPr>
+          <p:cNvPr id="28" name="TextBox 27"/>
+          <p:cNvSpPr txBox="1"/>
+          <p:nvPr/>
+        </p:nvSpPr>
+        <p:spPr>
+          <a:xfrm>
+            <a:off x="1143000" y="7620000"/>
+            <a:ext cx="16002000" cy="342900"/>
+          </a:xfrm>
+          <a:prstGeom prst="rect">
+            <a:avLst/>
+          </a:prstGeom>
+          <a:noFill/>
+        </p:spPr>
+        <p:txBody>
+          <a:bodyPr wrap="square" lIns="0" rIns="0" tIns="0" bIns="0" anchor="t">
+            <a:spAutoFit/>
+          </a:bodyPr>
+          <a:lstStyle/>
+          <a:p>
+            <a:pPr algn="l">
+              <a:lnSpc>
+                <a:spcPct val="100000"/>
+              </a:lnSpc>
+            </a:pPr>
+            <a:r>
+              <a:rPr sz="1875" b="1">
+                <a:solidFill>
+                  <a:srgbClr val="7D7D7D"/>
+                </a:solidFill>
+                <a:latin typeface="Pretendard"/>
+                <a:ea typeface="Pretendard"/>
+                <a:cs typeface="Pretendard"/>
+              </a:rPr>
+              <a:t>두 값이 다르면 4-4 의 카탈로그 설정 대조부터 — 여기가 안 맞으면 오늘 실습이 의미를 잃는다</a:t>
+            </a:r>
+          </a:p>
+        </p:txBody>
+      </p:sp>
+      <p:sp>
+        <p:nvSpPr>
+          <p:cNvPr id="29" name="Rectangle 28"/>
+          <p:cNvSpPr/>
+          <p:nvPr/>
+        </p:nvSpPr>
+        <p:spPr>
+          <a:xfrm>
+            <a:off x="1143000" y="8058150"/>
+            <a:ext cx="16002000" cy="9525"/>
+          </a:xfrm>
+          <a:prstGeom prst="rect">
+            <a:avLst/>
+          </a:prstGeom>
+          <a:solidFill>
+            <a:srgbClr val="DCE1E8"/>
           </a:solidFill>
           <a:ln>
             <a:noFill/>
@@ -8573,78 +9885,7 @@
       </p:sp>
       <p:sp>
         <p:nvSpPr>
-          <p:cNvPr id="27" name="TextBox 26"/>
-          <p:cNvSpPr txBox="1"/>
-          <p:nvPr/>
-        </p:nvSpPr>
-        <p:spPr>
-          <a:xfrm>
-            <a:off x="8686800" y="4057650"/>
-            <a:ext cx="914400" cy="381000"/>
-          </a:xfrm>
-          <a:prstGeom prst="rect">
-            <a:avLst/>
-          </a:prstGeom>
-          <a:noFill/>
-        </p:spPr>
-        <p:txBody>
-          <a:bodyPr wrap="square" lIns="0" rIns="0" tIns="0" bIns="0" anchor="t">
-            <a:spAutoFit/>
-          </a:bodyPr>
-          <a:lstStyle/>
-          <a:p>
-            <a:pPr algn="ctr">
-              <a:lnSpc>
-                <a:spcPct val="100000"/>
-              </a:lnSpc>
-            </a:pPr>
-            <a:r>
-              <a:rPr sz="2250" b="1">
-                <a:solidFill>
-                  <a:srgbClr val="FFFFFF"/>
-                </a:solidFill>
-                <a:latin typeface="Pretendard"/>
-                <a:ea typeface="Pretendard"/>
-                <a:cs typeface="Pretendard"/>
-              </a:rPr>
-              <a:t>VS</a:t>
-            </a:r>
-          </a:p>
-        </p:txBody>
-      </p:sp>
-      <p:sp>
-        <p:nvSpPr>
-          <p:cNvPr id="28" name="Rectangle 27"/>
-          <p:cNvSpPr/>
-          <p:nvPr/>
-        </p:nvSpPr>
-        <p:spPr>
-          <a:xfrm>
-            <a:off x="1143000" y="8058150"/>
-            <a:ext cx="16002000" cy="9525"/>
-          </a:xfrm>
-          <a:prstGeom prst="rect">
-            <a:avLst/>
-          </a:prstGeom>
-          <a:solidFill>
-            <a:srgbClr val="DCE1E8"/>
-          </a:solidFill>
-          <a:ln>
-            <a:noFill/>
-          </a:ln>
-          <a:effectLst/>
-        </p:spPr>
-        <p:txBody>
-          <a:bodyPr rtlCol="0" anchor="ctr" wrap="square"/>
-          <a:lstStyle/>
-          <a:p>
-            <a:pPr algn="ctr"/>
-          </a:p>
-        </p:txBody>
-      </p:sp>
-      <p:sp>
-        <p:nvSpPr>
-          <p:cNvPr id="29" name="TextBox 28"/>
+          <p:cNvPr id="30" name="TextBox 29"/>
           <p:cNvSpPr txBox="1"/>
           <p:nvPr/>
         </p:nvSpPr>
@@ -8685,7 +9926,7 @@
       </p:sp>
       <p:sp>
         <p:nvSpPr>
-          <p:cNvPr id="30" name="TextBox 29"/>
+          <p:cNvPr id="31" name="TextBox 30"/>
           <p:cNvSpPr txBox="1"/>
           <p:nvPr/>
         </p:nvSpPr>
@@ -8744,7 +9985,7 @@
       <p:grpSpPr/>
       <p:sp>
         <p:nvSpPr>
-          <p:cNvPr id="2" name="Oval 1"/>
+          <p:cNvPr id="2" name="deckgen:decor"/>
           <p:cNvSpPr/>
           <p:nvPr/>
         </p:nvSpPr>
@@ -8774,7 +10015,7 @@
       </p:sp>
       <p:sp>
         <p:nvSpPr>
-          <p:cNvPr id="3" name="Oval 2"/>
+          <p:cNvPr id="3" name="deckgen:decor"/>
           <p:cNvSpPr/>
           <p:nvPr/>
         </p:nvSpPr>
@@ -8804,7 +10045,7 @@
       </p:sp>
       <p:sp>
         <p:nvSpPr>
-          <p:cNvPr id="4" name="Oval 3"/>
+          <p:cNvPr id="4" name="deckgen:decor"/>
           <p:cNvSpPr/>
           <p:nvPr/>
         </p:nvSpPr>
@@ -8868,7 +10109,7 @@
                 <a:ea typeface="Pretendard"/>
                 <a:cs typeface="Pretendard"/>
               </a:rPr>
-              <a:t>4단계</a:t>
+              <a:t>2·3단계</a:t>
             </a:r>
           </a:p>
         </p:txBody>
@@ -8909,7 +10150,7 @@
                 <a:ea typeface="Pretendard"/>
                 <a:cs typeface="Pretendard"/>
               </a:rPr>
-              <a:t>커밋 이력이 한 줄로 쌓이는가</a:t>
+              <a:t>양방향으로 쓰고 읽는다</a:t>
             </a:r>
           </a:p>
         </p:txBody>
@@ -8946,18 +10187,100 @@
       </p:sp>
       <p:sp>
         <p:nvSpPr>
-          <p:cNvPr id="8" name="Rounded Rectangle 7"/>
-          <p:cNvSpPr/>
-          <p:nvPr/>
-        </p:nvSpPr>
-        <p:spPr>
-          <a:xfrm>
-            <a:off x="1143000" y="2933700"/>
-            <a:ext cx="11430000" cy="1095375"/>
+          <p:cNvPr id="8" name="TextBox 7"/>
+          <p:cNvSpPr txBox="1"/>
+          <p:nvPr/>
+        </p:nvSpPr>
+        <p:spPr>
+          <a:xfrm>
+            <a:off x="1143000" y="2857500"/>
+            <a:ext cx="7372350" cy="533400"/>
+          </a:xfrm>
+          <a:prstGeom prst="rect">
+            <a:avLst/>
+          </a:prstGeom>
+          <a:noFill/>
+        </p:spPr>
+        <p:txBody>
+          <a:bodyPr wrap="square" lIns="0" rIns="0" tIns="0" bIns="0" anchor="t">
+            <a:spAutoFit/>
+          </a:bodyPr>
+          <a:lstStyle/>
+          <a:p>
+            <a:pPr algn="l">
+              <a:lnSpc>
+                <a:spcPct val="110000"/>
+              </a:lnSpc>
+            </a:pPr>
+            <a:r>
+              <a:rPr sz="3150" b="1">
+                <a:solidFill>
+                  <a:srgbClr val="0D2B5E"/>
+                </a:solidFill>
+                <a:latin typeface="Pretendard"/>
+                <a:ea typeface="Pretendard"/>
+                <a:cs typeface="Pretendard"/>
+              </a:rPr>
+              <a:t>Trino 에서 쓰고 Spark 에서 읽기</a:t>
+            </a:r>
+          </a:p>
+        </p:txBody>
+      </p:sp>
+      <p:sp>
+        <p:nvSpPr>
+          <p:cNvPr id="9" name="TextBox 8"/>
+          <p:cNvSpPr txBox="1"/>
+          <p:nvPr/>
+        </p:nvSpPr>
+        <p:spPr>
+          <a:xfrm>
+            <a:off x="1143000" y="3467100"/>
+            <a:ext cx="7372350" cy="876300"/>
+          </a:xfrm>
+          <a:prstGeom prst="rect">
+            <a:avLst/>
+          </a:prstGeom>
+          <a:noFill/>
+        </p:spPr>
+        <p:txBody>
+          <a:bodyPr wrap="square" lIns="0" rIns="0" tIns="0" bIns="0" anchor="t">
+            <a:spAutoFit/>
+          </a:bodyPr>
+          <a:lstStyle/>
+          <a:p>
+            <a:pPr algn="l">
+              <a:lnSpc>
+                <a:spcPct val="146000"/>
+              </a:lnSpc>
+            </a:pPr>
+            <a:r>
+              <a:rPr sz="2250" b="0">
+                <a:solidFill>
+                  <a:srgbClr val="3D3D3D"/>
+                </a:solidFill>
+                <a:latin typeface="Pretendard"/>
+                <a:ea typeface="Pretendard"/>
+                <a:cs typeface="Pretendard"/>
+              </a:rPr>
+              <a:t>trino&gt; 에서 INSERT, quit 뒤 셸에서 Spark 조회</a:t>
+            </a:r>
+          </a:p>
+        </p:txBody>
+      </p:sp>
+      <p:sp>
+        <p:nvSpPr>
+          <p:cNvPr id="10" name="Rounded Rectangle 9"/>
+          <p:cNvSpPr/>
+          <p:nvPr/>
+        </p:nvSpPr>
+        <p:spPr>
+          <a:xfrm>
+            <a:off x="1143000" y="4610100"/>
+            <a:ext cx="7372350" cy="2857500"/>
           </a:xfrm>
           <a:prstGeom prst="roundRect">
             <a:avLst>
-              <a:gd name="adj" fmla="val 4347"/>
+              <a:gd name="adj" fmla="val 1666"/>
             </a:avLst>
           </a:prstGeom>
           <a:solidFill>
@@ -8980,20 +10303,20 @@
       </p:sp>
       <p:sp>
         <p:nvSpPr>
-          <p:cNvPr id="9" name="Oval 8"/>
-          <p:cNvSpPr/>
-          <p:nvPr/>
-        </p:nvSpPr>
-        <p:spPr>
-          <a:xfrm>
-            <a:off x="1447800" y="3181350"/>
-            <a:ext cx="590550" cy="590550"/>
+          <p:cNvPr id="11" name="Oval 10"/>
+          <p:cNvSpPr/>
+          <p:nvPr/>
+        </p:nvSpPr>
+        <p:spPr>
+          <a:xfrm>
+            <a:off x="1447800" y="5016817"/>
+            <a:ext cx="97155" cy="97155"/>
           </a:xfrm>
           <a:prstGeom prst="ellipse">
             <a:avLst/>
           </a:prstGeom>
           <a:solidFill>
-            <a:srgbClr val="0D2B5E"/>
+            <a:srgbClr val="1E5BC6"/>
           </a:solidFill>
           <a:ln>
             <a:noFill/>
@@ -9010,14 +10333,197 @@
       </p:sp>
       <p:sp>
         <p:nvSpPr>
-          <p:cNvPr id="10" name="TextBox 9"/>
-          <p:cNvSpPr txBox="1"/>
-          <p:nvPr/>
-        </p:nvSpPr>
-        <p:spPr>
-          <a:xfrm>
-            <a:off x="1447800" y="3333750"/>
-            <a:ext cx="590550" cy="323850"/>
+          <p:cNvPr id="12" name="TextBox 11"/>
+          <p:cNvSpPr txBox="1"/>
+          <p:nvPr/>
+        </p:nvSpPr>
+        <p:spPr>
+          <a:xfrm>
+            <a:off x="1633538" y="4838700"/>
+            <a:ext cx="6634162" cy="453390"/>
+          </a:xfrm>
+          <a:prstGeom prst="rect">
+            <a:avLst/>
+          </a:prstGeom>
+          <a:noFill/>
+        </p:spPr>
+        <p:txBody>
+          <a:bodyPr wrap="square" lIns="0" rIns="0" tIns="0" bIns="0" anchor="ctr">
+            <a:spAutoFit/>
+          </a:bodyPr>
+          <a:lstStyle/>
+          <a:p>
+            <a:pPr algn="l">
+              <a:lnSpc>
+                <a:spcPct val="120000"/>
+              </a:lnSpc>
+            </a:pPr>
+            <a:r>
+              <a:rPr sz="1575" b="0">
+                <a:solidFill>
+                  <a:srgbClr val="3D3D3D"/>
+                </a:solidFill>
+                <a:latin typeface="Pretendard"/>
+                <a:ea typeface="Pretendard"/>
+                <a:cs typeface="Pretendard"/>
+              </a:rPr>
+              <a:t>(8, 'jung', 27000, DATE '2026-08-04', 'app')</a:t>
+            </a:r>
+          </a:p>
+        </p:txBody>
+      </p:sp>
+      <p:sp>
+        <p:nvSpPr>
+          <p:cNvPr id="13" name="Oval 12"/>
+          <p:cNvSpPr/>
+          <p:nvPr/>
+        </p:nvSpPr>
+        <p:spPr>
+          <a:xfrm>
+            <a:off x="1447800" y="5527358"/>
+            <a:ext cx="97155" cy="97155"/>
+          </a:xfrm>
+          <a:prstGeom prst="ellipse">
+            <a:avLst/>
+          </a:prstGeom>
+          <a:solidFill>
+            <a:srgbClr val="1E5BC6"/>
+          </a:solidFill>
+          <a:ln>
+            <a:noFill/>
+          </a:ln>
+          <a:effectLst/>
+        </p:spPr>
+        <p:txBody>
+          <a:bodyPr rtlCol="0" anchor="ctr" wrap="square"/>
+          <a:lstStyle/>
+          <a:p>
+            <a:pPr algn="ctr"/>
+          </a:p>
+        </p:txBody>
+      </p:sp>
+      <p:sp>
+        <p:nvSpPr>
+          <p:cNvPr id="14" name="TextBox 13"/>
+          <p:cNvSpPr txBox="1"/>
+          <p:nvPr/>
+        </p:nvSpPr>
+        <p:spPr>
+          <a:xfrm>
+            <a:off x="1633538" y="5349240"/>
+            <a:ext cx="6634162" cy="453390"/>
+          </a:xfrm>
+          <a:prstGeom prst="rect">
+            <a:avLst/>
+          </a:prstGeom>
+          <a:noFill/>
+        </p:spPr>
+        <p:txBody>
+          <a:bodyPr wrap="square" lIns="0" rIns="0" tIns="0" bIns="0" anchor="ctr">
+            <a:spAutoFit/>
+          </a:bodyPr>
+          <a:lstStyle/>
+          <a:p>
+            <a:pPr algn="l">
+              <a:lnSpc>
+                <a:spcPct val="120000"/>
+              </a:lnSpc>
+            </a:pPr>
+            <a:r>
+              <a:rPr sz="1575" b="0">
+                <a:solidFill>
+                  <a:srgbClr val="3D3D3D"/>
+                </a:solidFill>
+                <a:latin typeface="Pretendard"/>
+                <a:ea typeface="Pretendard"/>
+                <a:cs typeface="Pretendard"/>
+              </a:rPr>
+              <a:t>INSERT: 1 row → count 7</a:t>
+            </a:r>
+          </a:p>
+        </p:txBody>
+      </p:sp>
+      <p:sp>
+        <p:nvSpPr>
+          <p:cNvPr id="15" name="Oval 14"/>
+          <p:cNvSpPr/>
+          <p:nvPr/>
+        </p:nvSpPr>
+        <p:spPr>
+          <a:xfrm>
+            <a:off x="1447800" y="6037898"/>
+            <a:ext cx="97155" cy="97155"/>
+          </a:xfrm>
+          <a:prstGeom prst="ellipse">
+            <a:avLst/>
+          </a:prstGeom>
+          <a:solidFill>
+            <a:srgbClr val="1E5BC6"/>
+          </a:solidFill>
+          <a:ln>
+            <a:noFill/>
+          </a:ln>
+          <a:effectLst/>
+        </p:spPr>
+        <p:txBody>
+          <a:bodyPr rtlCol="0" anchor="ctr" wrap="square"/>
+          <a:lstStyle/>
+          <a:p>
+            <a:pPr algn="ctr"/>
+          </a:p>
+        </p:txBody>
+      </p:sp>
+      <p:sp>
+        <p:nvSpPr>
+          <p:cNvPr id="16" name="TextBox 15"/>
+          <p:cNvSpPr txBox="1"/>
+          <p:nvPr/>
+        </p:nvSpPr>
+        <p:spPr>
+          <a:xfrm>
+            <a:off x="1633538" y="5859780"/>
+            <a:ext cx="6634162" cy="453390"/>
+          </a:xfrm>
+          <a:prstGeom prst="rect">
+            <a:avLst/>
+          </a:prstGeom>
+          <a:noFill/>
+        </p:spPr>
+        <p:txBody>
+          <a:bodyPr wrap="square" lIns="0" rIns="0" tIns="0" bIns="0" anchor="ctr">
+            <a:spAutoFit/>
+          </a:bodyPr>
+          <a:lstStyle/>
+          <a:p>
+            <a:pPr algn="l">
+              <a:lnSpc>
+                <a:spcPct val="120000"/>
+              </a:lnSpc>
+            </a:pPr>
+            <a:r>
+              <a:rPr sz="1575" b="0">
+                <a:solidFill>
+                  <a:srgbClr val="3D3D3D"/>
+                </a:solidFill>
+                <a:latin typeface="Pretendard"/>
+                <a:ea typeface="Pretendard"/>
+                <a:cs typeface="Pretendard"/>
+              </a:rPr>
+              <a:t>Spark 끝 줄 8 jung 27000.0 2026-08-04 app</a:t>
+            </a:r>
+          </a:p>
+        </p:txBody>
+      </p:sp>
+      <p:sp>
+        <p:nvSpPr>
+          <p:cNvPr id="17" name="TextBox 16"/>
+          <p:cNvSpPr txBox="1"/>
+          <p:nvPr/>
+        </p:nvSpPr>
+        <p:spPr>
+          <a:xfrm>
+            <a:off x="9772650" y="2857500"/>
+            <a:ext cx="7372350" cy="533400"/>
           </a:xfrm>
           <a:prstGeom prst="rect">
             <a:avLst/>
@@ -9030,35 +10536,35 @@
           </a:bodyPr>
           <a:lstStyle/>
           <a:p>
-            <a:pPr algn="ctr">
-              <a:lnSpc>
-                <a:spcPct val="100000"/>
-              </a:lnSpc>
-            </a:pPr>
-            <a:r>
-              <a:rPr sz="2250" b="1">
-                <a:solidFill>
-                  <a:srgbClr val="FFFFFF"/>
-                </a:solidFill>
-                <a:latin typeface="Pretendard"/>
-                <a:ea typeface="Pretendard"/>
-                <a:cs typeface="Pretendard"/>
-              </a:rPr>
-              <a:t>1</a:t>
-            </a:r>
-          </a:p>
-        </p:txBody>
-      </p:sp>
-      <p:sp>
-        <p:nvSpPr>
-          <p:cNvPr id="11" name="TextBox 10"/>
-          <p:cNvSpPr txBox="1"/>
-          <p:nvPr/>
-        </p:nvSpPr>
-        <p:spPr>
-          <a:xfrm>
-            <a:off x="2324100" y="3143250"/>
-            <a:ext cx="9906000" cy="400050"/>
+            <a:pPr algn="l">
+              <a:lnSpc>
+                <a:spcPct val="110000"/>
+              </a:lnSpc>
+            </a:pPr>
+            <a:r>
+              <a:rPr sz="3150" b="1">
+                <a:solidFill>
+                  <a:srgbClr val="0D2B5E"/>
+                </a:solidFill>
+                <a:latin typeface="Pretendard"/>
+                <a:ea typeface="Pretendard"/>
+                <a:cs typeface="Pretendard"/>
+              </a:rPr>
+              <a:t>Spark 에서 바꾸고 Trino 에서 확인</a:t>
+            </a:r>
+          </a:p>
+        </p:txBody>
+      </p:sp>
+      <p:sp>
+        <p:nvSpPr>
+          <p:cNvPr id="18" name="TextBox 17"/>
+          <p:cNvSpPr txBox="1"/>
+          <p:nvPr/>
+        </p:nvSpPr>
+        <p:spPr>
+          <a:xfrm>
+            <a:off x="9772650" y="3467100"/>
+            <a:ext cx="7372350" cy="876300"/>
           </a:xfrm>
           <a:prstGeom prst="rect">
             <a:avLst/>
@@ -9073,52 +10579,11 @@
           <a:p>
             <a:pPr algn="l">
               <a:lnSpc>
-                <a:spcPct val="110000"/>
-              </a:lnSpc>
-            </a:pPr>
-            <a:r>
-              <a:rPr sz="2475" b="1">
-                <a:solidFill>
-                  <a:srgbClr val="0D2B5E"/>
-                </a:solidFill>
-                <a:latin typeface="Pretendard"/>
-                <a:ea typeface="Pretendard"/>
-                <a:cs typeface="Pretendard"/>
-              </a:rPr>
-              <a:t>"orders$snapshots" 를 committed_at 순으로</a:t>
-            </a:r>
-          </a:p>
-        </p:txBody>
-      </p:sp>
-      <p:sp>
-        <p:nvSpPr>
-          <p:cNvPr id="12" name="TextBox 11"/>
-          <p:cNvSpPr txBox="1"/>
-          <p:nvPr/>
-        </p:nvSpPr>
-        <p:spPr>
-          <a:xfrm>
-            <a:off x="2324100" y="3543300"/>
-            <a:ext cx="9906000" cy="361950"/>
-          </a:xfrm>
-          <a:prstGeom prst="rect">
-            <a:avLst/>
-          </a:prstGeom>
-          <a:noFill/>
-        </p:spPr>
-        <p:txBody>
-          <a:bodyPr wrap="square" lIns="0" rIns="0" tIns="0" bIns="0" anchor="t">
-            <a:spAutoFit/>
-          </a:bodyPr>
-          <a:lstStyle/>
-          <a:p>
-            <a:pPr algn="l">
-              <a:lnSpc>
-                <a:spcPct val="120000"/>
-              </a:lnSpc>
-            </a:pPr>
-            <a:r>
-              <a:rPr sz="2025" b="0">
+                <a:spcPct val="146000"/>
+              </a:lnSpc>
+            </a:pPr>
+            <a:r>
+              <a:rPr sz="2250" b="0">
                 <a:solidFill>
                   <a:srgbClr val="3D3D3D"/>
                 </a:solidFill>
@@ -9126,25 +10591,25 @@
                 <a:ea typeface="Pretendard"/>
                 <a:cs typeface="Pretendard"/>
               </a:rPr>
-              <a:t>4-2 INSERT/UPDATE · 4-3 MERGE · 4-4 INSERT/DELETE · 오늘 것까지 한 이력</a:t>
-            </a:r>
-          </a:p>
-        </p:txBody>
-      </p:sp>
-      <p:sp>
-        <p:nvSpPr>
-          <p:cNvPr id="13" name="Rounded Rectangle 12"/>
-          <p:cNvSpPr/>
-          <p:nvPr/>
-        </p:nvSpPr>
-        <p:spPr>
-          <a:xfrm>
-            <a:off x="1143000" y="4200525"/>
-            <a:ext cx="11430000" cy="1095375"/>
+              <a:t>스키마 진화도 카탈로그를 통해 공유된다</a:t>
+            </a:r>
+          </a:p>
+        </p:txBody>
+      </p:sp>
+      <p:sp>
+        <p:nvSpPr>
+          <p:cNvPr id="19" name="Rounded Rectangle 18"/>
+          <p:cNvSpPr/>
+          <p:nvPr/>
+        </p:nvSpPr>
+        <p:spPr>
+          <a:xfrm>
+            <a:off x="9772650" y="4610100"/>
+            <a:ext cx="7372350" cy="2857500"/>
           </a:xfrm>
           <a:prstGeom prst="roundRect">
             <a:avLst>
-              <a:gd name="adj" fmla="val 4347"/>
+              <a:gd name="adj" fmla="val 1666"/>
             </a:avLst>
           </a:prstGeom>
           <a:solidFill>
@@ -9167,20 +10632,20 @@
       </p:sp>
       <p:sp>
         <p:nvSpPr>
-          <p:cNvPr id="14" name="Oval 13"/>
-          <p:cNvSpPr/>
-          <p:nvPr/>
-        </p:nvSpPr>
-        <p:spPr>
-          <a:xfrm>
-            <a:off x="1447800" y="4448175"/>
-            <a:ext cx="590550" cy="590550"/>
+          <p:cNvPr id="20" name="Oval 19"/>
+          <p:cNvSpPr/>
+          <p:nvPr/>
+        </p:nvSpPr>
+        <p:spPr>
+          <a:xfrm>
+            <a:off x="10077450" y="5016817"/>
+            <a:ext cx="97155" cy="97155"/>
           </a:xfrm>
           <a:prstGeom prst="ellipse">
             <a:avLst/>
           </a:prstGeom>
           <a:solidFill>
-            <a:srgbClr val="0D2B5E"/>
+            <a:srgbClr val="1E5BC6"/>
           </a:solidFill>
           <a:ln>
             <a:noFill/>
@@ -9197,115 +10662,33 @@
       </p:sp>
       <p:sp>
         <p:nvSpPr>
-          <p:cNvPr id="15" name="TextBox 14"/>
-          <p:cNvSpPr txBox="1"/>
-          <p:nvPr/>
-        </p:nvSpPr>
-        <p:spPr>
-          <a:xfrm>
-            <a:off x="1447800" y="4600575"/>
-            <a:ext cx="590550" cy="323850"/>
-          </a:xfrm>
-          <a:prstGeom prst="rect">
-            <a:avLst/>
-          </a:prstGeom>
-          <a:noFill/>
-        </p:spPr>
-        <p:txBody>
-          <a:bodyPr wrap="square" lIns="0" rIns="0" tIns="0" bIns="0" anchor="t">
-            <a:spAutoFit/>
-          </a:bodyPr>
-          <a:lstStyle/>
-          <a:p>
-            <a:pPr algn="ctr">
-              <a:lnSpc>
-                <a:spcPct val="100000"/>
-              </a:lnSpc>
-            </a:pPr>
-            <a:r>
-              <a:rPr sz="2250" b="1">
-                <a:solidFill>
-                  <a:srgbClr val="FFFFFF"/>
-                </a:solidFill>
-                <a:latin typeface="Pretendard"/>
-                <a:ea typeface="Pretendard"/>
-                <a:cs typeface="Pretendard"/>
-              </a:rPr>
-              <a:t>2</a:t>
-            </a:r>
-          </a:p>
-        </p:txBody>
-      </p:sp>
-      <p:sp>
-        <p:nvSpPr>
-          <p:cNvPr id="16" name="TextBox 15"/>
-          <p:cNvSpPr txBox="1"/>
-          <p:nvPr/>
-        </p:nvSpPr>
-        <p:spPr>
-          <a:xfrm>
-            <a:off x="2324100" y="4410075"/>
-            <a:ext cx="9906000" cy="400050"/>
-          </a:xfrm>
-          <a:prstGeom prst="rect">
-            <a:avLst/>
-          </a:prstGeom>
-          <a:noFill/>
-        </p:spPr>
-        <p:txBody>
-          <a:bodyPr wrap="square" lIns="0" rIns="0" tIns="0" bIns="0" anchor="t">
+          <p:cNvPr id="21" name="TextBox 20"/>
+          <p:cNvSpPr txBox="1"/>
+          <p:nvPr/>
+        </p:nvSpPr>
+        <p:spPr>
+          <a:xfrm>
+            <a:off x="10263188" y="4838700"/>
+            <a:ext cx="6634162" cy="453390"/>
+          </a:xfrm>
+          <a:prstGeom prst="rect">
+            <a:avLst/>
+          </a:prstGeom>
+          <a:noFill/>
+        </p:spPr>
+        <p:txBody>
+          <a:bodyPr wrap="square" lIns="0" rIns="0" tIns="0" bIns="0" anchor="ctr">
             <a:spAutoFit/>
           </a:bodyPr>
           <a:lstStyle/>
           <a:p>
             <a:pPr algn="l">
               <a:lnSpc>
-                <a:spcPct val="110000"/>
-              </a:lnSpc>
-            </a:pPr>
-            <a:r>
-              <a:rPr sz="2475" b="1">
-                <a:solidFill>
-                  <a:srgbClr val="0D2B5E"/>
-                </a:solidFill>
-                <a:latin typeface="Pretendard"/>
-                <a:ea typeface="Pretendard"/>
-                <a:cs typeface="Pretendard"/>
-              </a:rPr>
-              <a:t>어느 엔진이 만든 커밋인지 구분이 없다</a:t>
-            </a:r>
-          </a:p>
-        </p:txBody>
-      </p:sp>
-      <p:sp>
-        <p:nvSpPr>
-          <p:cNvPr id="17" name="TextBox 16"/>
-          <p:cNvSpPr txBox="1"/>
-          <p:nvPr/>
-        </p:nvSpPr>
-        <p:spPr>
-          <a:xfrm>
-            <a:off x="2324100" y="4810125"/>
-            <a:ext cx="9906000" cy="361950"/>
-          </a:xfrm>
-          <a:prstGeom prst="rect">
-            <a:avLst/>
-          </a:prstGeom>
-          <a:noFill/>
-        </p:spPr>
-        <p:txBody>
-          <a:bodyPr wrap="square" lIns="0" rIns="0" tIns="0" bIns="0" anchor="t">
-            <a:spAutoFit/>
-          </a:bodyPr>
-          <a:lstStyle/>
-          <a:p>
-            <a:pPr algn="l">
-              <a:lnSpc>
                 <a:spcPct val="120000"/>
               </a:lnSpc>
             </a:pPr>
             <a:r>
-              <a:rPr sz="2025" b="0">
+              <a:rPr sz="1575" b="0">
                 <a:solidFill>
                   <a:srgbClr val="3D3D3D"/>
                 </a:solidFill>
@@ -9313,61 +10696,27 @@
                 <a:ea typeface="Pretendard"/>
                 <a:cs typeface="Pretendard"/>
               </a:rPr>
-              <a:t>Trino INSERT 와 Spark UPDATE 가 같은 이력에 시간순으로 이어진다</a:t>
-            </a:r>
-          </a:p>
-        </p:txBody>
-      </p:sp>
-      <p:sp>
-        <p:nvSpPr>
-          <p:cNvPr id="18" name="Rounded Rectangle 17"/>
-          <p:cNvSpPr/>
-          <p:nvPr/>
-        </p:nvSpPr>
-        <p:spPr>
-          <a:xfrm>
-            <a:off x="1143000" y="5467350"/>
-            <a:ext cx="11430000" cy="1095375"/>
-          </a:xfrm>
-          <a:prstGeom prst="roundRect">
-            <a:avLst>
-              <a:gd name="adj" fmla="val 4347"/>
-            </a:avLst>
-          </a:prstGeom>
-          <a:solidFill>
-            <a:srgbClr val="FAFBFD"/>
-          </a:solidFill>
-          <a:ln w="9525">
-            <a:solidFill>
-              <a:srgbClr val="DCE1E8"/>
-            </a:solidFill>
-          </a:ln>
-          <a:effectLst/>
-        </p:spPr>
-        <p:txBody>
-          <a:bodyPr rtlCol="0" anchor="ctr" wrap="square"/>
-          <a:lstStyle/>
-          <a:p>
-            <a:pPr algn="ctr"/>
-          </a:p>
-        </p:txBody>
-      </p:sp>
-      <p:sp>
-        <p:nvSpPr>
-          <p:cNvPr id="19" name="Oval 18"/>
-          <p:cNvSpPr/>
-          <p:nvPr/>
-        </p:nvSpPr>
-        <p:spPr>
-          <a:xfrm>
-            <a:off x="1447800" y="5715000"/>
-            <a:ext cx="590550" cy="590550"/>
+              <a:t>ALTER TABLE … ADD COLUMN memo STRING</a:t>
+            </a:r>
+          </a:p>
+        </p:txBody>
+      </p:sp>
+      <p:sp>
+        <p:nvSpPr>
+          <p:cNvPr id="22" name="Oval 21"/>
+          <p:cNvSpPr/>
+          <p:nvPr/>
+        </p:nvSpPr>
+        <p:spPr>
+          <a:xfrm>
+            <a:off x="10077450" y="5527358"/>
+            <a:ext cx="97155" cy="97155"/>
           </a:xfrm>
           <a:prstGeom prst="ellipse">
             <a:avLst/>
           </a:prstGeom>
           <a:solidFill>
-            <a:srgbClr val="0D2B5E"/>
+            <a:srgbClr val="1E5BC6"/>
           </a:solidFill>
           <a:ln>
             <a:noFill/>
@@ -9384,14 +10733,156 @@
       </p:sp>
       <p:sp>
         <p:nvSpPr>
-          <p:cNvPr id="20" name="TextBox 19"/>
-          <p:cNvSpPr txBox="1"/>
-          <p:nvPr/>
-        </p:nvSpPr>
-        <p:spPr>
-          <a:xfrm>
-            <a:off x="1447800" y="5867400"/>
-            <a:ext cx="590550" cy="323850"/>
+          <p:cNvPr id="23" name="TextBox 22"/>
+          <p:cNvSpPr txBox="1"/>
+          <p:nvPr/>
+        </p:nvSpPr>
+        <p:spPr>
+          <a:xfrm>
+            <a:off x="10263188" y="5349240"/>
+            <a:ext cx="6634162" cy="453390"/>
+          </a:xfrm>
+          <a:prstGeom prst="rect">
+            <a:avLst/>
+          </a:prstGeom>
+          <a:noFill/>
+        </p:spPr>
+        <p:txBody>
+          <a:bodyPr wrap="square" lIns="0" rIns="0" tIns="0" bIns="0" anchor="ctr">
+            <a:spAutoFit/>
+          </a:bodyPr>
+          <a:lstStyle/>
+          <a:p>
+            <a:pPr algn="l">
+              <a:lnSpc>
+                <a:spcPct val="120000"/>
+              </a:lnSpc>
+            </a:pPr>
+            <a:r>
+              <a:rPr sz="1575" b="0">
+                <a:solidFill>
+                  <a:srgbClr val="3D3D3D"/>
+                </a:solidFill>
+                <a:latin typeface="Pretendard"/>
+                <a:ea typeface="Pretendard"/>
+                <a:cs typeface="Pretendard"/>
+              </a:rPr>
+              <a:t>UPDATE … SET memo = 'vip' WHERE order_id = 4</a:t>
+            </a:r>
+          </a:p>
+        </p:txBody>
+      </p:sp>
+      <p:sp>
+        <p:nvSpPr>
+          <p:cNvPr id="24" name="Oval 23"/>
+          <p:cNvSpPr/>
+          <p:nvPr/>
+        </p:nvSpPr>
+        <p:spPr>
+          <a:xfrm>
+            <a:off x="10077450" y="6037898"/>
+            <a:ext cx="97155" cy="97155"/>
+          </a:xfrm>
+          <a:prstGeom prst="ellipse">
+            <a:avLst/>
+          </a:prstGeom>
+          <a:solidFill>
+            <a:srgbClr val="1E5BC6"/>
+          </a:solidFill>
+          <a:ln>
+            <a:noFill/>
+          </a:ln>
+          <a:effectLst/>
+        </p:spPr>
+        <p:txBody>
+          <a:bodyPr rtlCol="0" anchor="ctr" wrap="square"/>
+          <a:lstStyle/>
+          <a:p>
+            <a:pPr algn="ctr"/>
+          </a:p>
+        </p:txBody>
+      </p:sp>
+      <p:sp>
+        <p:nvSpPr>
+          <p:cNvPr id="25" name="TextBox 24"/>
+          <p:cNvSpPr txBox="1"/>
+          <p:nvPr/>
+        </p:nvSpPr>
+        <p:spPr>
+          <a:xfrm>
+            <a:off x="10263188" y="5859780"/>
+            <a:ext cx="6634162" cy="453390"/>
+          </a:xfrm>
+          <a:prstGeom prst="rect">
+            <a:avLst/>
+          </a:prstGeom>
+          <a:noFill/>
+        </p:spPr>
+        <p:txBody>
+          <a:bodyPr wrap="square" lIns="0" rIns="0" tIns="0" bIns="0" anchor="ctr">
+            <a:spAutoFit/>
+          </a:bodyPr>
+          <a:lstStyle/>
+          <a:p>
+            <a:pPr algn="l">
+              <a:lnSpc>
+                <a:spcPct val="120000"/>
+              </a:lnSpc>
+            </a:pPr>
+            <a:r>
+              <a:rPr sz="1575" b="0">
+                <a:solidFill>
+                  <a:srgbClr val="3D3D3D"/>
+                </a:solidFill>
+                <a:latin typeface="Pretendard"/>
+                <a:ea typeface="Pretendard"/>
+                <a:cs typeface="Pretendard"/>
+              </a:rPr>
+              <a:t>DESCRIBE 여섯 줄(memo varchar) · 4 | choi | vip</a:t>
+            </a:r>
+          </a:p>
+        </p:txBody>
+      </p:sp>
+      <p:sp>
+        <p:nvSpPr>
+          <p:cNvPr id="26" name="Oval 25"/>
+          <p:cNvSpPr/>
+          <p:nvPr/>
+        </p:nvSpPr>
+        <p:spPr>
+          <a:xfrm>
+            <a:off x="8686800" y="3771900"/>
+            <a:ext cx="914400" cy="914400"/>
+          </a:xfrm>
+          <a:prstGeom prst="ellipse">
+            <a:avLst/>
+          </a:prstGeom>
+          <a:solidFill>
+            <a:srgbClr val="0D2B5E"/>
+          </a:solidFill>
+          <a:ln>
+            <a:noFill/>
+          </a:ln>
+          <a:effectLst/>
+        </p:spPr>
+        <p:txBody>
+          <a:bodyPr rtlCol="0" anchor="ctr" wrap="square"/>
+          <a:lstStyle/>
+          <a:p>
+            <a:pPr algn="ctr"/>
+          </a:p>
+        </p:txBody>
+      </p:sp>
+      <p:sp>
+        <p:nvSpPr>
+          <p:cNvPr id="27" name="TextBox 26"/>
+          <p:cNvSpPr txBox="1"/>
+          <p:nvPr/>
+        </p:nvSpPr>
+        <p:spPr>
+          <a:xfrm>
+            <a:off x="8686800" y="4057650"/>
+            <a:ext cx="914400" cy="381000"/>
           </a:xfrm>
           <a:prstGeom prst="rect">
             <a:avLst/>
@@ -9418,230 +10909,14 @@
                 <a:ea typeface="Pretendard"/>
                 <a:cs typeface="Pretendard"/>
               </a:rPr>
-              <a:t>3</a:t>
-            </a:r>
-          </a:p>
-        </p:txBody>
-      </p:sp>
-      <p:sp>
-        <p:nvSpPr>
-          <p:cNvPr id="21" name="TextBox 20"/>
-          <p:cNvSpPr txBox="1"/>
-          <p:nvPr/>
-        </p:nvSpPr>
-        <p:spPr>
-          <a:xfrm>
-            <a:off x="2324100" y="5676900"/>
-            <a:ext cx="9906000" cy="400050"/>
-          </a:xfrm>
-          <a:prstGeom prst="rect">
-            <a:avLst/>
-          </a:prstGeom>
-          <a:noFill/>
-        </p:spPr>
-        <p:txBody>
-          <a:bodyPr wrap="square" lIns="0" rIns="0" tIns="0" bIns="0" anchor="t">
-            <a:spAutoFit/>
-          </a:bodyPr>
-          <a:lstStyle/>
-          <a:p>
-            <a:pPr algn="l">
-              <a:lnSpc>
-                <a:spcPct val="110000"/>
-              </a:lnSpc>
-            </a:pPr>
-            <a:r>
-              <a:rPr sz="2475" b="1">
-                <a:solidFill>
-                  <a:srgbClr val="0D2B5E"/>
-                </a:solidFill>
-                <a:latin typeface="Pretendard"/>
-                <a:ea typeface="Pretendard"/>
-                <a:cs typeface="Pretendard"/>
-              </a:rPr>
-              <a:t>스냅샷 개수를 양쪽에서 센다</a:t>
-            </a:r>
-          </a:p>
-        </p:txBody>
-      </p:sp>
-      <p:sp>
-        <p:nvSpPr>
-          <p:cNvPr id="22" name="TextBox 21"/>
-          <p:cNvSpPr txBox="1"/>
-          <p:nvPr/>
-        </p:nvSpPr>
-        <p:spPr>
-          <a:xfrm>
-            <a:off x="2324100" y="6076950"/>
-            <a:ext cx="9906000" cy="361950"/>
-          </a:xfrm>
-          <a:prstGeom prst="rect">
-            <a:avLst/>
-          </a:prstGeom>
-          <a:noFill/>
-        </p:spPr>
-        <p:txBody>
-          <a:bodyPr wrap="square" lIns="0" rIns="0" tIns="0" bIns="0" anchor="t">
-            <a:spAutoFit/>
-          </a:bodyPr>
-          <a:lstStyle/>
-          <a:p>
-            <a:pPr algn="l">
-              <a:lnSpc>
-                <a:spcPct val="120000"/>
-              </a:lnSpc>
-            </a:pPr>
-            <a:r>
-              <a:rPr sz="2025" b="0">
-                <a:solidFill>
-                  <a:srgbClr val="3D3D3D"/>
-                </a:solidFill>
-                <a:latin typeface="Pretendard"/>
-                <a:ea typeface="Pretendard"/>
-                <a:cs typeface="Pretendard"/>
-              </a:rPr>
-              <a:t>Spark orders.snapshots 의 count 와 Trino "orders$snapshots" 의 count</a:t>
-            </a:r>
-          </a:p>
-        </p:txBody>
-      </p:sp>
-      <p:sp>
-        <p:nvSpPr>
-          <p:cNvPr id="23" name="Rounded Rectangle 22"/>
-          <p:cNvSpPr/>
-          <p:nvPr/>
-        </p:nvSpPr>
-        <p:spPr>
-          <a:xfrm>
-            <a:off x="13144500" y="2933700"/>
-            <a:ext cx="4000500" cy="3629025"/>
-          </a:xfrm>
-          <a:prstGeom prst="roundRect">
-            <a:avLst>
-              <a:gd name="adj" fmla="val 1312"/>
-            </a:avLst>
-          </a:prstGeom>
-          <a:solidFill>
-            <a:srgbClr val="EDF3FD"/>
-          </a:solidFill>
-          <a:ln w="9525">
-            <a:solidFill>
-              <a:srgbClr val="BFD3F5"/>
-            </a:solidFill>
-          </a:ln>
-          <a:effectLst/>
-        </p:spPr>
-        <p:txBody>
-          <a:bodyPr rtlCol="0" anchor="ctr" wrap="square"/>
-          <a:lstStyle/>
-          <a:p>
-            <a:pPr algn="ctr"/>
-          </a:p>
-        </p:txBody>
-      </p:sp>
-      <p:sp>
-        <p:nvSpPr>
-          <p:cNvPr id="24" name="TextBox 23"/>
-          <p:cNvSpPr txBox="1"/>
-          <p:nvPr/>
-        </p:nvSpPr>
-        <p:spPr>
-          <a:xfrm>
-            <a:off x="13487400" y="3929062"/>
-            <a:ext cx="3314700" cy="304800"/>
-          </a:xfrm>
-          <a:prstGeom prst="rect">
-            <a:avLst/>
-          </a:prstGeom>
-          <a:noFill/>
-        </p:spPr>
-        <p:txBody>
-          <a:bodyPr wrap="square" lIns="0" rIns="0" tIns="0" bIns="0" anchor="t">
-            <a:spAutoFit/>
-          </a:bodyPr>
-          <a:lstStyle/>
-          <a:p>
-            <a:pPr algn="l">
-              <a:lnSpc>
-                <a:spcPct val="100000"/>
-              </a:lnSpc>
-            </a:pPr>
-            <a:r>
-              <a:rPr sz="1800" b="1" spc="190">
-                <a:solidFill>
-                  <a:srgbClr val="1E5BC6"/>
-                </a:solidFill>
-                <a:latin typeface="Pretendard"/>
-                <a:ea typeface="Pretendard"/>
-                <a:cs typeface="Pretendard"/>
-              </a:rPr>
-              <a:t>두 숫자가 같으면</a:t>
-            </a:r>
-          </a:p>
-        </p:txBody>
-      </p:sp>
-      <p:sp>
-        <p:nvSpPr>
-          <p:cNvPr id="25" name="TextBox 24"/>
-          <p:cNvSpPr txBox="1"/>
-          <p:nvPr/>
-        </p:nvSpPr>
-        <p:spPr>
-          <a:xfrm>
-            <a:off x="13487400" y="4329112"/>
-            <a:ext cx="3314700" cy="1238250"/>
-          </a:xfrm>
-          <a:prstGeom prst="rect">
-            <a:avLst/>
-          </a:prstGeom>
-          <a:noFill/>
-        </p:spPr>
-        <p:txBody>
-          <a:bodyPr wrap="square" lIns="0" rIns="0" tIns="0" bIns="0" anchor="t">
-            <a:spAutoFit/>
-          </a:bodyPr>
-          <a:lstStyle/>
-          <a:p>
-            <a:pPr algn="l">
-              <a:lnSpc>
-                <a:spcPct val="138000"/>
-              </a:lnSpc>
-            </a:pPr>
-            <a:r>
-              <a:rPr sz="2700" b="1">
-                <a:solidFill>
-                  <a:srgbClr val="0D2B5E"/>
-                </a:solidFill>
-                <a:latin typeface="Pretendard"/>
-                <a:ea typeface="Pretendard"/>
-                <a:cs typeface="Pretendard"/>
-              </a:rPr>
-              <a:t>완전히 같은</a:t>
-            </a:r>
-          </a:p>
-          <a:p>
-            <a:pPr algn="l">
-              <a:lnSpc>
-                <a:spcPct val="138000"/>
-              </a:lnSpc>
-            </a:pPr>
-            <a:r>
-              <a:rPr sz="2700" b="1">
-                <a:solidFill>
-                  <a:srgbClr val="0D2B5E"/>
-                </a:solidFill>
-                <a:latin typeface="Pretendard"/>
-                <a:ea typeface="Pretendard"/>
-                <a:cs typeface="Pretendard"/>
-              </a:rPr>
-              <a:t>메타데이터</a:t>
-            </a:r>
-          </a:p>
-        </p:txBody>
-      </p:sp>
-      <p:sp>
-        <p:nvSpPr>
-          <p:cNvPr id="26" name="Rectangle 25"/>
+              <a:t>VS</a:t>
+            </a:r>
+          </a:p>
+        </p:txBody>
+      </p:sp>
+      <p:sp>
+        <p:nvSpPr>
+          <p:cNvPr id="28" name="Rectangle 27"/>
           <p:cNvSpPr/>
           <p:nvPr/>
         </p:nvSpPr>
@@ -9671,7 +10946,7 @@
       </p:sp>
       <p:sp>
         <p:nvSpPr>
-          <p:cNvPr id="27" name="TextBox 26"/>
+          <p:cNvPr id="29" name="TextBox 28"/>
           <p:cNvSpPr txBox="1"/>
           <p:nvPr/>
         </p:nvSpPr>
@@ -9712,7 +10987,7 @@
       </p:sp>
       <p:sp>
         <p:nvSpPr>
-          <p:cNvPr id="28" name="TextBox 27"/>
+          <p:cNvPr id="30" name="TextBox 29"/>
           <p:cNvSpPr txBox="1"/>
           <p:nvPr/>
         </p:nvSpPr>
@@ -9771,7 +11046,7 @@
       <p:grpSpPr/>
       <p:sp>
         <p:nvSpPr>
-          <p:cNvPr id="2" name="Oval 1"/>
+          <p:cNvPr id="2" name="deckgen:decor"/>
           <p:cNvSpPr/>
           <p:nvPr/>
         </p:nvSpPr>
@@ -9801,7 +11076,7 @@
       </p:sp>
       <p:sp>
         <p:nvSpPr>
-          <p:cNvPr id="3" name="Oval 2"/>
+          <p:cNvPr id="3" name="deckgen:decor"/>
           <p:cNvSpPr/>
           <p:nvPr/>
         </p:nvSpPr>
@@ -9831,7 +11106,7 @@
       </p:sp>
       <p:sp>
         <p:nvSpPr>
-          <p:cNvPr id="4" name="Oval 3"/>
+          <p:cNvPr id="4" name="deckgen:decor"/>
           <p:cNvSpPr/>
           <p:nvPr/>
         </p:nvSpPr>
@@ -9895,7 +11170,7 @@
                 <a:ea typeface="Pretendard"/>
                 <a:cs typeface="Pretendard"/>
               </a:rPr>
-              <a:t>5단계 — 다르게 보게 만들기</a:t>
+              <a:t>4단계</a:t>
             </a:r>
           </a:p>
         </p:txBody>
@@ -9936,7 +11211,7 @@
                 <a:ea typeface="Pretendard"/>
                 <a:cs typeface="Pretendard"/>
               </a:rPr>
-              <a:t>임시 카탈로그 — 이름은 별명일 뿐</a:t>
+              <a:t>커밋 이력이 한 줄로 쌓이는가</a:t>
             </a:r>
           </a:p>
         </p:txBody>
@@ -9973,59 +11248,18 @@
       </p:sp>
       <p:sp>
         <p:nvSpPr>
-          <p:cNvPr id="8" name="TextBox 7"/>
-          <p:cNvSpPr txBox="1"/>
-          <p:nvPr/>
-        </p:nvSpPr>
-        <p:spPr>
-          <a:xfrm>
-            <a:off x="1143000" y="3067050"/>
-            <a:ext cx="16002000" cy="438150"/>
-          </a:xfrm>
-          <a:prstGeom prst="rect">
-            <a:avLst/>
-          </a:prstGeom>
-          <a:noFill/>
-        </p:spPr>
-        <p:txBody>
-          <a:bodyPr wrap="square" lIns="0" rIns="0" tIns="0" bIns="0" anchor="t">
-            <a:spAutoFit/>
-          </a:bodyPr>
-          <a:lstStyle/>
-          <a:p>
-            <a:pPr algn="l">
-              <a:lnSpc>
-                <a:spcPct val="130000"/>
-              </a:lnSpc>
-            </a:pPr>
-            <a:r>
-              <a:rPr sz="2550" b="1">
-                <a:solidFill>
-                  <a:srgbClr val="3D3D3D"/>
-                </a:solidFill>
-                <a:latin typeface="Pretendard"/>
-                <a:ea typeface="Pretendard"/>
-                <a:cs typeface="Pretendard"/>
-              </a:rPr>
-              <a:t>uri·warehouse 가 같은 카탈로그를 iceberg2 라는 이름으로 하나 더 만들어 봅니다</a:t>
-            </a:r>
-          </a:p>
-        </p:txBody>
-      </p:sp>
-      <p:sp>
-        <p:nvSpPr>
-          <p:cNvPr id="9" name="Rounded Rectangle 8"/>
-          <p:cNvSpPr/>
-          <p:nvPr/>
-        </p:nvSpPr>
-        <p:spPr>
-          <a:xfrm>
-            <a:off x="1143000" y="3924300"/>
-            <a:ext cx="3714750" cy="3143250"/>
+          <p:cNvPr id="8" name="Rounded Rectangle 7"/>
+          <p:cNvSpPr/>
+          <p:nvPr/>
+        </p:nvSpPr>
+        <p:spPr>
+          <a:xfrm>
+            <a:off x="1143000" y="2933700"/>
+            <a:ext cx="11430000" cy="1095375"/>
           </a:xfrm>
           <a:prstGeom prst="roundRect">
             <a:avLst>
-              <a:gd name="adj" fmla="val 1515"/>
+              <a:gd name="adj" fmla="val 4347"/>
             </a:avLst>
           </a:prstGeom>
           <a:solidFill>
@@ -10048,16 +11282,16 @@
       </p:sp>
       <p:sp>
         <p:nvSpPr>
-          <p:cNvPr id="10" name="Rectangle 9"/>
-          <p:cNvSpPr/>
-          <p:nvPr/>
-        </p:nvSpPr>
-        <p:spPr>
-          <a:xfrm>
-            <a:off x="1143000" y="3924300"/>
-            <a:ext cx="3714750" cy="914400"/>
-          </a:xfrm>
-          <a:prstGeom prst="rect">
+          <p:cNvPr id="9" name="Oval 8"/>
+          <p:cNvSpPr/>
+          <p:nvPr/>
+        </p:nvSpPr>
+        <p:spPr>
+          <a:xfrm>
+            <a:off x="1447800" y="3181350"/>
+            <a:ext cx="590550" cy="590550"/>
+          </a:xfrm>
+          <a:prstGeom prst="ellipse">
             <a:avLst/>
           </a:prstGeom>
           <a:solidFill>
@@ -10078,14 +11312,55 @@
       </p:sp>
       <p:sp>
         <p:nvSpPr>
+          <p:cNvPr id="10" name="TextBox 9"/>
+          <p:cNvSpPr txBox="1"/>
+          <p:nvPr/>
+        </p:nvSpPr>
+        <p:spPr>
+          <a:xfrm>
+            <a:off x="1447800" y="3333750"/>
+            <a:ext cx="590550" cy="323850"/>
+          </a:xfrm>
+          <a:prstGeom prst="rect">
+            <a:avLst/>
+          </a:prstGeom>
+          <a:noFill/>
+        </p:spPr>
+        <p:txBody>
+          <a:bodyPr wrap="square" lIns="0" rIns="0" tIns="0" bIns="0" anchor="t">
+            <a:spAutoFit/>
+          </a:bodyPr>
+          <a:lstStyle/>
+          <a:p>
+            <a:pPr algn="ctr">
+              <a:lnSpc>
+                <a:spcPct val="100000"/>
+              </a:lnSpc>
+            </a:pPr>
+            <a:r>
+              <a:rPr sz="2250" b="1">
+                <a:solidFill>
+                  <a:srgbClr val="FFFFFF"/>
+                </a:solidFill>
+                <a:latin typeface="Pretendard"/>
+                <a:ea typeface="Pretendard"/>
+                <a:cs typeface="Pretendard"/>
+              </a:rPr>
+              <a:t>1</a:t>
+            </a:r>
+          </a:p>
+        </p:txBody>
+      </p:sp>
+      <p:sp>
+        <p:nvSpPr>
           <p:cNvPr id="11" name="TextBox 10"/>
           <p:cNvSpPr txBox="1"/>
           <p:nvPr/>
         </p:nvSpPr>
         <p:spPr>
           <a:xfrm>
-            <a:off x="1143000" y="4171950"/>
-            <a:ext cx="3714750" cy="419100"/>
+            <a:off x="2324100" y="3143250"/>
+            <a:ext cx="9906000" cy="400050"/>
           </a:xfrm>
           <a:prstGeom prst="rect">
             <a:avLst/>
@@ -10098,21 +11373,21 @@
           </a:bodyPr>
           <a:lstStyle/>
           <a:p>
-            <a:pPr algn="ctr">
-              <a:lnSpc>
-                <a:spcPct val="100000"/>
+            <a:pPr algn="l">
+              <a:lnSpc>
+                <a:spcPct val="110000"/>
               </a:lnSpc>
             </a:pPr>
             <a:r>
               <a:rPr sz="2475" b="1">
                 <a:solidFill>
-                  <a:srgbClr val="FFFFFF"/>
-                </a:solidFill>
-                <a:latin typeface="Pretendard"/>
-                <a:ea typeface="Pretendard"/>
-                <a:cs typeface="Pretendard"/>
-              </a:rPr>
-              <a:t>iceberg2.properties</a:t>
+                  <a:srgbClr val="0D2B5E"/>
+                </a:solidFill>
+                <a:latin typeface="Pretendard"/>
+                <a:ea typeface="Pretendard"/>
+                <a:cs typeface="Pretendard"/>
+              </a:rPr>
+              <a:t>trino&gt; 에서 "orders$snapshots" 를 시간순으로</a:t>
             </a:r>
           </a:p>
         </p:txBody>
@@ -10125,8 +11400,8 @@
         </p:nvSpPr>
         <p:spPr>
           <a:xfrm>
-            <a:off x="1352550" y="5143500"/>
-            <a:ext cx="3295650" cy="1524000"/>
+            <a:off x="2324100" y="3543300"/>
+            <a:ext cx="9906000" cy="361950"/>
           </a:xfrm>
           <a:prstGeom prst="rect">
             <a:avLst/>
@@ -10139,13 +11414,13 @@
           </a:bodyPr>
           <a:lstStyle/>
           <a:p>
-            <a:pPr algn="ctr">
-              <a:lnSpc>
-                <a:spcPct val="146000"/>
-              </a:lnSpc>
-            </a:pPr>
-            <a:r>
-              <a:rPr sz="2100" b="0">
+            <a:pPr algn="l">
+              <a:lnSpc>
+                <a:spcPct val="120000"/>
+              </a:lnSpc>
+            </a:pPr>
+            <a:r>
+              <a:rPr sz="2025" b="0">
                 <a:solidFill>
                   <a:srgbClr val="3D3D3D"/>
                 </a:solidFill>
@@ -10153,25 +11428,7 @@
                 <a:ea typeface="Pretendard"/>
                 <a:cs typeface="Pretendard"/>
               </a:rPr>
-              <a:t>catalog/ 에</a:t>
-            </a:r>
-          </a:p>
-          <a:p>
-            <a:pPr algn="ctr">
-              <a:lnSpc>
-                <a:spcPct val="146000"/>
-              </a:lnSpc>
-            </a:pPr>
-            <a:r>
-              <a:rPr sz="2100" b="0">
-                <a:solidFill>
-                  <a:srgbClr val="3D3D3D"/>
-                </a:solidFill>
-                <a:latin typeface="Pretendard"/>
-                <a:ea typeface="Pretendard"/>
-                <a:cs typeface="Pretendard"/>
-              </a:rPr>
-              <a:t>uri·warehouse 같게</a:t>
+              <a:t>append · overwrite · delete 가 섞여 엔진 구분 없이 한 이력</a:t>
             </a:r>
           </a:p>
         </p:txBody>
@@ -10184,12 +11441,12 @@
         </p:nvSpPr>
         <p:spPr>
           <a:xfrm>
-            <a:off x="5238750" y="3924300"/>
-            <a:ext cx="3714750" cy="3143250"/>
+            <a:off x="1143000" y="4200525"/>
+            <a:ext cx="11430000" cy="1095375"/>
           </a:xfrm>
           <a:prstGeom prst="roundRect">
             <a:avLst>
-              <a:gd name="adj" fmla="val 1515"/>
+              <a:gd name="adj" fmla="val 4347"/>
             </a:avLst>
           </a:prstGeom>
           <a:solidFill>
@@ -10212,20 +11469,20 @@
       </p:sp>
       <p:sp>
         <p:nvSpPr>
-          <p:cNvPr id="14" name="Rectangle 13"/>
-          <p:cNvSpPr/>
-          <p:nvPr/>
-        </p:nvSpPr>
-        <p:spPr>
-          <a:xfrm>
-            <a:off x="5238750" y="3924300"/>
-            <a:ext cx="3714750" cy="914400"/>
-          </a:xfrm>
-          <a:prstGeom prst="rect">
-            <a:avLst/>
-          </a:prstGeom>
-          <a:solidFill>
-            <a:srgbClr val="1E5BC6"/>
+          <p:cNvPr id="14" name="Oval 13"/>
+          <p:cNvSpPr/>
+          <p:nvPr/>
+        </p:nvSpPr>
+        <p:spPr>
+          <a:xfrm>
+            <a:off x="1447800" y="4448175"/>
+            <a:ext cx="590550" cy="590550"/>
+          </a:xfrm>
+          <a:prstGeom prst="ellipse">
+            <a:avLst/>
+          </a:prstGeom>
+          <a:solidFill>
+            <a:srgbClr val="0D2B5E"/>
           </a:solidFill>
           <a:ln>
             <a:noFill/>
@@ -10248,8 +11505,8 @@
         </p:nvSpPr>
         <p:spPr>
           <a:xfrm>
-            <a:off x="5238750" y="4171950"/>
-            <a:ext cx="3714750" cy="419100"/>
+            <a:off x="1447800" y="4600575"/>
+            <a:ext cx="590550" cy="323850"/>
           </a:xfrm>
           <a:prstGeom prst="rect">
             <a:avLst/>
@@ -10268,29 +11525,70 @@
               </a:lnSpc>
             </a:pPr>
             <a:r>
+              <a:rPr sz="2250" b="1">
+                <a:solidFill>
+                  <a:srgbClr val="FFFFFF"/>
+                </a:solidFill>
+                <a:latin typeface="Pretendard"/>
+                <a:ea typeface="Pretendard"/>
+                <a:cs typeface="Pretendard"/>
+              </a:rPr>
+              <a:t>2</a:t>
+            </a:r>
+          </a:p>
+        </p:txBody>
+      </p:sp>
+      <p:sp>
+        <p:nvSpPr>
+          <p:cNvPr id="16" name="TextBox 15"/>
+          <p:cNvSpPr txBox="1"/>
+          <p:nvPr/>
+        </p:nvSpPr>
+        <p:spPr>
+          <a:xfrm>
+            <a:off x="2324100" y="4410075"/>
+            <a:ext cx="9906000" cy="400050"/>
+          </a:xfrm>
+          <a:prstGeom prst="rect">
+            <a:avLst/>
+          </a:prstGeom>
+          <a:noFill/>
+        </p:spPr>
+        <p:txBody>
+          <a:bodyPr wrap="square" lIns="0" rIns="0" tIns="0" bIns="0" anchor="t">
+            <a:spAutoFit/>
+          </a:bodyPr>
+          <a:lstStyle/>
+          <a:p>
+            <a:pPr algn="l">
+              <a:lnSpc>
+                <a:spcPct val="110000"/>
+              </a:lnSpc>
+            </a:pPr>
+            <a:r>
               <a:rPr sz="2475" b="1">
                 <a:solidFill>
-                  <a:srgbClr val="FFFFFF"/>
-                </a:solidFill>
-                <a:latin typeface="Pretendard"/>
-                <a:ea typeface="Pretendard"/>
-                <a:cs typeface="Pretendard"/>
-              </a:rPr>
-              <a:t>restart trino</a:t>
-            </a:r>
-          </a:p>
-        </p:txBody>
-      </p:sp>
-      <p:sp>
-        <p:nvSpPr>
-          <p:cNvPr id="16" name="TextBox 15"/>
-          <p:cNvSpPr txBox="1"/>
-          <p:nvPr/>
-        </p:nvSpPr>
-        <p:spPr>
-          <a:xfrm>
-            <a:off x="5448300" y="5143500"/>
-            <a:ext cx="3295650" cy="1524000"/>
+                  <a:srgbClr val="0D2B5E"/>
+                </a:solidFill>
+                <a:latin typeface="Pretendard"/>
+                <a:ea typeface="Pretendard"/>
+                <a:cs typeface="Pretendard"/>
+              </a:rPr>
+              <a:t>Spark — orders.snapshots 의 count</a:t>
+            </a:r>
+          </a:p>
+        </p:txBody>
+      </p:sp>
+      <p:sp>
+        <p:nvSpPr>
+          <p:cNvPr id="17" name="TextBox 16"/>
+          <p:cNvSpPr txBox="1"/>
+          <p:nvPr/>
+        </p:nvSpPr>
+        <p:spPr>
+          <a:xfrm>
+            <a:off x="2324100" y="4810125"/>
+            <a:ext cx="9906000" cy="361950"/>
           </a:xfrm>
           <a:prstGeom prst="rect">
             <a:avLst/>
@@ -10303,13 +11601,13 @@
           </a:bodyPr>
           <a:lstStyle/>
           <a:p>
-            <a:pPr algn="ctr">
-              <a:lnSpc>
-                <a:spcPct val="146000"/>
-              </a:lnSpc>
-            </a:pPr>
-            <a:r>
-              <a:rPr sz="2100" b="0">
+            <a:pPr algn="l">
+              <a:lnSpc>
+                <a:spcPct val="120000"/>
+              </a:lnSpc>
+            </a:pPr>
+            <a:r>
+              <a:rPr sz="2025" b="0">
                 <a:solidFill>
                   <a:srgbClr val="3D3D3D"/>
                 </a:solidFill>
@@ -10317,43 +11615,25 @@
                 <a:ea typeface="Pretendard"/>
                 <a:cs typeface="Pretendard"/>
               </a:rPr>
-              <a:t>sleep 45</a:t>
-            </a:r>
-          </a:p>
-          <a:p>
-            <a:pPr algn="ctr">
-              <a:lnSpc>
-                <a:spcPct val="146000"/>
-              </a:lnSpc>
-            </a:pPr>
-            <a:r>
-              <a:rPr sz="2100" b="0">
-                <a:solidFill>
-                  <a:srgbClr val="3D3D3D"/>
-                </a:solidFill>
-                <a:latin typeface="Pretendard"/>
-                <a:ea typeface="Pretendard"/>
-                <a:cs typeface="Pretendard"/>
-              </a:rPr>
-              <a:t>SHOW CATALOGS</a:t>
-            </a:r>
-          </a:p>
-        </p:txBody>
-      </p:sp>
-      <p:sp>
-        <p:nvSpPr>
-          <p:cNvPr id="17" name="Rounded Rectangle 16"/>
-          <p:cNvSpPr/>
-          <p:nvPr/>
-        </p:nvSpPr>
-        <p:spPr>
-          <a:xfrm>
-            <a:off x="9334500" y="3924300"/>
-            <a:ext cx="3714750" cy="3143250"/>
+              <a:t>spark-sql -e "SELECT count(*) AS snapshot_count FROM … .snapshots;"</a:t>
+            </a:r>
+          </a:p>
+        </p:txBody>
+      </p:sp>
+      <p:sp>
+        <p:nvSpPr>
+          <p:cNvPr id="18" name="Rounded Rectangle 17"/>
+          <p:cNvSpPr/>
+          <p:nvPr/>
+        </p:nvSpPr>
+        <p:spPr>
+          <a:xfrm>
+            <a:off x="1143000" y="5467350"/>
+            <a:ext cx="11430000" cy="1095375"/>
           </a:xfrm>
           <a:prstGeom prst="roundRect">
             <a:avLst>
-              <a:gd name="adj" fmla="val 1515"/>
+              <a:gd name="adj" fmla="val 4347"/>
             </a:avLst>
           </a:prstGeom>
           <a:solidFill>
@@ -10376,16 +11656,16 @@
       </p:sp>
       <p:sp>
         <p:nvSpPr>
-          <p:cNvPr id="18" name="Rectangle 17"/>
-          <p:cNvSpPr/>
-          <p:nvPr/>
-        </p:nvSpPr>
-        <p:spPr>
-          <a:xfrm>
-            <a:off x="9334500" y="3924300"/>
-            <a:ext cx="3714750" cy="914400"/>
-          </a:xfrm>
-          <a:prstGeom prst="rect">
+          <p:cNvPr id="19" name="Oval 18"/>
+          <p:cNvSpPr/>
+          <p:nvPr/>
+        </p:nvSpPr>
+        <p:spPr>
+          <a:xfrm>
+            <a:off x="1447800" y="5715000"/>
+            <a:ext cx="590550" cy="590550"/>
+          </a:xfrm>
+          <a:prstGeom prst="ellipse">
             <a:avLst/>
           </a:prstGeom>
           <a:solidFill>
@@ -10406,14 +11686,14 @@
       </p:sp>
       <p:sp>
         <p:nvSpPr>
-          <p:cNvPr id="19" name="TextBox 18"/>
-          <p:cNvSpPr txBox="1"/>
-          <p:nvPr/>
-        </p:nvSpPr>
-        <p:spPr>
-          <a:xfrm>
-            <a:off x="9334500" y="4171950"/>
-            <a:ext cx="3714750" cy="419100"/>
+          <p:cNvPr id="20" name="TextBox 19"/>
+          <p:cNvSpPr txBox="1"/>
+          <p:nvPr/>
+        </p:nvSpPr>
+        <p:spPr>
+          <a:xfrm>
+            <a:off x="1447800" y="5867400"/>
+            <a:ext cx="590550" cy="323850"/>
           </a:xfrm>
           <a:prstGeom prst="rect">
             <a:avLst/>
@@ -10432,29 +11712,70 @@
               </a:lnSpc>
             </a:pPr>
             <a:r>
+              <a:rPr sz="2250" b="1">
+                <a:solidFill>
+                  <a:srgbClr val="FFFFFF"/>
+                </a:solidFill>
+                <a:latin typeface="Pretendard"/>
+                <a:ea typeface="Pretendard"/>
+                <a:cs typeface="Pretendard"/>
+              </a:rPr>
+              <a:t>3</a:t>
+            </a:r>
+          </a:p>
+        </p:txBody>
+      </p:sp>
+      <p:sp>
+        <p:nvSpPr>
+          <p:cNvPr id="21" name="TextBox 20"/>
+          <p:cNvSpPr txBox="1"/>
+          <p:nvPr/>
+        </p:nvSpPr>
+        <p:spPr>
+          <a:xfrm>
+            <a:off x="2324100" y="5676900"/>
+            <a:ext cx="9906000" cy="400050"/>
+          </a:xfrm>
+          <a:prstGeom prst="rect">
+            <a:avLst/>
+          </a:prstGeom>
+          <a:noFill/>
+        </p:spPr>
+        <p:txBody>
+          <a:bodyPr wrap="square" lIns="0" rIns="0" tIns="0" bIns="0" anchor="t">
+            <a:spAutoFit/>
+          </a:bodyPr>
+          <a:lstStyle/>
+          <a:p>
+            <a:pPr algn="l">
+              <a:lnSpc>
+                <a:spcPct val="110000"/>
+              </a:lnSpc>
+            </a:pPr>
+            <a:r>
               <a:rPr sz="2475" b="1">
                 <a:solidFill>
-                  <a:srgbClr val="FFFFFF"/>
-                </a:solidFill>
-                <a:latin typeface="Pretendard"/>
-                <a:ea typeface="Pretendard"/>
-                <a:cs typeface="Pretendard"/>
-              </a:rPr>
-              <a:t>count 비교</a:t>
-            </a:r>
-          </a:p>
-        </p:txBody>
-      </p:sp>
-      <p:sp>
-        <p:nvSpPr>
-          <p:cNvPr id="20" name="TextBox 19"/>
-          <p:cNvSpPr txBox="1"/>
-          <p:nvPr/>
-        </p:nvSpPr>
-        <p:spPr>
-          <a:xfrm>
-            <a:off x="9544050" y="5143500"/>
-            <a:ext cx="3295650" cy="1524000"/>
+                  <a:srgbClr val="0D2B5E"/>
+                </a:solidFill>
+                <a:latin typeface="Pretendard"/>
+                <a:ea typeface="Pretendard"/>
+                <a:cs typeface="Pretendard"/>
+              </a:rPr>
+              <a:t>Trino — 바깥을 작은따옴표로 감싼 --execute</a:t>
+            </a:r>
+          </a:p>
+        </p:txBody>
+      </p:sp>
+      <p:sp>
+        <p:nvSpPr>
+          <p:cNvPr id="22" name="TextBox 21"/>
+          <p:cNvSpPr txBox="1"/>
+          <p:nvPr/>
+        </p:nvSpPr>
+        <p:spPr>
+          <a:xfrm>
+            <a:off x="2324100" y="6076950"/>
+            <a:ext cx="9906000" cy="361950"/>
           </a:xfrm>
           <a:prstGeom prst="rect">
             <a:avLst/>
@@ -10467,13 +11788,13 @@
           </a:bodyPr>
           <a:lstStyle/>
           <a:p>
-            <a:pPr algn="ctr">
-              <a:lnSpc>
-                <a:spcPct val="146000"/>
-              </a:lnSpc>
-            </a:pPr>
-            <a:r>
-              <a:rPr sz="2100" b="0">
+            <a:pPr algn="l">
+              <a:lnSpc>
+                <a:spcPct val="120000"/>
+              </a:lnSpc>
+            </a:pPr>
+            <a:r>
+              <a:rPr sz="2025" b="0">
                 <a:solidFill>
                   <a:srgbClr val="3D3D3D"/>
                 </a:solidFill>
@@ -10481,51 +11802,33 @@
                 <a:ea typeface="Pretendard"/>
                 <a:cs typeface="Pretendard"/>
               </a:rPr>
-              <a:t>iceberg 와</a:t>
-            </a:r>
-          </a:p>
-          <a:p>
-            <a:pPr algn="ctr">
-              <a:lnSpc>
-                <a:spcPct val="146000"/>
-              </a:lnSpc>
-            </a:pPr>
-            <a:r>
-              <a:rPr sz="2100" b="0">
-                <a:solidFill>
-                  <a:srgbClr val="3D3D3D"/>
-                </a:solidFill>
-                <a:latin typeface="Pretendard"/>
-                <a:ea typeface="Pretendard"/>
-                <a:cs typeface="Pretendard"/>
-              </a:rPr>
-              <a:t>iceberg2 같음</a:t>
-            </a:r>
-          </a:p>
-        </p:txBody>
-      </p:sp>
-      <p:sp>
-        <p:nvSpPr>
-          <p:cNvPr id="21" name="Rounded Rectangle 20"/>
-          <p:cNvSpPr/>
-          <p:nvPr/>
-        </p:nvSpPr>
-        <p:spPr>
-          <a:xfrm>
-            <a:off x="13430250" y="3924300"/>
-            <a:ext cx="3714750" cy="3143250"/>
+              <a:t>큰따옴표면 셸이 $snapshots 를 지워 orders 행 수 "7" 이 나온다</a:t>
+            </a:r>
+          </a:p>
+        </p:txBody>
+      </p:sp>
+      <p:sp>
+        <p:nvSpPr>
+          <p:cNvPr id="23" name="Rounded Rectangle 22"/>
+          <p:cNvSpPr/>
+          <p:nvPr/>
+        </p:nvSpPr>
+        <p:spPr>
+          <a:xfrm>
+            <a:off x="13144500" y="2933700"/>
+            <a:ext cx="4000500" cy="3629025"/>
           </a:xfrm>
           <a:prstGeom prst="roundRect">
             <a:avLst>
-              <a:gd name="adj" fmla="val 1515"/>
+              <a:gd name="adj" fmla="val 1312"/>
             </a:avLst>
           </a:prstGeom>
           <a:solidFill>
-            <a:srgbClr val="FAFBFD"/>
+            <a:srgbClr val="EDF3FD"/>
           </a:solidFill>
           <a:ln w="9525">
             <a:solidFill>
-              <a:srgbClr val="DCE1E8"/>
+              <a:srgbClr val="BFD3F5"/>
             </a:solidFill>
           </a:ln>
           <a:effectLst/>
@@ -10540,20 +11843,120 @@
       </p:sp>
       <p:sp>
         <p:nvSpPr>
-          <p:cNvPr id="22" name="Rectangle 21"/>
-          <p:cNvSpPr/>
-          <p:nvPr/>
-        </p:nvSpPr>
-        <p:spPr>
-          <a:xfrm>
-            <a:off x="13430250" y="3924300"/>
-            <a:ext cx="3714750" cy="914400"/>
-          </a:xfrm>
-          <a:prstGeom prst="rect">
-            <a:avLst/>
-          </a:prstGeom>
-          <a:solidFill>
-            <a:srgbClr val="1E5BC6"/>
+          <p:cNvPr id="24" name="TextBox 23"/>
+          <p:cNvSpPr txBox="1"/>
+          <p:nvPr/>
+        </p:nvSpPr>
+        <p:spPr>
+          <a:xfrm>
+            <a:off x="13487400" y="3929062"/>
+            <a:ext cx="3314700" cy="304800"/>
+          </a:xfrm>
+          <a:prstGeom prst="rect">
+            <a:avLst/>
+          </a:prstGeom>
+          <a:noFill/>
+        </p:spPr>
+        <p:txBody>
+          <a:bodyPr wrap="square" lIns="0" rIns="0" tIns="0" bIns="0" anchor="t">
+            <a:spAutoFit/>
+          </a:bodyPr>
+          <a:lstStyle/>
+          <a:p>
+            <a:pPr algn="l">
+              <a:lnSpc>
+                <a:spcPct val="100000"/>
+              </a:lnSpc>
+            </a:pPr>
+            <a:r>
+              <a:rPr sz="1800" b="1" spc="190">
+                <a:solidFill>
+                  <a:srgbClr val="1E5BC6"/>
+                </a:solidFill>
+                <a:latin typeface="Pretendard"/>
+                <a:ea typeface="Pretendard"/>
+                <a:cs typeface="Pretendard"/>
+              </a:rPr>
+              <a:t>실측(쓰기 횟수마다 다름)</a:t>
+            </a:r>
+          </a:p>
+        </p:txBody>
+      </p:sp>
+      <p:sp>
+        <p:nvSpPr>
+          <p:cNvPr id="25" name="TextBox 24"/>
+          <p:cNvSpPr txBox="1"/>
+          <p:nvPr/>
+        </p:nvSpPr>
+        <p:spPr>
+          <a:xfrm>
+            <a:off x="13487400" y="4329112"/>
+            <a:ext cx="3314700" cy="1238250"/>
+          </a:xfrm>
+          <a:prstGeom prst="rect">
+            <a:avLst/>
+          </a:prstGeom>
+          <a:noFill/>
+        </p:spPr>
+        <p:txBody>
+          <a:bodyPr wrap="square" lIns="0" rIns="0" tIns="0" bIns="0" anchor="t">
+            <a:spAutoFit/>
+          </a:bodyPr>
+          <a:lstStyle/>
+          <a:p>
+            <a:pPr algn="l">
+              <a:lnSpc>
+                <a:spcPct val="138000"/>
+              </a:lnSpc>
+            </a:pPr>
+            <a:r>
+              <a:rPr sz="2700" b="1">
+                <a:solidFill>
+                  <a:srgbClr val="0D2B5E"/>
+                </a:solidFill>
+                <a:latin typeface="Pretendard"/>
+                <a:ea typeface="Pretendard"/>
+                <a:cs typeface="Pretendard"/>
+              </a:rPr>
+              <a:t>Spark 9</a:t>
+            </a:r>
+          </a:p>
+          <a:p>
+            <a:pPr algn="l">
+              <a:lnSpc>
+                <a:spcPct val="138000"/>
+              </a:lnSpc>
+            </a:pPr>
+            <a:r>
+              <a:rPr sz="2700" b="1">
+                <a:solidFill>
+                  <a:srgbClr val="0D2B5E"/>
+                </a:solidFill>
+                <a:latin typeface="Pretendard"/>
+                <a:ea typeface="Pretendard"/>
+                <a:cs typeface="Pretendard"/>
+              </a:rPr>
+              <a:t>Trino "9"</a:t>
+            </a:r>
+          </a:p>
+        </p:txBody>
+      </p:sp>
+      <p:sp>
+        <p:nvSpPr>
+          <p:cNvPr id="26" name="Rectangle 25"/>
+          <p:cNvSpPr/>
+          <p:nvPr/>
+        </p:nvSpPr>
+        <p:spPr>
+          <a:xfrm>
+            <a:off x="1143000" y="8058150"/>
+            <a:ext cx="16002000" cy="9525"/>
+          </a:xfrm>
+          <a:prstGeom prst="rect">
+            <a:avLst/>
+          </a:prstGeom>
+          <a:solidFill>
+            <a:srgbClr val="DCE1E8"/>
           </a:solidFill>
           <a:ln>
             <a:noFill/>
@@ -10570,137 +11973,7 @@
       </p:sp>
       <p:sp>
         <p:nvSpPr>
-          <p:cNvPr id="23" name="TextBox 22"/>
-          <p:cNvSpPr txBox="1"/>
-          <p:nvPr/>
-        </p:nvSpPr>
-        <p:spPr>
-          <a:xfrm>
-            <a:off x="13430250" y="4171950"/>
-            <a:ext cx="3714750" cy="419100"/>
-          </a:xfrm>
-          <a:prstGeom prst="rect">
-            <a:avLst/>
-          </a:prstGeom>
-          <a:noFill/>
-        </p:spPr>
-        <p:txBody>
-          <a:bodyPr wrap="square" lIns="0" rIns="0" tIns="0" bIns="0" anchor="t">
-            <a:spAutoFit/>
-          </a:bodyPr>
-          <a:lstStyle/>
-          <a:p>
-            <a:pPr algn="ctr">
-              <a:lnSpc>
-                <a:spcPct val="100000"/>
-              </a:lnSpc>
-            </a:pPr>
-            <a:r>
-              <a:rPr sz="2475" b="1">
-                <a:solidFill>
-                  <a:srgbClr val="FFFFFF"/>
-                </a:solidFill>
-                <a:latin typeface="Pretendard"/>
-                <a:ea typeface="Pretendard"/>
-                <a:cs typeface="Pretendard"/>
-              </a:rPr>
-              <a:t>정리</a:t>
-            </a:r>
-          </a:p>
-        </p:txBody>
-      </p:sp>
-      <p:sp>
-        <p:nvSpPr>
-          <p:cNvPr id="24" name="TextBox 23"/>
-          <p:cNvSpPr txBox="1"/>
-          <p:nvPr/>
-        </p:nvSpPr>
-        <p:spPr>
-          <a:xfrm>
-            <a:off x="13639800" y="5143500"/>
-            <a:ext cx="3295650" cy="1524000"/>
-          </a:xfrm>
-          <a:prstGeom prst="rect">
-            <a:avLst/>
-          </a:prstGeom>
-          <a:noFill/>
-        </p:spPr>
-        <p:txBody>
-          <a:bodyPr wrap="square" lIns="0" rIns="0" tIns="0" bIns="0" anchor="t">
-            <a:spAutoFit/>
-          </a:bodyPr>
-          <a:lstStyle/>
-          <a:p>
-            <a:pPr algn="ctr">
-              <a:lnSpc>
-                <a:spcPct val="146000"/>
-              </a:lnSpc>
-            </a:pPr>
-            <a:r>
-              <a:rPr sz="2100" b="0">
-                <a:solidFill>
-                  <a:srgbClr val="3D3D3D"/>
-                </a:solidFill>
-                <a:latin typeface="Pretendard"/>
-                <a:ea typeface="Pretendard"/>
-                <a:cs typeface="Pretendard"/>
-              </a:rPr>
-              <a:t>rm 뒤</a:t>
-            </a:r>
-          </a:p>
-          <a:p>
-            <a:pPr algn="ctr">
-              <a:lnSpc>
-                <a:spcPct val="146000"/>
-              </a:lnSpc>
-            </a:pPr>
-            <a:r>
-              <a:rPr sz="2100" b="0">
-                <a:solidFill>
-                  <a:srgbClr val="3D3D3D"/>
-                </a:solidFill>
-                <a:latin typeface="Pretendard"/>
-                <a:ea typeface="Pretendard"/>
-                <a:cs typeface="Pretendard"/>
-              </a:rPr>
-              <a:t>restart trino</a:t>
-            </a:r>
-          </a:p>
-        </p:txBody>
-      </p:sp>
-      <p:sp>
-        <p:nvSpPr>
-          <p:cNvPr id="25" name="Rectangle 24"/>
-          <p:cNvSpPr/>
-          <p:nvPr/>
-        </p:nvSpPr>
-        <p:spPr>
-          <a:xfrm>
-            <a:off x="1143000" y="8058150"/>
-            <a:ext cx="16002000" cy="9525"/>
-          </a:xfrm>
-          <a:prstGeom prst="rect">
-            <a:avLst/>
-          </a:prstGeom>
-          <a:solidFill>
-            <a:srgbClr val="DCE1E8"/>
-          </a:solidFill>
-          <a:ln>
-            <a:noFill/>
-          </a:ln>
-          <a:effectLst/>
-        </p:spPr>
-        <p:txBody>
-          <a:bodyPr rtlCol="0" anchor="ctr" wrap="square"/>
-          <a:lstStyle/>
-          <a:p>
-            <a:pPr algn="ctr"/>
-          </a:p>
-        </p:txBody>
-      </p:sp>
-      <p:sp>
-        <p:nvSpPr>
-          <p:cNvPr id="26" name="TextBox 25"/>
+          <p:cNvPr id="27" name="TextBox 26"/>
           <p:cNvSpPr txBox="1"/>
           <p:nvPr/>
         </p:nvSpPr>
@@ -10741,7 +12014,7 @@
       </p:sp>
       <p:sp>
         <p:nvSpPr>
-          <p:cNvPr id="27" name="TextBox 26"/>
+          <p:cNvPr id="28" name="TextBox 27"/>
           <p:cNvSpPr txBox="1"/>
           <p:nvPr/>
         </p:nvSpPr>
@@ -10800,7 +12073,7 @@
       <p:grpSpPr/>
       <p:sp>
         <p:nvSpPr>
-          <p:cNvPr id="2" name="Oval 1"/>
+          <p:cNvPr id="2" name="deckgen:decor"/>
           <p:cNvSpPr/>
           <p:nvPr/>
         </p:nvSpPr>
@@ -10830,7 +12103,7 @@
       </p:sp>
       <p:sp>
         <p:nvSpPr>
-          <p:cNvPr id="3" name="Oval 2"/>
+          <p:cNvPr id="3" name="deckgen:decor"/>
           <p:cNvSpPr/>
           <p:nvPr/>
         </p:nvSpPr>
@@ -10860,7 +12133,7 @@
       </p:sp>
       <p:sp>
         <p:nvSpPr>
-          <p:cNvPr id="4" name="Oval 3"/>
+          <p:cNvPr id="4" name="deckgen:decor"/>
           <p:cNvSpPr/>
           <p:nvPr/>
         </p:nvSpPr>
@@ -10924,7 +12197,7 @@
                 <a:ea typeface="Pretendard"/>
                 <a:cs typeface="Pretendard"/>
               </a:rPr>
-              <a:t>6단계 — 일부러 실패시키기</a:t>
+              <a:t>5단계</a:t>
             </a:r>
           </a:p>
         </p:txBody>
@@ -10965,7 +12238,7 @@
                 <a:ea typeface="Pretendard"/>
                 <a:cs typeface="Pretendard"/>
               </a:rPr>
-              <a:t>실패한 쓰기는 어디에도 흔적이 없다</a:t>
+              <a:t>카탈로그 이름은 별명 — iceberg2 를 하나 더</a:t>
             </a:r>
           </a:p>
         </p:txBody>
@@ -11008,8 +12281,8 @@
         </p:nvSpPr>
         <p:spPr>
           <a:xfrm>
-            <a:off x="1143000" y="2857500"/>
-            <a:ext cx="7372350" cy="533400"/>
+            <a:off x="1143000" y="3067050"/>
+            <a:ext cx="16002000" cy="438150"/>
           </a:xfrm>
           <a:prstGeom prst="rect">
             <a:avLst/>
@@ -11024,52 +12297,11 @@
           <a:p>
             <a:pPr algn="l">
               <a:lnSpc>
-                <a:spcPct val="110000"/>
-              </a:lnSpc>
-            </a:pPr>
-            <a:r>
-              <a:rPr sz="3150" b="1">
-                <a:solidFill>
-                  <a:srgbClr val="0D2B5E"/>
-                </a:solidFill>
-                <a:latin typeface="Pretendard"/>
-                <a:ea typeface="Pretendard"/>
-                <a:cs typeface="Pretendard"/>
-              </a:rPr>
-              <a:t>Spark — 타입이 안 맞는 INSERT</a:t>
-            </a:r>
-          </a:p>
-        </p:txBody>
-      </p:sp>
-      <p:sp>
-        <p:nvSpPr>
-          <p:cNvPr id="9" name="TextBox 8"/>
-          <p:cNvSpPr txBox="1"/>
-          <p:nvPr/>
-        </p:nvSpPr>
-        <p:spPr>
-          <a:xfrm>
-            <a:off x="1143000" y="3467100"/>
-            <a:ext cx="7372350" cy="876300"/>
-          </a:xfrm>
-          <a:prstGeom prst="rect">
-            <a:avLst/>
-          </a:prstGeom>
-          <a:noFill/>
-        </p:spPr>
-        <p:txBody>
-          <a:bodyPr wrap="square" lIns="0" rIns="0" tIns="0" bIns="0" anchor="t">
-            <a:spAutoFit/>
-          </a:bodyPr>
-          <a:lstStyle/>
-          <a:p>
-            <a:pPr algn="l">
-              <a:lnSpc>
-                <a:spcPct val="146000"/>
-              </a:lnSpc>
-            </a:pPr>
-            <a:r>
-              <a:rPr sz="2250" b="0">
+                <a:spcPct val="130000"/>
+              </a:lnSpc>
+            </a:pPr>
+            <a:r>
+              <a:rPr sz="2550" b="1">
                 <a:solidFill>
                   <a:srgbClr val="3D3D3D"/>
                 </a:solidFill>
@@ -11077,25 +12309,25 @@
                 <a:ea typeface="Pretendard"/>
                 <a:cs typeface="Pretendard"/>
               </a:rPr>
-              <a:t>order_id 자리에 '없는아이디' 를 넣는다</a:t>
-            </a:r>
-          </a:p>
-        </p:txBody>
-      </p:sp>
-      <p:sp>
-        <p:nvSpPr>
-          <p:cNvPr id="10" name="Rounded Rectangle 9"/>
-          <p:cNvSpPr/>
-          <p:nvPr/>
-        </p:nvSpPr>
-        <p:spPr>
-          <a:xfrm>
-            <a:off x="1143000" y="4610100"/>
-            <a:ext cx="7372350" cy="2857500"/>
+              <a:t>uri·warehouse 는 그대로, 이름만 iceberg2 — 목록 실측 "iceberg" "iceberg2" "system"</a:t>
+            </a:r>
+          </a:p>
+        </p:txBody>
+      </p:sp>
+      <p:sp>
+        <p:nvSpPr>
+          <p:cNvPr id="9" name="Rounded Rectangle 8"/>
+          <p:cNvSpPr/>
+          <p:nvPr/>
+        </p:nvSpPr>
+        <p:spPr>
+          <a:xfrm>
+            <a:off x="1143000" y="3924300"/>
+            <a:ext cx="2895600" cy="3143250"/>
           </a:xfrm>
           <a:prstGeom prst="roundRect">
             <a:avLst>
-              <a:gd name="adj" fmla="val 1666"/>
+              <a:gd name="adj" fmla="val 1644"/>
             </a:avLst>
           </a:prstGeom>
           <a:solidFill>
@@ -11118,14 +12350,14 @@
       </p:sp>
       <p:sp>
         <p:nvSpPr>
-          <p:cNvPr id="11" name="Rectangle 10"/>
-          <p:cNvSpPr/>
-          <p:nvPr/>
-        </p:nvSpPr>
-        <p:spPr>
-          <a:xfrm>
-            <a:off x="1390650" y="4838700"/>
-            <a:ext cx="3333274" cy="599122"/>
+          <p:cNvPr id="10" name="Rectangle 9"/>
+          <p:cNvSpPr/>
+          <p:nvPr/>
+        </p:nvSpPr>
+        <p:spPr>
+          <a:xfrm>
+            <a:off x="1143000" y="3924300"/>
+            <a:ext cx="2895600" cy="914400"/>
           </a:xfrm>
           <a:prstGeom prst="rect">
             <a:avLst/>
@@ -11148,41 +12380,100 @@
       </p:sp>
       <p:sp>
         <p:nvSpPr>
+          <p:cNvPr id="11" name="TextBox 10"/>
+          <p:cNvSpPr txBox="1"/>
+          <p:nvPr/>
+        </p:nvSpPr>
+        <p:spPr>
+          <a:xfrm>
+            <a:off x="1143000" y="4171950"/>
+            <a:ext cx="2895600" cy="419100"/>
+          </a:xfrm>
+          <a:prstGeom prst="rect">
+            <a:avLst/>
+          </a:prstGeom>
+          <a:noFill/>
+        </p:spPr>
+        <p:txBody>
+          <a:bodyPr wrap="square" lIns="0" rIns="0" tIns="0" bIns="0" anchor="t">
+            <a:spAutoFit/>
+          </a:bodyPr>
+          <a:lstStyle/>
+          <a:p>
+            <a:pPr algn="ctr">
+              <a:lnSpc>
+                <a:spcPct val="100000"/>
+              </a:lnSpc>
+            </a:pPr>
+            <a:r>
+              <a:rPr sz="2475" b="1">
+                <a:solidFill>
+                  <a:srgbClr val="FFFFFF"/>
+                </a:solidFill>
+                <a:latin typeface="Pretendard"/>
+                <a:ea typeface="Pretendard"/>
+                <a:cs typeface="Pretendard"/>
+              </a:rPr>
+              <a:t>iceberg2 파일</a:t>
+            </a:r>
+          </a:p>
+        </p:txBody>
+      </p:sp>
+      <p:sp>
+        <p:nvSpPr>
           <p:cNvPr id="12" name="TextBox 11"/>
           <p:cNvSpPr txBox="1"/>
           <p:nvPr/>
         </p:nvSpPr>
         <p:spPr>
           <a:xfrm>
-            <a:off x="1390650" y="4838700"/>
-            <a:ext cx="3333274" cy="599122"/>
-          </a:xfrm>
-          <a:prstGeom prst="rect">
-            <a:avLst/>
-          </a:prstGeom>
-          <a:noFill/>
-        </p:spPr>
-        <p:txBody>
-          <a:bodyPr wrap="square" lIns="0" rIns="0" tIns="0" bIns="0" anchor="ctr">
+            <a:off x="1352550" y="5143500"/>
+            <a:ext cx="2476500" cy="1524000"/>
+          </a:xfrm>
+          <a:prstGeom prst="rect">
+            <a:avLst/>
+          </a:prstGeom>
+          <a:noFill/>
+        </p:spPr>
+        <p:txBody>
+          <a:bodyPr wrap="square" lIns="0" rIns="0" tIns="0" bIns="0" anchor="t">
             <a:spAutoFit/>
           </a:bodyPr>
           <a:lstStyle/>
           <a:p>
             <a:pPr algn="ctr">
               <a:lnSpc>
-                <a:spcPct val="100000"/>
-              </a:lnSpc>
-            </a:pPr>
-            <a:r>
-              <a:rPr sz="2025" b="1">
-                <a:solidFill>
-                  <a:srgbClr val="FFFFFF"/>
-                </a:solidFill>
-                <a:latin typeface="Pretendard"/>
-                <a:ea typeface="Pretendard"/>
-                <a:cs typeface="Pretendard"/>
-              </a:rPr>
-              <a:t>INSERT 시도</a:t>
+                <a:spcPct val="146000"/>
+              </a:lnSpc>
+            </a:pPr>
+            <a:r>
+              <a:rPr sz="2100" b="0">
+                <a:solidFill>
+                  <a:srgbClr val="3D3D3D"/>
+                </a:solidFill>
+                <a:latin typeface="Pretendard"/>
+                <a:ea typeface="Pretendard"/>
+                <a:cs typeface="Pretendard"/>
+              </a:rPr>
+              <a:t>cat &gt; 히어독</a:t>
+            </a:r>
+          </a:p>
+          <a:p>
+            <a:pPr algn="ctr">
+              <a:lnSpc>
+                <a:spcPct val="146000"/>
+              </a:lnSpc>
+            </a:pPr>
+            <a:r>
+              <a:rPr sz="2100" b="0">
+                <a:solidFill>
+                  <a:srgbClr val="3D3D3D"/>
+                </a:solidFill>
+                <a:latin typeface="Pretendard"/>
+                <a:ea typeface="Pretendard"/>
+                <a:cs typeface="Pretendard"/>
+              </a:rPr>
+              <a:t>uri·warehouse 같게</a:t>
             </a:r>
           </a:p>
         </p:txBody>
@@ -11195,12 +12486,12 @@
         </p:nvSpPr>
         <p:spPr>
           <a:xfrm>
-            <a:off x="1390650" y="5583555"/>
-            <a:ext cx="3333274" cy="1214438"/>
+            <a:off x="4419600" y="3924300"/>
+            <a:ext cx="2895600" cy="3143250"/>
           </a:xfrm>
           <a:prstGeom prst="roundRect">
             <a:avLst>
-              <a:gd name="adj" fmla="val 3921"/>
+              <a:gd name="adj" fmla="val 1644"/>
             </a:avLst>
           </a:prstGeom>
           <a:solidFill>
@@ -11223,57 +12514,16 @@
       </p:sp>
       <p:sp>
         <p:nvSpPr>
-          <p:cNvPr id="14" name="TextBox 13"/>
-          <p:cNvSpPr txBox="1"/>
-          <p:nvPr/>
-        </p:nvSpPr>
-        <p:spPr>
-          <a:xfrm>
-            <a:off x="1524000" y="5583555"/>
-            <a:ext cx="3066574" cy="1214438"/>
-          </a:xfrm>
-          <a:prstGeom prst="rect">
-            <a:avLst/>
-          </a:prstGeom>
-          <a:noFill/>
-        </p:spPr>
-        <p:txBody>
-          <a:bodyPr wrap="square" lIns="0" rIns="0" tIns="0" bIns="0" anchor="ctr">
-            <a:spAutoFit/>
-          </a:bodyPr>
-          <a:lstStyle/>
-          <a:p>
-            <a:pPr algn="ctr">
-              <a:lnSpc>
-                <a:spcPct val="135000"/>
-              </a:lnSpc>
-            </a:pPr>
-            <a:r>
-              <a:rPr sz="1500" b="0">
-                <a:solidFill>
-                  <a:srgbClr val="3D3D3D"/>
-                </a:solidFill>
-                <a:latin typeface="Pretendard"/>
-                <a:ea typeface="Pretendard"/>
-                <a:cs typeface="Pretendard"/>
-              </a:rPr>
-              <a:t>타입 오류</a:t>
-            </a:r>
-          </a:p>
-        </p:txBody>
-      </p:sp>
-      <p:sp>
-        <p:nvSpPr>
-          <p:cNvPr id="15" name="Right Arrow 14"/>
-          <p:cNvSpPr/>
-          <p:nvPr/>
-        </p:nvSpPr>
-        <p:spPr>
-          <a:xfrm>
-            <a:off x="4742974" y="5049202"/>
-            <a:ext cx="172402" cy="178118"/>
-          </a:xfrm>
-          <a:prstGeom prst="rightArrow">
+          <p:cNvPr id="14" name="Rectangle 13"/>
+          <p:cNvSpPr/>
+          <p:nvPr/>
+        </p:nvSpPr>
+        <p:spPr>
+          <a:xfrm>
+            <a:off x="4419600" y="3924300"/>
+            <a:ext cx="2895600" cy="914400"/>
+          </a:xfrm>
+          <a:prstGeom prst="rect">
             <a:avLst/>
           </a:prstGeom>
           <a:solidFill>
@@ -11294,52 +12544,22 @@
       </p:sp>
       <p:sp>
         <p:nvSpPr>
-          <p:cNvPr id="16" name="Rectangle 15"/>
-          <p:cNvSpPr/>
-          <p:nvPr/>
-        </p:nvSpPr>
-        <p:spPr>
-          <a:xfrm>
-            <a:off x="4934426" y="4838700"/>
-            <a:ext cx="3333274" cy="599122"/>
-          </a:xfrm>
-          <a:prstGeom prst="rect">
-            <a:avLst/>
-          </a:prstGeom>
-          <a:solidFill>
-            <a:srgbClr val="1E5BC6"/>
-          </a:solidFill>
-          <a:ln>
-            <a:noFill/>
-          </a:ln>
-          <a:effectLst/>
-        </p:spPr>
-        <p:txBody>
-          <a:bodyPr rtlCol="0" anchor="ctr" wrap="square"/>
-          <a:lstStyle/>
-          <a:p>
-            <a:pPr algn="ctr"/>
-          </a:p>
-        </p:txBody>
-      </p:sp>
-      <p:sp>
-        <p:nvSpPr>
-          <p:cNvPr id="17" name="TextBox 16"/>
-          <p:cNvSpPr txBox="1"/>
-          <p:nvPr/>
-        </p:nvSpPr>
-        <p:spPr>
-          <a:xfrm>
-            <a:off x="4934426" y="4838700"/>
-            <a:ext cx="3333274" cy="599122"/>
-          </a:xfrm>
-          <a:prstGeom prst="rect">
-            <a:avLst/>
-          </a:prstGeom>
-          <a:noFill/>
-        </p:spPr>
-        <p:txBody>
-          <a:bodyPr wrap="square" lIns="0" rIns="0" tIns="0" bIns="0" anchor="ctr">
+          <p:cNvPr id="15" name="TextBox 14"/>
+          <p:cNvSpPr txBox="1"/>
+          <p:nvPr/>
+        </p:nvSpPr>
+        <p:spPr>
+          <a:xfrm>
+            <a:off x="4419600" y="4171950"/>
+            <a:ext cx="2895600" cy="419100"/>
+          </a:xfrm>
+          <a:prstGeom prst="rect">
+            <a:avLst/>
+          </a:prstGeom>
+          <a:noFill/>
+        </p:spPr>
+        <p:txBody>
+          <a:bodyPr wrap="square" lIns="0" rIns="0" tIns="0" bIns="0" anchor="t">
             <a:spAutoFit/>
           </a:bodyPr>
           <a:lstStyle/>
@@ -11350,7 +12570,7 @@
               </a:lnSpc>
             </a:pPr>
             <a:r>
-              <a:rPr sz="2025" b="1">
+              <a:rPr sz="2475" b="1">
                 <a:solidFill>
                   <a:srgbClr val="FFFFFF"/>
                 </a:solidFill>
@@ -11358,25 +12578,84 @@
                 <a:ea typeface="Pretendard"/>
                 <a:cs typeface="Pretendard"/>
               </a:rPr>
-              <a:t>커밋 없음</a:t>
-            </a:r>
-          </a:p>
-        </p:txBody>
-      </p:sp>
-      <p:sp>
-        <p:nvSpPr>
-          <p:cNvPr id="18" name="Rounded Rectangle 17"/>
-          <p:cNvSpPr/>
-          <p:nvPr/>
-        </p:nvSpPr>
-        <p:spPr>
-          <a:xfrm>
-            <a:off x="4934426" y="5583555"/>
-            <a:ext cx="3333274" cy="1214438"/>
+              <a:t>restart trino</a:t>
+            </a:r>
+          </a:p>
+        </p:txBody>
+      </p:sp>
+      <p:sp>
+        <p:nvSpPr>
+          <p:cNvPr id="16" name="TextBox 15"/>
+          <p:cNvSpPr txBox="1"/>
+          <p:nvPr/>
+        </p:nvSpPr>
+        <p:spPr>
+          <a:xfrm>
+            <a:off x="4629150" y="5143500"/>
+            <a:ext cx="2476500" cy="1524000"/>
+          </a:xfrm>
+          <a:prstGeom prst="rect">
+            <a:avLst/>
+          </a:prstGeom>
+          <a:noFill/>
+        </p:spPr>
+        <p:txBody>
+          <a:bodyPr wrap="square" lIns="0" rIns="0" tIns="0" bIns="0" anchor="t">
+            <a:spAutoFit/>
+          </a:bodyPr>
+          <a:lstStyle/>
+          <a:p>
+            <a:pPr algn="ctr">
+              <a:lnSpc>
+                <a:spcPct val="146000"/>
+              </a:lnSpc>
+            </a:pPr>
+            <a:r>
+              <a:rPr sz="2100" b="0">
+                <a:solidFill>
+                  <a:srgbClr val="3D3D3D"/>
+                </a:solidFill>
+                <a:latin typeface="Pretendard"/>
+                <a:ea typeface="Pretendard"/>
+                <a:cs typeface="Pretendard"/>
+              </a:rPr>
+              <a:t>until 로 대기</a:t>
+            </a:r>
+          </a:p>
+          <a:p>
+            <a:pPr algn="ctr">
+              <a:lnSpc>
+                <a:spcPct val="146000"/>
+              </a:lnSpc>
+            </a:pPr>
+            <a:r>
+              <a:rPr sz="2100" b="0">
+                <a:solidFill>
+                  <a:srgbClr val="3D3D3D"/>
+                </a:solidFill>
+                <a:latin typeface="Pretendard"/>
+                <a:ea typeface="Pretendard"/>
+                <a:cs typeface="Pretendard"/>
+              </a:rPr>
+              <a:t>실측 48초</a:t>
+            </a:r>
+          </a:p>
+        </p:txBody>
+      </p:sp>
+      <p:sp>
+        <p:nvSpPr>
+          <p:cNvPr id="17" name="Rounded Rectangle 16"/>
+          <p:cNvSpPr/>
+          <p:nvPr/>
+        </p:nvSpPr>
+        <p:spPr>
+          <a:xfrm>
+            <a:off x="7696200" y="3924300"/>
+            <a:ext cx="2895600" cy="3143250"/>
           </a:xfrm>
           <a:prstGeom prst="roundRect">
             <a:avLst>
-              <a:gd name="adj" fmla="val 3921"/>
+              <a:gd name="adj" fmla="val 1644"/>
             </a:avLst>
           </a:prstGeom>
           <a:solidFill>
@@ -11399,33 +12678,104 @@
       </p:sp>
       <p:sp>
         <p:nvSpPr>
+          <p:cNvPr id="18" name="Rectangle 17"/>
+          <p:cNvSpPr/>
+          <p:nvPr/>
+        </p:nvSpPr>
+        <p:spPr>
+          <a:xfrm>
+            <a:off x="7696200" y="3924300"/>
+            <a:ext cx="2895600" cy="914400"/>
+          </a:xfrm>
+          <a:prstGeom prst="rect">
+            <a:avLst/>
+          </a:prstGeom>
+          <a:solidFill>
+            <a:srgbClr val="0D2B5E"/>
+          </a:solidFill>
+          <a:ln>
+            <a:noFill/>
+          </a:ln>
+          <a:effectLst/>
+        </p:spPr>
+        <p:txBody>
+          <a:bodyPr rtlCol="0" anchor="ctr" wrap="square"/>
+          <a:lstStyle/>
+          <a:p>
+            <a:pPr algn="ctr"/>
+          </a:p>
+        </p:txBody>
+      </p:sp>
+      <p:sp>
+        <p:nvSpPr>
           <p:cNvPr id="19" name="TextBox 18"/>
           <p:cNvSpPr txBox="1"/>
           <p:nvPr/>
         </p:nvSpPr>
         <p:spPr>
           <a:xfrm>
-            <a:off x="5067776" y="5583555"/>
-            <a:ext cx="3066574" cy="1214438"/>
-          </a:xfrm>
-          <a:prstGeom prst="rect">
-            <a:avLst/>
-          </a:prstGeom>
-          <a:noFill/>
-        </p:spPr>
-        <p:txBody>
-          <a:bodyPr wrap="square" lIns="0" rIns="0" tIns="0" bIns="0" anchor="ctr">
+            <a:off x="7696200" y="4171950"/>
+            <a:ext cx="2895600" cy="419100"/>
+          </a:xfrm>
+          <a:prstGeom prst="rect">
+            <a:avLst/>
+          </a:prstGeom>
+          <a:noFill/>
+        </p:spPr>
+        <p:txBody>
+          <a:bodyPr wrap="square" lIns="0" rIns="0" tIns="0" bIns="0" anchor="t">
             <a:spAutoFit/>
           </a:bodyPr>
           <a:lstStyle/>
           <a:p>
             <a:pPr algn="ctr">
               <a:lnSpc>
-                <a:spcPct val="135000"/>
-              </a:lnSpc>
-            </a:pPr>
-            <a:r>
-              <a:rPr sz="1500" b="0">
+                <a:spcPct val="100000"/>
+              </a:lnSpc>
+            </a:pPr>
+            <a:r>
+              <a:rPr sz="2475" b="1">
+                <a:solidFill>
+                  <a:srgbClr val="FFFFFF"/>
+                </a:solidFill>
+                <a:latin typeface="Pretendard"/>
+                <a:ea typeface="Pretendard"/>
+                <a:cs typeface="Pretendard"/>
+              </a:rPr>
+              <a:t>카탈로그 목록</a:t>
+            </a:r>
+          </a:p>
+        </p:txBody>
+      </p:sp>
+      <p:sp>
+        <p:nvSpPr>
+          <p:cNvPr id="20" name="TextBox 19"/>
+          <p:cNvSpPr txBox="1"/>
+          <p:nvPr/>
+        </p:nvSpPr>
+        <p:spPr>
+          <a:xfrm>
+            <a:off x="7905750" y="5143500"/>
+            <a:ext cx="2476500" cy="1524000"/>
+          </a:xfrm>
+          <a:prstGeom prst="rect">
+            <a:avLst/>
+          </a:prstGeom>
+          <a:noFill/>
+        </p:spPr>
+        <p:txBody>
+          <a:bodyPr wrap="square" lIns="0" rIns="0" tIns="0" bIns="0" anchor="t">
+            <a:spAutoFit/>
+          </a:bodyPr>
+          <a:lstStyle/>
+          <a:p>
+            <a:pPr algn="ctr">
+              <a:lnSpc>
+                <a:spcPct val="146000"/>
+              </a:lnSpc>
+            </a:pPr>
+            <a:r>
+              <a:rPr sz="2100" b="0">
                 <a:solidFill>
                   <a:srgbClr val="3D3D3D"/>
                 </a:solidFill>
@@ -11433,81 +12783,17 @@
                 <a:ea typeface="Pretendard"/>
                 <a:cs typeface="Pretendard"/>
               </a:rPr>
-              <a:t>포인터 그대로</a:t>
-            </a:r>
-          </a:p>
-        </p:txBody>
-      </p:sp>
-      <p:sp>
-        <p:nvSpPr>
-          <p:cNvPr id="20" name="TextBox 19"/>
-          <p:cNvSpPr txBox="1"/>
-          <p:nvPr/>
-        </p:nvSpPr>
-        <p:spPr>
-          <a:xfrm>
-            <a:off x="9772650" y="2857500"/>
-            <a:ext cx="7372350" cy="533400"/>
-          </a:xfrm>
-          <a:prstGeom prst="rect">
-            <a:avLst/>
-          </a:prstGeom>
-          <a:noFill/>
-        </p:spPr>
-        <p:txBody>
-          <a:bodyPr wrap="square" lIns="0" rIns="0" tIns="0" bIns="0" anchor="t">
-            <a:spAutoFit/>
-          </a:bodyPr>
-          <a:lstStyle/>
-          <a:p>
-            <a:pPr algn="l">
-              <a:lnSpc>
-                <a:spcPct val="110000"/>
-              </a:lnSpc>
-            </a:pPr>
-            <a:r>
-              <a:rPr sz="3150" b="1">
-                <a:solidFill>
-                  <a:srgbClr val="0D2B5E"/>
-                </a:solidFill>
-                <a:latin typeface="Pretendard"/>
-                <a:ea typeface="Pretendard"/>
-                <a:cs typeface="Pretendard"/>
-              </a:rPr>
-              <a:t>Trino — count 그대로</a:t>
-            </a:r>
-          </a:p>
-        </p:txBody>
-      </p:sp>
-      <p:sp>
-        <p:nvSpPr>
-          <p:cNvPr id="21" name="TextBox 20"/>
-          <p:cNvSpPr txBox="1"/>
-          <p:nvPr/>
-        </p:nvSpPr>
-        <p:spPr>
-          <a:xfrm>
-            <a:off x="9772650" y="3467100"/>
-            <a:ext cx="7372350" cy="876300"/>
-          </a:xfrm>
-          <a:prstGeom prst="rect">
-            <a:avLst/>
-          </a:prstGeom>
-          <a:noFill/>
-        </p:spPr>
-        <p:txBody>
-          <a:bodyPr wrap="square" lIns="0" rIns="0" tIns="0" bIns="0" anchor="t">
-            <a:spAutoFit/>
-          </a:bodyPr>
-          <a:lstStyle/>
-          <a:p>
-            <a:pPr algn="l">
+              <a:t>SHOW CATALOGS</a:t>
+            </a:r>
+          </a:p>
+          <a:p>
+            <a:pPr algn="ctr">
               <a:lnSpc>
                 <a:spcPct val="146000"/>
               </a:lnSpc>
             </a:pPr>
             <a:r>
-              <a:rPr sz="2250" b="0">
+              <a:rPr sz="2100" b="0">
                 <a:solidFill>
                   <a:srgbClr val="3D3D3D"/>
                 </a:solidFill>
@@ -11515,25 +12801,25 @@
                 <a:ea typeface="Pretendard"/>
                 <a:cs typeface="Pretendard"/>
               </a:rPr>
-              <a:t>커밋 전 데이터는 어디서도 보이지 않는다</a:t>
-            </a:r>
-          </a:p>
-        </p:txBody>
-      </p:sp>
-      <p:sp>
-        <p:nvSpPr>
-          <p:cNvPr id="22" name="Rounded Rectangle 21"/>
-          <p:cNvSpPr/>
-          <p:nvPr/>
-        </p:nvSpPr>
-        <p:spPr>
-          <a:xfrm>
-            <a:off x="9772650" y="4610100"/>
-            <a:ext cx="7372350" cy="2857500"/>
+              <a:t>iceberg2 추가</a:t>
+            </a:r>
+          </a:p>
+        </p:txBody>
+      </p:sp>
+      <p:sp>
+        <p:nvSpPr>
+          <p:cNvPr id="21" name="Rounded Rectangle 20"/>
+          <p:cNvSpPr/>
+          <p:nvPr/>
+        </p:nvSpPr>
+        <p:spPr>
+          <a:xfrm>
+            <a:off x="10972800" y="3924300"/>
+            <a:ext cx="2895600" cy="3143250"/>
           </a:xfrm>
           <a:prstGeom prst="roundRect">
             <a:avLst>
-              <a:gd name="adj" fmla="val 1666"/>
+              <a:gd name="adj" fmla="val 1644"/>
             </a:avLst>
           </a:prstGeom>
           <a:solidFill>
@@ -11556,20 +12842,20 @@
       </p:sp>
       <p:sp>
         <p:nvSpPr>
-          <p:cNvPr id="23" name="Rectangle 22"/>
-          <p:cNvSpPr/>
-          <p:nvPr/>
-        </p:nvSpPr>
-        <p:spPr>
-          <a:xfrm>
-            <a:off x="10020300" y="4838700"/>
-            <a:ext cx="3333274" cy="599122"/>
-          </a:xfrm>
-          <a:prstGeom prst="rect">
-            <a:avLst/>
-          </a:prstGeom>
-          <a:solidFill>
-            <a:srgbClr val="0D2B5E"/>
+          <p:cNvPr id="22" name="Rectangle 21"/>
+          <p:cNvSpPr/>
+          <p:nvPr/>
+        </p:nvSpPr>
+        <p:spPr>
+          <a:xfrm>
+            <a:off x="10972800" y="3924300"/>
+            <a:ext cx="2895600" cy="914400"/>
+          </a:xfrm>
+          <a:prstGeom prst="rect">
+            <a:avLst/>
+          </a:prstGeom>
+          <a:solidFill>
+            <a:srgbClr val="1E5BC6"/>
           </a:solidFill>
           <a:ln>
             <a:noFill/>
@@ -11586,41 +12872,100 @@
       </p:sp>
       <p:sp>
         <p:nvSpPr>
+          <p:cNvPr id="23" name="TextBox 22"/>
+          <p:cNvSpPr txBox="1"/>
+          <p:nvPr/>
+        </p:nvSpPr>
+        <p:spPr>
+          <a:xfrm>
+            <a:off x="10972800" y="4171950"/>
+            <a:ext cx="2895600" cy="419100"/>
+          </a:xfrm>
+          <a:prstGeom prst="rect">
+            <a:avLst/>
+          </a:prstGeom>
+          <a:noFill/>
+        </p:spPr>
+        <p:txBody>
+          <a:bodyPr wrap="square" lIns="0" rIns="0" tIns="0" bIns="0" anchor="t">
+            <a:spAutoFit/>
+          </a:bodyPr>
+          <a:lstStyle/>
+          <a:p>
+            <a:pPr algn="ctr">
+              <a:lnSpc>
+                <a:spcPct val="100000"/>
+              </a:lnSpc>
+            </a:pPr>
+            <a:r>
+              <a:rPr sz="2475" b="1">
+                <a:solidFill>
+                  <a:srgbClr val="FFFFFF"/>
+                </a:solidFill>
+                <a:latin typeface="Pretendard"/>
+                <a:ea typeface="Pretendard"/>
+                <a:cs typeface="Pretendard"/>
+              </a:rPr>
+              <a:t>trino&gt; count</a:t>
+            </a:r>
+          </a:p>
+        </p:txBody>
+      </p:sp>
+      <p:sp>
+        <p:nvSpPr>
           <p:cNvPr id="24" name="TextBox 23"/>
           <p:cNvSpPr txBox="1"/>
           <p:nvPr/>
         </p:nvSpPr>
         <p:spPr>
           <a:xfrm>
-            <a:off x="10020300" y="4838700"/>
-            <a:ext cx="3333274" cy="599122"/>
-          </a:xfrm>
-          <a:prstGeom prst="rect">
-            <a:avLst/>
-          </a:prstGeom>
-          <a:noFill/>
-        </p:spPr>
-        <p:txBody>
-          <a:bodyPr wrap="square" lIns="0" rIns="0" tIns="0" bIns="0" anchor="ctr">
+            <a:off x="11182350" y="5143500"/>
+            <a:ext cx="2476500" cy="1524000"/>
+          </a:xfrm>
+          <a:prstGeom prst="rect">
+            <a:avLst/>
+          </a:prstGeom>
+          <a:noFill/>
+        </p:spPr>
+        <p:txBody>
+          <a:bodyPr wrap="square" lIns="0" rIns="0" tIns="0" bIns="0" anchor="t">
             <a:spAutoFit/>
           </a:bodyPr>
           <a:lstStyle/>
           <a:p>
             <a:pPr algn="ctr">
               <a:lnSpc>
-                <a:spcPct val="100000"/>
-              </a:lnSpc>
-            </a:pPr>
-            <a:r>
-              <a:rPr sz="2025" b="1">
-                <a:solidFill>
-                  <a:srgbClr val="FFFFFF"/>
-                </a:solidFill>
-                <a:latin typeface="Pretendard"/>
-                <a:ea typeface="Pretendard"/>
-                <a:cs typeface="Pretendard"/>
-              </a:rPr>
-              <a:t>count(*)</a:t>
+                <a:spcPct val="146000"/>
+              </a:lnSpc>
+            </a:pPr>
+            <a:r>
+              <a:rPr sz="2100" b="0">
+                <a:solidFill>
+                  <a:srgbClr val="3D3D3D"/>
+                </a:solidFill>
+                <a:latin typeface="Pretendard"/>
+                <a:ea typeface="Pretendard"/>
+                <a:cs typeface="Pretendard"/>
+              </a:rPr>
+              <a:t>두 이름 모두</a:t>
+            </a:r>
+          </a:p>
+          <a:p>
+            <a:pPr algn="ctr">
+              <a:lnSpc>
+                <a:spcPct val="146000"/>
+              </a:lnSpc>
+            </a:pPr>
+            <a:r>
+              <a:rPr sz="2100" b="0">
+                <a:solidFill>
+                  <a:srgbClr val="3D3D3D"/>
+                </a:solidFill>
+                <a:latin typeface="Pretendard"/>
+                <a:ea typeface="Pretendard"/>
+                <a:cs typeface="Pretendard"/>
+              </a:rPr>
+              <a:t>7 · 7</a:t>
             </a:r>
           </a:p>
         </p:txBody>
@@ -11633,12 +12978,12 @@
         </p:nvSpPr>
         <p:spPr>
           <a:xfrm>
-            <a:off x="10020300" y="5583555"/>
-            <a:ext cx="3333274" cy="1214438"/>
+            <a:off x="14249400" y="3924300"/>
+            <a:ext cx="2895600" cy="3143250"/>
           </a:xfrm>
           <a:prstGeom prst="roundRect">
             <a:avLst>
-              <a:gd name="adj" fmla="val 3921"/>
+              <a:gd name="adj" fmla="val 1644"/>
             </a:avLst>
           </a:prstGeom>
           <a:solidFill>
@@ -11661,61 +13006,20 @@
       </p:sp>
       <p:sp>
         <p:nvSpPr>
-          <p:cNvPr id="26" name="TextBox 25"/>
-          <p:cNvSpPr txBox="1"/>
-          <p:nvPr/>
-        </p:nvSpPr>
-        <p:spPr>
-          <a:xfrm>
-            <a:off x="10153650" y="5583555"/>
-            <a:ext cx="3066574" cy="1214438"/>
-          </a:xfrm>
-          <a:prstGeom prst="rect">
-            <a:avLst/>
-          </a:prstGeom>
-          <a:noFill/>
-        </p:spPr>
-        <p:txBody>
-          <a:bodyPr wrap="square" lIns="0" rIns="0" tIns="0" bIns="0" anchor="ctr">
-            <a:spAutoFit/>
-          </a:bodyPr>
-          <a:lstStyle/>
-          <a:p>
-            <a:pPr algn="ctr">
-              <a:lnSpc>
-                <a:spcPct val="135000"/>
-              </a:lnSpc>
-            </a:pPr>
-            <a:r>
-              <a:rPr sz="1500" b="0">
-                <a:solidFill>
-                  <a:srgbClr val="3D3D3D"/>
-                </a:solidFill>
-                <a:latin typeface="Pretendard"/>
-                <a:ea typeface="Pretendard"/>
-                <a:cs typeface="Pretendard"/>
-              </a:rPr>
-              <a:t>7 그대로</a:t>
-            </a:r>
-          </a:p>
-        </p:txBody>
-      </p:sp>
-      <p:sp>
-        <p:nvSpPr>
-          <p:cNvPr id="27" name="Right Arrow 26"/>
-          <p:cNvSpPr/>
-          <p:nvPr/>
-        </p:nvSpPr>
-        <p:spPr>
-          <a:xfrm>
-            <a:off x="13372624" y="5049202"/>
-            <a:ext cx="172402" cy="178118"/>
-          </a:xfrm>
-          <a:prstGeom prst="rightArrow">
-            <a:avLst/>
-          </a:prstGeom>
-          <a:solidFill>
-            <a:srgbClr val="1E5BC6"/>
+          <p:cNvPr id="26" name="Rectangle 25"/>
+          <p:cNvSpPr/>
+          <p:nvPr/>
+        </p:nvSpPr>
+        <p:spPr>
+          <a:xfrm>
+            <a:off x="14249400" y="3924300"/>
+            <a:ext cx="2895600" cy="914400"/>
+          </a:xfrm>
+          <a:prstGeom prst="rect">
+            <a:avLst/>
+          </a:prstGeom>
+          <a:solidFill>
+            <a:srgbClr val="0D2B5E"/>
           </a:solidFill>
           <a:ln>
             <a:noFill/>
@@ -11732,20 +13036,120 @@
       </p:sp>
       <p:sp>
         <p:nvSpPr>
-          <p:cNvPr id="28" name="Rectangle 27"/>
-          <p:cNvSpPr/>
-          <p:nvPr/>
-        </p:nvSpPr>
-        <p:spPr>
-          <a:xfrm>
-            <a:off x="13564076" y="4838700"/>
-            <a:ext cx="3333274" cy="599122"/>
-          </a:xfrm>
-          <a:prstGeom prst="rect">
-            <a:avLst/>
-          </a:prstGeom>
-          <a:solidFill>
-            <a:srgbClr val="1E5BC6"/>
+          <p:cNvPr id="27" name="TextBox 26"/>
+          <p:cNvSpPr txBox="1"/>
+          <p:nvPr/>
+        </p:nvSpPr>
+        <p:spPr>
+          <a:xfrm>
+            <a:off x="14249400" y="4171950"/>
+            <a:ext cx="2895600" cy="419100"/>
+          </a:xfrm>
+          <a:prstGeom prst="rect">
+            <a:avLst/>
+          </a:prstGeom>
+          <a:noFill/>
+        </p:spPr>
+        <p:txBody>
+          <a:bodyPr wrap="square" lIns="0" rIns="0" tIns="0" bIns="0" anchor="t">
+            <a:spAutoFit/>
+          </a:bodyPr>
+          <a:lstStyle/>
+          <a:p>
+            <a:pPr algn="ctr">
+              <a:lnSpc>
+                <a:spcPct val="100000"/>
+              </a:lnSpc>
+            </a:pPr>
+            <a:r>
+              <a:rPr sz="2475" b="1">
+                <a:solidFill>
+                  <a:srgbClr val="FFFFFF"/>
+                </a:solidFill>
+                <a:latin typeface="Pretendard"/>
+                <a:ea typeface="Pretendard"/>
+                <a:cs typeface="Pretendard"/>
+              </a:rPr>
+              <a:t>정리</a:t>
+            </a:r>
+          </a:p>
+        </p:txBody>
+      </p:sp>
+      <p:sp>
+        <p:nvSpPr>
+          <p:cNvPr id="28" name="TextBox 27"/>
+          <p:cNvSpPr txBox="1"/>
+          <p:nvPr/>
+        </p:nvSpPr>
+        <p:spPr>
+          <a:xfrm>
+            <a:off x="14458950" y="5143500"/>
+            <a:ext cx="2476500" cy="1524000"/>
+          </a:xfrm>
+          <a:prstGeom prst="rect">
+            <a:avLst/>
+          </a:prstGeom>
+          <a:noFill/>
+        </p:spPr>
+        <p:txBody>
+          <a:bodyPr wrap="square" lIns="0" rIns="0" tIns="0" bIns="0" anchor="t">
+            <a:spAutoFit/>
+          </a:bodyPr>
+          <a:lstStyle/>
+          <a:p>
+            <a:pPr algn="ctr">
+              <a:lnSpc>
+                <a:spcPct val="146000"/>
+              </a:lnSpc>
+            </a:pPr>
+            <a:r>
+              <a:rPr sz="2100" b="0">
+                <a:solidFill>
+                  <a:srgbClr val="3D3D3D"/>
+                </a:solidFill>
+                <a:latin typeface="Pretendard"/>
+                <a:ea typeface="Pretendard"/>
+                <a:cs typeface="Pretendard"/>
+              </a:rPr>
+              <a:t>rm · restart</a:t>
+            </a:r>
+          </a:p>
+          <a:p>
+            <a:pPr algn="ctr">
+              <a:lnSpc>
+                <a:spcPct val="146000"/>
+              </a:lnSpc>
+            </a:pPr>
+            <a:r>
+              <a:rPr sz="2100" b="0">
+                <a:solidFill>
+                  <a:srgbClr val="3D3D3D"/>
+                </a:solidFill>
+                <a:latin typeface="Pretendard"/>
+                <a:ea typeface="Pretendard"/>
+                <a:cs typeface="Pretendard"/>
+              </a:rPr>
+              <a:t>until</a:t>
+            </a:r>
+          </a:p>
+        </p:txBody>
+      </p:sp>
+      <p:sp>
+        <p:nvSpPr>
+          <p:cNvPr id="29" name="Rectangle 28"/>
+          <p:cNvSpPr/>
+          <p:nvPr/>
+        </p:nvSpPr>
+        <p:spPr>
+          <a:xfrm>
+            <a:off x="1143000" y="8058150"/>
+            <a:ext cx="16002000" cy="9525"/>
+          </a:xfrm>
+          <a:prstGeom prst="rect">
+            <a:avLst/>
+          </a:prstGeom>
+          <a:solidFill>
+            <a:srgbClr val="DCE1E8"/>
           </a:solidFill>
           <a:ln>
             <a:noFill/>
@@ -11762,224 +13166,7 @@
       </p:sp>
       <p:sp>
         <p:nvSpPr>
-          <p:cNvPr id="29" name="TextBox 28"/>
-          <p:cNvSpPr txBox="1"/>
-          <p:nvPr/>
-        </p:nvSpPr>
-        <p:spPr>
-          <a:xfrm>
-            <a:off x="13564076" y="4838700"/>
-            <a:ext cx="3333274" cy="599122"/>
-          </a:xfrm>
-          <a:prstGeom prst="rect">
-            <a:avLst/>
-          </a:prstGeom>
-          <a:noFill/>
-        </p:spPr>
-        <p:txBody>
-          <a:bodyPr wrap="square" lIns="0" rIns="0" tIns="0" bIns="0" anchor="ctr">
-            <a:spAutoFit/>
-          </a:bodyPr>
-          <a:lstStyle/>
-          <a:p>
-            <a:pPr algn="ctr">
-              <a:lnSpc>
-                <a:spcPct val="100000"/>
-              </a:lnSpc>
-            </a:pPr>
-            <a:r>
-              <a:rPr sz="2025" b="1">
-                <a:solidFill>
-                  <a:srgbClr val="FFFFFF"/>
-                </a:solidFill>
-                <a:latin typeface="Pretendard"/>
-                <a:ea typeface="Pretendard"/>
-                <a:cs typeface="Pretendard"/>
-              </a:rPr>
-              <a:t>$snapshots</a:t>
-            </a:r>
-          </a:p>
-        </p:txBody>
-      </p:sp>
-      <p:sp>
-        <p:nvSpPr>
-          <p:cNvPr id="30" name="Rounded Rectangle 29"/>
-          <p:cNvSpPr/>
-          <p:nvPr/>
-        </p:nvSpPr>
-        <p:spPr>
-          <a:xfrm>
-            <a:off x="13564076" y="5583555"/>
-            <a:ext cx="3333274" cy="1214438"/>
-          </a:xfrm>
-          <a:prstGeom prst="roundRect">
-            <a:avLst>
-              <a:gd name="adj" fmla="val 3921"/>
-            </a:avLst>
-          </a:prstGeom>
-          <a:solidFill>
-            <a:srgbClr val="FAFBFD"/>
-          </a:solidFill>
-          <a:ln w="9525">
-            <a:solidFill>
-              <a:srgbClr val="DCE1E8"/>
-            </a:solidFill>
-          </a:ln>
-          <a:effectLst/>
-        </p:spPr>
-        <p:txBody>
-          <a:bodyPr rtlCol="0" anchor="ctr" wrap="square"/>
-          <a:lstStyle/>
-          <a:p>
-            <a:pPr algn="ctr"/>
-          </a:p>
-        </p:txBody>
-      </p:sp>
-      <p:sp>
-        <p:nvSpPr>
-          <p:cNvPr id="31" name="TextBox 30"/>
-          <p:cNvSpPr txBox="1"/>
-          <p:nvPr/>
-        </p:nvSpPr>
-        <p:spPr>
-          <a:xfrm>
-            <a:off x="13697426" y="5583555"/>
-            <a:ext cx="3066574" cy="1214438"/>
-          </a:xfrm>
-          <a:prstGeom prst="rect">
-            <a:avLst/>
-          </a:prstGeom>
-          <a:noFill/>
-        </p:spPr>
-        <p:txBody>
-          <a:bodyPr wrap="square" lIns="0" rIns="0" tIns="0" bIns="0" anchor="ctr">
-            <a:spAutoFit/>
-          </a:bodyPr>
-          <a:lstStyle/>
-          <a:p>
-            <a:pPr algn="ctr">
-              <a:lnSpc>
-                <a:spcPct val="135000"/>
-              </a:lnSpc>
-            </a:pPr>
-            <a:r>
-              <a:rPr sz="1500" b="0">
-                <a:solidFill>
-                  <a:srgbClr val="3D3D3D"/>
-                </a:solidFill>
-                <a:latin typeface="Pretendard"/>
-                <a:ea typeface="Pretendard"/>
-                <a:cs typeface="Pretendard"/>
-              </a:rPr>
-              <a:t>새 스냅샷 없음</a:t>
-            </a:r>
-          </a:p>
-        </p:txBody>
-      </p:sp>
-      <p:sp>
-        <p:nvSpPr>
-          <p:cNvPr id="32" name="Oval 31"/>
-          <p:cNvSpPr/>
-          <p:nvPr/>
-        </p:nvSpPr>
-        <p:spPr>
-          <a:xfrm>
-            <a:off x="8686800" y="3771900"/>
-            <a:ext cx="914400" cy="914400"/>
-          </a:xfrm>
-          <a:prstGeom prst="ellipse">
-            <a:avLst/>
-          </a:prstGeom>
-          <a:solidFill>
-            <a:srgbClr val="0D2B5E"/>
-          </a:solidFill>
-          <a:ln>
-            <a:noFill/>
-          </a:ln>
-          <a:effectLst/>
-        </p:spPr>
-        <p:txBody>
-          <a:bodyPr rtlCol="0" anchor="ctr" wrap="square"/>
-          <a:lstStyle/>
-          <a:p>
-            <a:pPr algn="ctr"/>
-          </a:p>
-        </p:txBody>
-      </p:sp>
-      <p:sp>
-        <p:nvSpPr>
-          <p:cNvPr id="33" name="TextBox 32"/>
-          <p:cNvSpPr txBox="1"/>
-          <p:nvPr/>
-        </p:nvSpPr>
-        <p:spPr>
-          <a:xfrm>
-            <a:off x="8686800" y="4057650"/>
-            <a:ext cx="914400" cy="381000"/>
-          </a:xfrm>
-          <a:prstGeom prst="rect">
-            <a:avLst/>
-          </a:prstGeom>
-          <a:noFill/>
-        </p:spPr>
-        <p:txBody>
-          <a:bodyPr wrap="square" lIns="0" rIns="0" tIns="0" bIns="0" anchor="t">
-            <a:spAutoFit/>
-          </a:bodyPr>
-          <a:lstStyle/>
-          <a:p>
-            <a:pPr algn="ctr">
-              <a:lnSpc>
-                <a:spcPct val="100000"/>
-              </a:lnSpc>
-            </a:pPr>
-            <a:r>
-              <a:rPr sz="2250" b="1">
-                <a:solidFill>
-                  <a:srgbClr val="FFFFFF"/>
-                </a:solidFill>
-                <a:latin typeface="Pretendard"/>
-                <a:ea typeface="Pretendard"/>
-                <a:cs typeface="Pretendard"/>
-              </a:rPr>
-              <a:t>VS</a:t>
-            </a:r>
-          </a:p>
-        </p:txBody>
-      </p:sp>
-      <p:sp>
-        <p:nvSpPr>
-          <p:cNvPr id="34" name="Rectangle 33"/>
-          <p:cNvSpPr/>
-          <p:nvPr/>
-        </p:nvSpPr>
-        <p:spPr>
-          <a:xfrm>
-            <a:off x="1143000" y="8058150"/>
-            <a:ext cx="16002000" cy="9525"/>
-          </a:xfrm>
-          <a:prstGeom prst="rect">
-            <a:avLst/>
-          </a:prstGeom>
-          <a:solidFill>
-            <a:srgbClr val="DCE1E8"/>
-          </a:solidFill>
-          <a:ln>
-            <a:noFill/>
-          </a:ln>
-          <a:effectLst/>
-        </p:spPr>
-        <p:txBody>
-          <a:bodyPr rtlCol="0" anchor="ctr" wrap="square"/>
-          <a:lstStyle/>
-          <a:p>
-            <a:pPr algn="ctr"/>
-          </a:p>
-        </p:txBody>
-      </p:sp>
-      <p:sp>
-        <p:nvSpPr>
-          <p:cNvPr id="35" name="TextBox 34"/>
+          <p:cNvPr id="30" name="TextBox 29"/>
           <p:cNvSpPr txBox="1"/>
           <p:nvPr/>
         </p:nvSpPr>
@@ -12020,7 +13207,7 @@
       </p:sp>
       <p:sp>
         <p:nvSpPr>
-          <p:cNvPr id="36" name="TextBox 35"/>
+          <p:cNvPr id="31" name="TextBox 30"/>
           <p:cNvSpPr txBox="1"/>
           <p:nvPr/>
         </p:nvSpPr>
@@ -12079,7 +13266,7 @@
       <p:grpSpPr/>
       <p:sp>
         <p:nvSpPr>
-          <p:cNvPr id="2" name="Oval 1"/>
+          <p:cNvPr id="2" name="deckgen:decor"/>
           <p:cNvSpPr/>
           <p:nvPr/>
         </p:nvSpPr>
@@ -12109,7 +13296,7 @@
       </p:sp>
       <p:sp>
         <p:nvSpPr>
-          <p:cNvPr id="3" name="Oval 2"/>
+          <p:cNvPr id="3" name="deckgen:decor"/>
           <p:cNvSpPr/>
           <p:nvPr/>
         </p:nvSpPr>
@@ -12139,7 +13326,7 @@
       </p:sp>
       <p:sp>
         <p:nvSpPr>
-          <p:cNvPr id="4" name="Oval 3"/>
+          <p:cNvPr id="4" name="deckgen:decor"/>
           <p:cNvSpPr/>
           <p:nvPr/>
         </p:nvSpPr>
@@ -12203,7 +13390,7 @@
                 <a:ea typeface="Pretendard"/>
                 <a:cs typeface="Pretendard"/>
               </a:rPr>
-              <a:t>확인 포인트</a:t>
+              <a:t>6단계 — 일부러 실패시키기</a:t>
             </a:r>
           </a:p>
         </p:txBody>
@@ -12244,7 +13431,7 @@
                 <a:ea typeface="Pretendard"/>
                 <a:cs typeface="Pretendard"/>
               </a:rPr>
-              <a:t>이 1.5시간이 끝날 때 확인할 것</a:t>
+              <a:t>커밋 전에는 아무에게도 안 보인다</a:t>
             </a:r>
           </a:p>
         </p:txBody>
@@ -12281,18 +13468,100 @@
       </p:sp>
       <p:sp>
         <p:nvSpPr>
-          <p:cNvPr id="8" name="Rounded Rectangle 7"/>
-          <p:cNvSpPr/>
-          <p:nvPr/>
-        </p:nvSpPr>
-        <p:spPr>
-          <a:xfrm>
-            <a:off x="1143000" y="2867025"/>
-            <a:ext cx="16002000" cy="742950"/>
+          <p:cNvPr id="8" name="TextBox 7"/>
+          <p:cNvSpPr txBox="1"/>
+          <p:nvPr/>
+        </p:nvSpPr>
+        <p:spPr>
+          <a:xfrm>
+            <a:off x="1143000" y="2857500"/>
+            <a:ext cx="7372350" cy="533400"/>
+          </a:xfrm>
+          <a:prstGeom prst="rect">
+            <a:avLst/>
+          </a:prstGeom>
+          <a:noFill/>
+        </p:spPr>
+        <p:txBody>
+          <a:bodyPr wrap="square" lIns="0" rIns="0" tIns="0" bIns="0" anchor="t">
+            <a:spAutoFit/>
+          </a:bodyPr>
+          <a:lstStyle/>
+          <a:p>
+            <a:pPr algn="l">
+              <a:lnSpc>
+                <a:spcPct val="110000"/>
+              </a:lnSpc>
+            </a:pPr>
+            <a:r>
+              <a:rPr sz="3150" b="1">
+                <a:solidFill>
+                  <a:srgbClr val="0D2B5E"/>
+                </a:solidFill>
+                <a:latin typeface="Pretendard"/>
+                <a:ea typeface="Pretendard"/>
+                <a:cs typeface="Pretendard"/>
+              </a:rPr>
+              <a:t>Spark — 타입이 안 맞는 INSERT</a:t>
+            </a:r>
+          </a:p>
+        </p:txBody>
+      </p:sp>
+      <p:sp>
+        <p:nvSpPr>
+          <p:cNvPr id="9" name="TextBox 8"/>
+          <p:cNvSpPr txBox="1"/>
+          <p:nvPr/>
+        </p:nvSpPr>
+        <p:spPr>
+          <a:xfrm>
+            <a:off x="1143000" y="3467100"/>
+            <a:ext cx="7372350" cy="876300"/>
+          </a:xfrm>
+          <a:prstGeom prst="rect">
+            <a:avLst/>
+          </a:prstGeom>
+          <a:noFill/>
+        </p:spPr>
+        <p:txBody>
+          <a:bodyPr wrap="square" lIns="0" rIns="0" tIns="0" bIns="0" anchor="t">
+            <a:spAutoFit/>
+          </a:bodyPr>
+          <a:lstStyle/>
+          <a:p>
+            <a:pPr algn="l">
+              <a:lnSpc>
+                <a:spcPct val="146000"/>
+              </a:lnSpc>
+            </a:pPr>
+            <a:r>
+              <a:rPr sz="2250" b="0">
+                <a:solidFill>
+                  <a:srgbClr val="3D3D3D"/>
+                </a:solidFill>
+                <a:latin typeface="Pretendard"/>
+                <a:ea typeface="Pretendard"/>
+                <a:cs typeface="Pretendard"/>
+              </a:rPr>
+              <a:t>order_id 자리에 문자열 '없는아이디' 를 넣는다</a:t>
+            </a:r>
+          </a:p>
+        </p:txBody>
+      </p:sp>
+      <p:sp>
+        <p:nvSpPr>
+          <p:cNvPr id="10" name="Rounded Rectangle 9"/>
+          <p:cNvSpPr/>
+          <p:nvPr/>
+        </p:nvSpPr>
+        <p:spPr>
+          <a:xfrm>
+            <a:off x="1143000" y="4610100"/>
+            <a:ext cx="7372350" cy="2857500"/>
           </a:xfrm>
           <a:prstGeom prst="roundRect">
             <a:avLst>
-              <a:gd name="adj" fmla="val 6410"/>
+              <a:gd name="adj" fmla="val 1666"/>
             </a:avLst>
           </a:prstGeom>
           <a:solidFill>
@@ -12315,16 +13584,16 @@
       </p:sp>
       <p:sp>
         <p:nvSpPr>
-          <p:cNvPr id="9" name="Oval 8"/>
-          <p:cNvSpPr/>
-          <p:nvPr/>
-        </p:nvSpPr>
-        <p:spPr>
-          <a:xfrm>
-            <a:off x="1390650" y="2971800"/>
-            <a:ext cx="533400" cy="533400"/>
-          </a:xfrm>
-          <a:prstGeom prst="ellipse">
+          <p:cNvPr id="11" name="Rectangle 10"/>
+          <p:cNvSpPr/>
+          <p:nvPr/>
+        </p:nvSpPr>
+        <p:spPr>
+          <a:xfrm>
+            <a:off x="1390650" y="4838700"/>
+            <a:ext cx="3333274" cy="599122"/>
+          </a:xfrm>
+          <a:prstGeom prst="rect">
             <a:avLst/>
           </a:prstGeom>
           <a:solidFill>
@@ -12345,22 +13614,22 @@
       </p:sp>
       <p:sp>
         <p:nvSpPr>
-          <p:cNvPr id="10" name="TextBox 9"/>
-          <p:cNvSpPr txBox="1"/>
-          <p:nvPr/>
-        </p:nvSpPr>
-        <p:spPr>
-          <a:xfrm>
-            <a:off x="1390650" y="3095625"/>
-            <a:ext cx="533400" cy="323850"/>
-          </a:xfrm>
-          <a:prstGeom prst="rect">
-            <a:avLst/>
-          </a:prstGeom>
-          <a:noFill/>
-        </p:spPr>
-        <p:txBody>
-          <a:bodyPr wrap="square" lIns="0" rIns="0" tIns="0" bIns="0" anchor="t">
+          <p:cNvPr id="12" name="TextBox 11"/>
+          <p:cNvSpPr txBox="1"/>
+          <p:nvPr/>
+        </p:nvSpPr>
+        <p:spPr>
+          <a:xfrm>
+            <a:off x="1390650" y="4838700"/>
+            <a:ext cx="3333274" cy="599122"/>
+          </a:xfrm>
+          <a:prstGeom prst="rect">
+            <a:avLst/>
+          </a:prstGeom>
+          <a:noFill/>
+        </p:spPr>
+        <p:txBody>
+          <a:bodyPr wrap="square" lIns="0" rIns="0" tIns="0" bIns="0" anchor="ctr">
             <a:spAutoFit/>
           </a:bodyPr>
           <a:lstStyle/>
@@ -12371,7 +13640,7 @@
               </a:lnSpc>
             </a:pPr>
             <a:r>
-              <a:rPr sz="2100" b="1">
+              <a:rPr sz="2025" b="1">
                 <a:solidFill>
                   <a:srgbClr val="FFFFFF"/>
                 </a:solidFill>
@@ -12379,66 +13648,25 @@
                 <a:ea typeface="Pretendard"/>
                 <a:cs typeface="Pretendard"/>
               </a:rPr>
-              <a:t>1</a:t>
-            </a:r>
-          </a:p>
-        </p:txBody>
-      </p:sp>
-      <p:sp>
-        <p:nvSpPr>
-          <p:cNvPr id="11" name="TextBox 10"/>
-          <p:cNvSpPr txBox="1"/>
-          <p:nvPr/>
-        </p:nvSpPr>
-        <p:spPr>
-          <a:xfrm>
-            <a:off x="2190750" y="2867025"/>
-            <a:ext cx="14573250" cy="742950"/>
-          </a:xfrm>
-          <a:prstGeom prst="rect">
-            <a:avLst/>
-          </a:prstGeom>
-          <a:noFill/>
-        </p:spPr>
-        <p:txBody>
-          <a:bodyPr wrap="square" lIns="0" rIns="0" tIns="0" bIns="0" anchor="ctr">
-            <a:spAutoFit/>
-          </a:bodyPr>
-          <a:lstStyle/>
-          <a:p>
-            <a:pPr algn="l">
-              <a:lnSpc>
-                <a:spcPct val="100000"/>
-              </a:lnSpc>
-            </a:pPr>
-            <a:r>
-              <a:rPr sz="2100" b="1">
-                <a:solidFill>
-                  <a:srgbClr val="0D2B5E"/>
-                </a:solidFill>
-                <a:latin typeface="Pretendard"/>
-                <a:ea typeface="Pretendard"/>
-                <a:cs typeface="Pretendard"/>
-              </a:rPr>
-              <a:t>docker compose ps 에 컨테이너 5개가 Up · 두 엔진 count 가 6</a:t>
-            </a:r>
-          </a:p>
-        </p:txBody>
-      </p:sp>
-      <p:sp>
-        <p:nvSpPr>
-          <p:cNvPr id="12" name="Rounded Rectangle 11"/>
-          <p:cNvSpPr/>
-          <p:nvPr/>
-        </p:nvSpPr>
-        <p:spPr>
-          <a:xfrm>
-            <a:off x="1143000" y="3724275"/>
-            <a:ext cx="16002000" cy="742950"/>
+              <a:t>INSERT 시도</a:t>
+            </a:r>
+          </a:p>
+        </p:txBody>
+      </p:sp>
+      <p:sp>
+        <p:nvSpPr>
+          <p:cNvPr id="13" name="Rounded Rectangle 12"/>
+          <p:cNvSpPr/>
+          <p:nvPr/>
+        </p:nvSpPr>
+        <p:spPr>
+          <a:xfrm>
+            <a:off x="1390650" y="5583555"/>
+            <a:ext cx="3333274" cy="1214438"/>
           </a:xfrm>
           <a:prstGeom prst="roundRect">
             <a:avLst>
-              <a:gd name="adj" fmla="val 6410"/>
+              <a:gd name="adj" fmla="val 3921"/>
             </a:avLst>
           </a:prstGeom>
           <a:solidFill>
@@ -12461,20 +13689,61 @@
       </p:sp>
       <p:sp>
         <p:nvSpPr>
-          <p:cNvPr id="13" name="Oval 12"/>
-          <p:cNvSpPr/>
-          <p:nvPr/>
-        </p:nvSpPr>
-        <p:spPr>
-          <a:xfrm>
-            <a:off x="1390650" y="3829050"/>
-            <a:ext cx="533400" cy="533400"/>
-          </a:xfrm>
-          <a:prstGeom prst="ellipse">
-            <a:avLst/>
-          </a:prstGeom>
-          <a:solidFill>
-            <a:srgbClr val="0D2B5E"/>
+          <p:cNvPr id="14" name="TextBox 13"/>
+          <p:cNvSpPr txBox="1"/>
+          <p:nvPr/>
+        </p:nvSpPr>
+        <p:spPr>
+          <a:xfrm>
+            <a:off x="1524000" y="5583555"/>
+            <a:ext cx="3066574" cy="1214438"/>
+          </a:xfrm>
+          <a:prstGeom prst="rect">
+            <a:avLst/>
+          </a:prstGeom>
+          <a:noFill/>
+        </p:spPr>
+        <p:txBody>
+          <a:bodyPr wrap="square" lIns="0" rIns="0" tIns="0" bIns="0" anchor="ctr">
+            <a:spAutoFit/>
+          </a:bodyPr>
+          <a:lstStyle/>
+          <a:p>
+            <a:pPr algn="ctr">
+              <a:lnSpc>
+                <a:spcPct val="135000"/>
+              </a:lnSpc>
+            </a:pPr>
+            <a:r>
+              <a:rPr sz="1500" b="0">
+                <a:solidFill>
+                  <a:srgbClr val="3D3D3D"/>
+                </a:solidFill>
+                <a:latin typeface="Pretendard"/>
+                <a:ea typeface="Pretendard"/>
+                <a:cs typeface="Pretendard"/>
+              </a:rPr>
+              <a:t>CANNOT_SAFELY_CAST</a:t>
+            </a:r>
+          </a:p>
+        </p:txBody>
+      </p:sp>
+      <p:sp>
+        <p:nvSpPr>
+          <p:cNvPr id="15" name="Right Arrow 14"/>
+          <p:cNvSpPr/>
+          <p:nvPr/>
+        </p:nvSpPr>
+        <p:spPr>
+          <a:xfrm>
+            <a:off x="4742974" y="5049202"/>
+            <a:ext cx="172402" cy="178118"/>
+          </a:xfrm>
+          <a:prstGeom prst="rightArrow">
+            <a:avLst/>
+          </a:prstGeom>
+          <a:solidFill>
+            <a:srgbClr val="1E5BC6"/>
           </a:solidFill>
           <a:ln>
             <a:noFill/>
@@ -12491,22 +13760,52 @@
       </p:sp>
       <p:sp>
         <p:nvSpPr>
-          <p:cNvPr id="14" name="TextBox 13"/>
-          <p:cNvSpPr txBox="1"/>
-          <p:nvPr/>
-        </p:nvSpPr>
-        <p:spPr>
-          <a:xfrm>
-            <a:off x="1390650" y="3952875"/>
-            <a:ext cx="533400" cy="323850"/>
-          </a:xfrm>
-          <a:prstGeom prst="rect">
-            <a:avLst/>
-          </a:prstGeom>
-          <a:noFill/>
-        </p:spPr>
-        <p:txBody>
-          <a:bodyPr wrap="square" lIns="0" rIns="0" tIns="0" bIns="0" anchor="t">
+          <p:cNvPr id="16" name="Rectangle 15"/>
+          <p:cNvSpPr/>
+          <p:nvPr/>
+        </p:nvSpPr>
+        <p:spPr>
+          <a:xfrm>
+            <a:off x="4934426" y="4838700"/>
+            <a:ext cx="3333274" cy="599122"/>
+          </a:xfrm>
+          <a:prstGeom prst="rect">
+            <a:avLst/>
+          </a:prstGeom>
+          <a:solidFill>
+            <a:srgbClr val="1E5BC6"/>
+          </a:solidFill>
+          <a:ln>
+            <a:noFill/>
+          </a:ln>
+          <a:effectLst/>
+        </p:spPr>
+        <p:txBody>
+          <a:bodyPr rtlCol="0" anchor="ctr" wrap="square"/>
+          <a:lstStyle/>
+          <a:p>
+            <a:pPr algn="ctr"/>
+          </a:p>
+        </p:txBody>
+      </p:sp>
+      <p:sp>
+        <p:nvSpPr>
+          <p:cNvPr id="17" name="TextBox 16"/>
+          <p:cNvSpPr txBox="1"/>
+          <p:nvPr/>
+        </p:nvSpPr>
+        <p:spPr>
+          <a:xfrm>
+            <a:off x="4934426" y="4838700"/>
+            <a:ext cx="3333274" cy="599122"/>
+          </a:xfrm>
+          <a:prstGeom prst="rect">
+            <a:avLst/>
+          </a:prstGeom>
+          <a:noFill/>
+        </p:spPr>
+        <p:txBody>
+          <a:bodyPr wrap="square" lIns="0" rIns="0" tIns="0" bIns="0" anchor="ctr">
             <a:spAutoFit/>
           </a:bodyPr>
           <a:lstStyle/>
@@ -12517,7 +13816,7 @@
               </a:lnSpc>
             </a:pPr>
             <a:r>
-              <a:rPr sz="2100" b="1">
+              <a:rPr sz="2025" b="1">
                 <a:solidFill>
                   <a:srgbClr val="FFFFFF"/>
                 </a:solidFill>
@@ -12525,66 +13824,25 @@
                 <a:ea typeface="Pretendard"/>
                 <a:cs typeface="Pretendard"/>
               </a:rPr>
-              <a:t>2</a:t>
-            </a:r>
-          </a:p>
-        </p:txBody>
-      </p:sp>
-      <p:sp>
-        <p:nvSpPr>
-          <p:cNvPr id="15" name="TextBox 14"/>
-          <p:cNvSpPr txBox="1"/>
-          <p:nvPr/>
-        </p:nvSpPr>
-        <p:spPr>
-          <a:xfrm>
-            <a:off x="2190750" y="3724275"/>
-            <a:ext cx="14573250" cy="742950"/>
-          </a:xfrm>
-          <a:prstGeom prst="rect">
-            <a:avLst/>
-          </a:prstGeom>
-          <a:noFill/>
-        </p:spPr>
-        <p:txBody>
-          <a:bodyPr wrap="square" lIns="0" rIns="0" tIns="0" bIns="0" anchor="ctr">
-            <a:spAutoFit/>
-          </a:bodyPr>
-          <a:lstStyle/>
-          <a:p>
-            <a:pPr algn="l">
-              <a:lnSpc>
-                <a:spcPct val="100000"/>
-              </a:lnSpc>
-            </a:pPr>
-            <a:r>
-              <a:rPr sz="2100" b="1">
-                <a:solidFill>
-                  <a:srgbClr val="0D2B5E"/>
-                </a:solidFill>
-                <a:latin typeface="Pretendard"/>
-                <a:ea typeface="Pretendard"/>
-                <a:cs typeface="Pretendard"/>
-              </a:rPr>
-              <a:t>Trino count 7 · Spark 조회에 order_id 8(jung) 행이 보인다</a:t>
-            </a:r>
-          </a:p>
-        </p:txBody>
-      </p:sp>
-      <p:sp>
-        <p:nvSpPr>
-          <p:cNvPr id="16" name="Rounded Rectangle 15"/>
-          <p:cNvSpPr/>
-          <p:nvPr/>
-        </p:nvSpPr>
-        <p:spPr>
-          <a:xfrm>
-            <a:off x="1143000" y="4581525"/>
-            <a:ext cx="16002000" cy="742950"/>
+              <a:t>커밋 없음</a:t>
+            </a:r>
+          </a:p>
+        </p:txBody>
+      </p:sp>
+      <p:sp>
+        <p:nvSpPr>
+          <p:cNvPr id="18" name="Rounded Rectangle 17"/>
+          <p:cNvSpPr/>
+          <p:nvPr/>
+        </p:nvSpPr>
+        <p:spPr>
+          <a:xfrm>
+            <a:off x="4934426" y="5583555"/>
+            <a:ext cx="3333274" cy="1214438"/>
           </a:xfrm>
           <a:prstGeom prst="roundRect">
             <a:avLst>
-              <a:gd name="adj" fmla="val 6410"/>
+              <a:gd name="adj" fmla="val 3921"/>
             </a:avLst>
           </a:prstGeom>
           <a:solidFill>
@@ -12607,44 +13865,55 @@
       </p:sp>
       <p:sp>
         <p:nvSpPr>
-          <p:cNvPr id="17" name="Oval 16"/>
-          <p:cNvSpPr/>
-          <p:nvPr/>
-        </p:nvSpPr>
-        <p:spPr>
-          <a:xfrm>
-            <a:off x="1390650" y="4686300"/>
-            <a:ext cx="533400" cy="533400"/>
-          </a:xfrm>
-          <a:prstGeom prst="ellipse">
-            <a:avLst/>
-          </a:prstGeom>
-          <a:solidFill>
-            <a:srgbClr val="0D2B5E"/>
-          </a:solidFill>
-          <a:ln>
-            <a:noFill/>
-          </a:ln>
-          <a:effectLst/>
-        </p:spPr>
-        <p:txBody>
-          <a:bodyPr rtlCol="0" anchor="ctr" wrap="square"/>
-          <a:lstStyle/>
-          <a:p>
-            <a:pPr algn="ctr"/>
-          </a:p>
-        </p:txBody>
-      </p:sp>
-      <p:sp>
-        <p:nvSpPr>
-          <p:cNvPr id="18" name="TextBox 17"/>
-          <p:cNvSpPr txBox="1"/>
-          <p:nvPr/>
-        </p:nvSpPr>
-        <p:spPr>
-          <a:xfrm>
-            <a:off x="1390650" y="4810125"/>
-            <a:ext cx="533400" cy="323850"/>
+          <p:cNvPr id="19" name="TextBox 18"/>
+          <p:cNvSpPr txBox="1"/>
+          <p:nvPr/>
+        </p:nvSpPr>
+        <p:spPr>
+          <a:xfrm>
+            <a:off x="5067776" y="5583555"/>
+            <a:ext cx="3066574" cy="1214438"/>
+          </a:xfrm>
+          <a:prstGeom prst="rect">
+            <a:avLst/>
+          </a:prstGeom>
+          <a:noFill/>
+        </p:spPr>
+        <p:txBody>
+          <a:bodyPr wrap="square" lIns="0" rIns="0" tIns="0" bIns="0" anchor="ctr">
+            <a:spAutoFit/>
+          </a:bodyPr>
+          <a:lstStyle/>
+          <a:p>
+            <a:pPr algn="ctr">
+              <a:lnSpc>
+                <a:spcPct val="135000"/>
+              </a:lnSpc>
+            </a:pPr>
+            <a:r>
+              <a:rPr sz="1500" b="0">
+                <a:solidFill>
+                  <a:srgbClr val="3D3D3D"/>
+                </a:solidFill>
+                <a:latin typeface="Pretendard"/>
+                <a:ea typeface="Pretendard"/>
+                <a:cs typeface="Pretendard"/>
+              </a:rPr>
+              <a:t>STRING → BIGINT 불가</a:t>
+            </a:r>
+          </a:p>
+        </p:txBody>
+      </p:sp>
+      <p:sp>
+        <p:nvSpPr>
+          <p:cNvPr id="20" name="TextBox 19"/>
+          <p:cNvSpPr txBox="1"/>
+          <p:nvPr/>
+        </p:nvSpPr>
+        <p:spPr>
+          <a:xfrm>
+            <a:off x="9772650" y="2857500"/>
+            <a:ext cx="7372350" cy="533400"/>
           </a:xfrm>
           <a:prstGeom prst="rect">
             <a:avLst/>
@@ -12657,54 +13926,13 @@
           </a:bodyPr>
           <a:lstStyle/>
           <a:p>
-            <a:pPr algn="ctr">
-              <a:lnSpc>
-                <a:spcPct val="100000"/>
-              </a:lnSpc>
-            </a:pPr>
-            <a:r>
-              <a:rPr sz="2100" b="1">
-                <a:solidFill>
-                  <a:srgbClr val="FFFFFF"/>
-                </a:solidFill>
-                <a:latin typeface="Pretendard"/>
-                <a:ea typeface="Pretendard"/>
-                <a:cs typeface="Pretendard"/>
-              </a:rPr>
-              <a:t>3</a:t>
-            </a:r>
-          </a:p>
-        </p:txBody>
-      </p:sp>
-      <p:sp>
-        <p:nvSpPr>
-          <p:cNvPr id="19" name="TextBox 18"/>
-          <p:cNvSpPr txBox="1"/>
-          <p:nvPr/>
-        </p:nvSpPr>
-        <p:spPr>
-          <a:xfrm>
-            <a:off x="2190750" y="4581525"/>
-            <a:ext cx="14573250" cy="742950"/>
-          </a:xfrm>
-          <a:prstGeom prst="rect">
-            <a:avLst/>
-          </a:prstGeom>
-          <a:noFill/>
-        </p:spPr>
-        <p:txBody>
-          <a:bodyPr wrap="square" lIns="0" rIns="0" tIns="0" bIns="0" anchor="ctr">
-            <a:spAutoFit/>
-          </a:bodyPr>
-          <a:lstStyle/>
-          <a:p>
             <a:pPr algn="l">
               <a:lnSpc>
-                <a:spcPct val="100000"/>
-              </a:lnSpc>
-            </a:pPr>
-            <a:r>
-              <a:rPr sz="2100" b="1">
+                <a:spcPct val="110000"/>
+              </a:lnSpc>
+            </a:pPr>
+            <a:r>
+              <a:rPr sz="3150" b="1">
                 <a:solidFill>
                   <a:srgbClr val="0D2B5E"/>
                 </a:solidFill>
@@ -12712,25 +13940,66 @@
                 <a:ea typeface="Pretendard"/>
                 <a:cs typeface="Pretendard"/>
               </a:rPr>
-              <a:t>Trino DESCRIBE 에 memo · order_id 4 의 memo 가 vip</a:t>
-            </a:r>
-          </a:p>
-        </p:txBody>
-      </p:sp>
-      <p:sp>
-        <p:nvSpPr>
-          <p:cNvPr id="20" name="Rounded Rectangle 19"/>
-          <p:cNvSpPr/>
-          <p:nvPr/>
-        </p:nvSpPr>
-        <p:spPr>
-          <a:xfrm>
-            <a:off x="1143000" y="5438775"/>
-            <a:ext cx="16002000" cy="742950"/>
+              <a:t>Trino — 그대로</a:t>
+            </a:r>
+          </a:p>
+        </p:txBody>
+      </p:sp>
+      <p:sp>
+        <p:nvSpPr>
+          <p:cNvPr id="21" name="TextBox 20"/>
+          <p:cNvSpPr txBox="1"/>
+          <p:nvPr/>
+        </p:nvSpPr>
+        <p:spPr>
+          <a:xfrm>
+            <a:off x="9772650" y="3467100"/>
+            <a:ext cx="7372350" cy="876300"/>
+          </a:xfrm>
+          <a:prstGeom prst="rect">
+            <a:avLst/>
+          </a:prstGeom>
+          <a:noFill/>
+        </p:spPr>
+        <p:txBody>
+          <a:bodyPr wrap="square" lIns="0" rIns="0" tIns="0" bIns="0" anchor="t">
+            <a:spAutoFit/>
+          </a:bodyPr>
+          <a:lstStyle/>
+          <a:p>
+            <a:pPr algn="l">
+              <a:lnSpc>
+                <a:spcPct val="146000"/>
+              </a:lnSpc>
+            </a:pPr>
+            <a:r>
+              <a:rPr sz="2250" b="0">
+                <a:solidFill>
+                  <a:srgbClr val="3D3D3D"/>
+                </a:solidFill>
+                <a:latin typeface="Pretendard"/>
+                <a:ea typeface="Pretendard"/>
+                <a:cs typeface="Pretendard"/>
+              </a:rPr>
+              <a:t>실패한 쓰기는 어디에도 흔적이 없다</a:t>
+            </a:r>
+          </a:p>
+        </p:txBody>
+      </p:sp>
+      <p:sp>
+        <p:nvSpPr>
+          <p:cNvPr id="22" name="Rounded Rectangle 21"/>
+          <p:cNvSpPr/>
+          <p:nvPr/>
+        </p:nvSpPr>
+        <p:spPr>
+          <a:xfrm>
+            <a:off x="9772650" y="4610100"/>
+            <a:ext cx="7372350" cy="2857500"/>
           </a:xfrm>
           <a:prstGeom prst="roundRect">
             <a:avLst>
-              <a:gd name="adj" fmla="val 6410"/>
+              <a:gd name="adj" fmla="val 1666"/>
             </a:avLst>
           </a:prstGeom>
           <a:solidFill>
@@ -12753,16 +14022,16 @@
       </p:sp>
       <p:sp>
         <p:nvSpPr>
-          <p:cNvPr id="21" name="Oval 20"/>
-          <p:cNvSpPr/>
-          <p:nvPr/>
-        </p:nvSpPr>
-        <p:spPr>
-          <a:xfrm>
-            <a:off x="1390650" y="5543550"/>
-            <a:ext cx="533400" cy="533400"/>
-          </a:xfrm>
-          <a:prstGeom prst="ellipse">
+          <p:cNvPr id="23" name="Rectangle 22"/>
+          <p:cNvSpPr/>
+          <p:nvPr/>
+        </p:nvSpPr>
+        <p:spPr>
+          <a:xfrm>
+            <a:off x="10020300" y="4838700"/>
+            <a:ext cx="3333274" cy="599122"/>
+          </a:xfrm>
+          <a:prstGeom prst="rect">
             <a:avLst/>
           </a:prstGeom>
           <a:solidFill>
@@ -12783,22 +14052,22 @@
       </p:sp>
       <p:sp>
         <p:nvSpPr>
-          <p:cNvPr id="22" name="TextBox 21"/>
-          <p:cNvSpPr txBox="1"/>
-          <p:nvPr/>
-        </p:nvSpPr>
-        <p:spPr>
-          <a:xfrm>
-            <a:off x="1390650" y="5667375"/>
-            <a:ext cx="533400" cy="323850"/>
-          </a:xfrm>
-          <a:prstGeom prst="rect">
-            <a:avLst/>
-          </a:prstGeom>
-          <a:noFill/>
-        </p:spPr>
-        <p:txBody>
-          <a:bodyPr wrap="square" lIns="0" rIns="0" tIns="0" bIns="0" anchor="t">
+          <p:cNvPr id="24" name="TextBox 23"/>
+          <p:cNvSpPr txBox="1"/>
+          <p:nvPr/>
+        </p:nvSpPr>
+        <p:spPr>
+          <a:xfrm>
+            <a:off x="10020300" y="4838700"/>
+            <a:ext cx="3333274" cy="599122"/>
+          </a:xfrm>
+          <a:prstGeom prst="rect">
+            <a:avLst/>
+          </a:prstGeom>
+          <a:noFill/>
+        </p:spPr>
+        <p:txBody>
+          <a:bodyPr wrap="square" lIns="0" rIns="0" tIns="0" bIns="0" anchor="ctr">
             <a:spAutoFit/>
           </a:bodyPr>
           <a:lstStyle/>
@@ -12809,7 +14078,7 @@
               </a:lnSpc>
             </a:pPr>
             <a:r>
-              <a:rPr sz="2100" b="1">
+              <a:rPr sz="2025" b="1">
                 <a:solidFill>
                   <a:srgbClr val="FFFFFF"/>
                 </a:solidFill>
@@ -12817,66 +14086,25 @@
                 <a:ea typeface="Pretendard"/>
                 <a:cs typeface="Pretendard"/>
               </a:rPr>
-              <a:t>4</a:t>
-            </a:r>
-          </a:p>
-        </p:txBody>
-      </p:sp>
-      <p:sp>
-        <p:nvSpPr>
-          <p:cNvPr id="23" name="TextBox 22"/>
-          <p:cNvSpPr txBox="1"/>
-          <p:nvPr/>
-        </p:nvSpPr>
-        <p:spPr>
-          <a:xfrm>
-            <a:off x="2190750" y="5438775"/>
-            <a:ext cx="14573250" cy="742950"/>
-          </a:xfrm>
-          <a:prstGeom prst="rect">
-            <a:avLst/>
-          </a:prstGeom>
-          <a:noFill/>
-        </p:spPr>
-        <p:txBody>
-          <a:bodyPr wrap="square" lIns="0" rIns="0" tIns="0" bIns="0" anchor="ctr">
-            <a:spAutoFit/>
-          </a:bodyPr>
-          <a:lstStyle/>
-          <a:p>
-            <a:pPr algn="l">
-              <a:lnSpc>
-                <a:spcPct val="100000"/>
-              </a:lnSpc>
-            </a:pPr>
-            <a:r>
-              <a:rPr sz="2100" b="1">
-                <a:solidFill>
-                  <a:srgbClr val="0D2B5E"/>
-                </a:solidFill>
-                <a:latin typeface="Pretendard"/>
-                <a:ea typeface="Pretendard"/>
-                <a:cs typeface="Pretendard"/>
-              </a:rPr>
-              <a:t>$snapshots 이력이 시간순 한 줄 · 스냅샷 개수가 양쪽 같다</a:t>
-            </a:r>
-          </a:p>
-        </p:txBody>
-      </p:sp>
-      <p:sp>
-        <p:nvSpPr>
-          <p:cNvPr id="24" name="Rounded Rectangle 23"/>
-          <p:cNvSpPr/>
-          <p:nvPr/>
-        </p:nvSpPr>
-        <p:spPr>
-          <a:xfrm>
-            <a:off x="1143000" y="6296025"/>
-            <a:ext cx="16002000" cy="742950"/>
+              <a:t>count(*)</a:t>
+            </a:r>
+          </a:p>
+        </p:txBody>
+      </p:sp>
+      <p:sp>
+        <p:nvSpPr>
+          <p:cNvPr id="25" name="Rounded Rectangle 24"/>
+          <p:cNvSpPr/>
+          <p:nvPr/>
+        </p:nvSpPr>
+        <p:spPr>
+          <a:xfrm>
+            <a:off x="10020300" y="5583555"/>
+            <a:ext cx="3333274" cy="1214438"/>
           </a:xfrm>
           <a:prstGeom prst="roundRect">
             <a:avLst>
-              <a:gd name="adj" fmla="val 6410"/>
+              <a:gd name="adj" fmla="val 3921"/>
             </a:avLst>
           </a:prstGeom>
           <a:solidFill>
@@ -12899,20 +14127,61 @@
       </p:sp>
       <p:sp>
         <p:nvSpPr>
-          <p:cNvPr id="25" name="Oval 24"/>
-          <p:cNvSpPr/>
-          <p:nvPr/>
-        </p:nvSpPr>
-        <p:spPr>
-          <a:xfrm>
-            <a:off x="1390650" y="6400800"/>
-            <a:ext cx="533400" cy="533400"/>
-          </a:xfrm>
-          <a:prstGeom prst="ellipse">
-            <a:avLst/>
-          </a:prstGeom>
-          <a:solidFill>
-            <a:srgbClr val="0D2B5E"/>
+          <p:cNvPr id="26" name="TextBox 25"/>
+          <p:cNvSpPr txBox="1"/>
+          <p:nvPr/>
+        </p:nvSpPr>
+        <p:spPr>
+          <a:xfrm>
+            <a:off x="10153650" y="5583555"/>
+            <a:ext cx="3066574" cy="1214438"/>
+          </a:xfrm>
+          <a:prstGeom prst="rect">
+            <a:avLst/>
+          </a:prstGeom>
+          <a:noFill/>
+        </p:spPr>
+        <p:txBody>
+          <a:bodyPr wrap="square" lIns="0" rIns="0" tIns="0" bIns="0" anchor="ctr">
+            <a:spAutoFit/>
+          </a:bodyPr>
+          <a:lstStyle/>
+          <a:p>
+            <a:pPr algn="ctr">
+              <a:lnSpc>
+                <a:spcPct val="135000"/>
+              </a:lnSpc>
+            </a:pPr>
+            <a:r>
+              <a:rPr sz="1500" b="0">
+                <a:solidFill>
+                  <a:srgbClr val="3D3D3D"/>
+                </a:solidFill>
+                <a:latin typeface="Pretendard"/>
+                <a:ea typeface="Pretendard"/>
+                <a:cs typeface="Pretendard"/>
+              </a:rPr>
+              <a:t>"7" 그대로</a:t>
+            </a:r>
+          </a:p>
+        </p:txBody>
+      </p:sp>
+      <p:sp>
+        <p:nvSpPr>
+          <p:cNvPr id="27" name="Right Arrow 26"/>
+          <p:cNvSpPr/>
+          <p:nvPr/>
+        </p:nvSpPr>
+        <p:spPr>
+          <a:xfrm>
+            <a:off x="13372624" y="5049202"/>
+            <a:ext cx="172402" cy="178118"/>
+          </a:xfrm>
+          <a:prstGeom prst="rightArrow">
+            <a:avLst/>
+          </a:prstGeom>
+          <a:solidFill>
+            <a:srgbClr val="1E5BC6"/>
           </a:solidFill>
           <a:ln>
             <a:noFill/>
@@ -12929,22 +14198,52 @@
       </p:sp>
       <p:sp>
         <p:nvSpPr>
-          <p:cNvPr id="26" name="TextBox 25"/>
-          <p:cNvSpPr txBox="1"/>
-          <p:nvPr/>
-        </p:nvSpPr>
-        <p:spPr>
-          <a:xfrm>
-            <a:off x="1390650" y="6524625"/>
-            <a:ext cx="533400" cy="323850"/>
-          </a:xfrm>
-          <a:prstGeom prst="rect">
-            <a:avLst/>
-          </a:prstGeom>
-          <a:noFill/>
-        </p:spPr>
-        <p:txBody>
-          <a:bodyPr wrap="square" lIns="0" rIns="0" tIns="0" bIns="0" anchor="t">
+          <p:cNvPr id="28" name="Rectangle 27"/>
+          <p:cNvSpPr/>
+          <p:nvPr/>
+        </p:nvSpPr>
+        <p:spPr>
+          <a:xfrm>
+            <a:off x="13564076" y="4838700"/>
+            <a:ext cx="3333274" cy="599122"/>
+          </a:xfrm>
+          <a:prstGeom prst="rect">
+            <a:avLst/>
+          </a:prstGeom>
+          <a:solidFill>
+            <a:srgbClr val="1E5BC6"/>
+          </a:solidFill>
+          <a:ln>
+            <a:noFill/>
+          </a:ln>
+          <a:effectLst/>
+        </p:spPr>
+        <p:txBody>
+          <a:bodyPr rtlCol="0" anchor="ctr" wrap="square"/>
+          <a:lstStyle/>
+          <a:p>
+            <a:pPr algn="ctr"/>
+          </a:p>
+        </p:txBody>
+      </p:sp>
+      <p:sp>
+        <p:nvSpPr>
+          <p:cNvPr id="29" name="TextBox 28"/>
+          <p:cNvSpPr txBox="1"/>
+          <p:nvPr/>
+        </p:nvSpPr>
+        <p:spPr>
+          <a:xfrm>
+            <a:off x="13564076" y="4838700"/>
+            <a:ext cx="3333274" cy="599122"/>
+          </a:xfrm>
+          <a:prstGeom prst="rect">
+            <a:avLst/>
+          </a:prstGeom>
+          <a:noFill/>
+        </p:spPr>
+        <p:txBody>
+          <a:bodyPr wrap="square" lIns="0" rIns="0" tIns="0" bIns="0" anchor="ctr">
             <a:spAutoFit/>
           </a:bodyPr>
           <a:lstStyle/>
@@ -12955,7 +14254,7 @@
               </a:lnSpc>
             </a:pPr>
             <a:r>
-              <a:rPr sz="2100" b="1">
+              <a:rPr sz="2025" b="1">
                 <a:solidFill>
                   <a:srgbClr val="FFFFFF"/>
                 </a:solidFill>
@@ -12963,66 +14262,25 @@
                 <a:ea typeface="Pretendard"/>
                 <a:cs typeface="Pretendard"/>
               </a:rPr>
-              <a:t>5</a:t>
-            </a:r>
-          </a:p>
-        </p:txBody>
-      </p:sp>
-      <p:sp>
-        <p:nvSpPr>
-          <p:cNvPr id="27" name="TextBox 26"/>
-          <p:cNvSpPr txBox="1"/>
-          <p:nvPr/>
-        </p:nvSpPr>
-        <p:spPr>
-          <a:xfrm>
-            <a:off x="2190750" y="6296025"/>
-            <a:ext cx="14573250" cy="742950"/>
-          </a:xfrm>
-          <a:prstGeom prst="rect">
-            <a:avLst/>
-          </a:prstGeom>
-          <a:noFill/>
-        </p:spPr>
-        <p:txBody>
-          <a:bodyPr wrap="square" lIns="0" rIns="0" tIns="0" bIns="0" anchor="ctr">
-            <a:spAutoFit/>
-          </a:bodyPr>
-          <a:lstStyle/>
-          <a:p>
-            <a:pPr algn="l">
-              <a:lnSpc>
-                <a:spcPct val="100000"/>
-              </a:lnSpc>
-            </a:pPr>
-            <a:r>
-              <a:rPr sz="2100" b="1">
-                <a:solidFill>
-                  <a:srgbClr val="0D2B5E"/>
-                </a:solidFill>
-                <a:latin typeface="Pretendard"/>
-                <a:ea typeface="Pretendard"/>
-                <a:cs typeface="Pretendard"/>
-              </a:rPr>
-              <a:t>iceberg 와 iceberg2 의 count 가 같다 — 지운 뒤 restart</a:t>
-            </a:r>
-          </a:p>
-        </p:txBody>
-      </p:sp>
-      <p:sp>
-        <p:nvSpPr>
-          <p:cNvPr id="28" name="Rounded Rectangle 27"/>
-          <p:cNvSpPr/>
-          <p:nvPr/>
-        </p:nvSpPr>
-        <p:spPr>
-          <a:xfrm>
-            <a:off x="1143000" y="7153275"/>
-            <a:ext cx="16002000" cy="742950"/>
+              <a:t>스냅샷</a:t>
+            </a:r>
+          </a:p>
+        </p:txBody>
+      </p:sp>
+      <p:sp>
+        <p:nvSpPr>
+          <p:cNvPr id="30" name="Rounded Rectangle 29"/>
+          <p:cNvSpPr/>
+          <p:nvPr/>
+        </p:nvSpPr>
+        <p:spPr>
+          <a:xfrm>
+            <a:off x="13564076" y="5583555"/>
+            <a:ext cx="3333274" cy="1214438"/>
           </a:xfrm>
           <a:prstGeom prst="roundRect">
             <a:avLst>
-              <a:gd name="adj" fmla="val 6410"/>
+              <a:gd name="adj" fmla="val 3921"/>
             </a:avLst>
           </a:prstGeom>
           <a:solidFill>
@@ -13045,14 +14303,55 @@
       </p:sp>
       <p:sp>
         <p:nvSpPr>
-          <p:cNvPr id="29" name="Oval 28"/>
-          <p:cNvSpPr/>
-          <p:nvPr/>
-        </p:nvSpPr>
-        <p:spPr>
-          <a:xfrm>
-            <a:off x="1390650" y="7258050"/>
-            <a:ext cx="533400" cy="533400"/>
+          <p:cNvPr id="31" name="TextBox 30"/>
+          <p:cNvSpPr txBox="1"/>
+          <p:nvPr/>
+        </p:nvSpPr>
+        <p:spPr>
+          <a:xfrm>
+            <a:off x="13697426" y="5583555"/>
+            <a:ext cx="3066574" cy="1214438"/>
+          </a:xfrm>
+          <a:prstGeom prst="rect">
+            <a:avLst/>
+          </a:prstGeom>
+          <a:noFill/>
+        </p:spPr>
+        <p:txBody>
+          <a:bodyPr wrap="square" lIns="0" rIns="0" tIns="0" bIns="0" anchor="ctr">
+            <a:spAutoFit/>
+          </a:bodyPr>
+          <a:lstStyle/>
+          <a:p>
+            <a:pPr algn="ctr">
+              <a:lnSpc>
+                <a:spcPct val="135000"/>
+              </a:lnSpc>
+            </a:pPr>
+            <a:r>
+              <a:rPr sz="1500" b="0">
+                <a:solidFill>
+                  <a:srgbClr val="3D3D3D"/>
+                </a:solidFill>
+                <a:latin typeface="Pretendard"/>
+                <a:ea typeface="Pretendard"/>
+                <a:cs typeface="Pretendard"/>
+              </a:rPr>
+              <a:t>새 스냅샷 없음</a:t>
+            </a:r>
+          </a:p>
+        </p:txBody>
+      </p:sp>
+      <p:sp>
+        <p:nvSpPr>
+          <p:cNvPr id="32" name="Oval 31"/>
+          <p:cNvSpPr/>
+          <p:nvPr/>
+        </p:nvSpPr>
+        <p:spPr>
+          <a:xfrm>
+            <a:off x="8686800" y="3771900"/>
+            <a:ext cx="914400" cy="914400"/>
           </a:xfrm>
           <a:prstGeom prst="ellipse">
             <a:avLst/>
@@ -13075,14 +14374,14 @@
       </p:sp>
       <p:sp>
         <p:nvSpPr>
-          <p:cNvPr id="30" name="TextBox 29"/>
-          <p:cNvSpPr txBox="1"/>
-          <p:nvPr/>
-        </p:nvSpPr>
-        <p:spPr>
-          <a:xfrm>
-            <a:off x="1390650" y="7381875"/>
-            <a:ext cx="533400" cy="323850"/>
+          <p:cNvPr id="33" name="TextBox 32"/>
+          <p:cNvSpPr txBox="1"/>
+          <p:nvPr/>
+        </p:nvSpPr>
+        <p:spPr>
+          <a:xfrm>
+            <a:off x="8686800" y="4057650"/>
+            <a:ext cx="914400" cy="381000"/>
           </a:xfrm>
           <a:prstGeom prst="rect">
             <a:avLst/>
@@ -13101,7 +14400,7 @@
               </a:lnSpc>
             </a:pPr>
             <a:r>
-              <a:rPr sz="2100" b="1">
+              <a:rPr sz="2250" b="1">
                 <a:solidFill>
                   <a:srgbClr val="FFFFFF"/>
                 </a:solidFill>
@@ -13109,55 +14408,14 @@
                 <a:ea typeface="Pretendard"/>
                 <a:cs typeface="Pretendard"/>
               </a:rPr>
-              <a:t>6</a:t>
-            </a:r>
-          </a:p>
-        </p:txBody>
-      </p:sp>
-      <p:sp>
-        <p:nvSpPr>
-          <p:cNvPr id="31" name="TextBox 30"/>
-          <p:cNvSpPr txBox="1"/>
-          <p:nvPr/>
-        </p:nvSpPr>
-        <p:spPr>
-          <a:xfrm>
-            <a:off x="2190750" y="7153275"/>
-            <a:ext cx="14573250" cy="742950"/>
-          </a:xfrm>
-          <a:prstGeom prst="rect">
-            <a:avLst/>
-          </a:prstGeom>
-          <a:noFill/>
-        </p:spPr>
-        <p:txBody>
-          <a:bodyPr wrap="square" lIns="0" rIns="0" tIns="0" bIns="0" anchor="ctr">
-            <a:spAutoFit/>
-          </a:bodyPr>
-          <a:lstStyle/>
-          <a:p>
-            <a:pPr algn="l">
-              <a:lnSpc>
-                <a:spcPct val="100000"/>
-              </a:lnSpc>
-            </a:pPr>
-            <a:r>
-              <a:rPr sz="2100" b="1">
-                <a:solidFill>
-                  <a:srgbClr val="0D2B5E"/>
-                </a:solidFill>
-                <a:latin typeface="Pretendard"/>
-                <a:ea typeface="Pretendard"/>
-                <a:cs typeface="Pretendard"/>
-              </a:rPr>
-              <a:t>실패한 INSERT 뒤에도 Trino count 는 7 그대로</a:t>
-            </a:r>
-          </a:p>
-        </p:txBody>
-      </p:sp>
-      <p:sp>
-        <p:nvSpPr>
-          <p:cNvPr id="32" name="Rectangle 31"/>
+              <a:t>VS</a:t>
+            </a:r>
+          </a:p>
+        </p:txBody>
+      </p:sp>
+      <p:sp>
+        <p:nvSpPr>
+          <p:cNvPr id="34" name="Rectangle 33"/>
           <p:cNvSpPr/>
           <p:nvPr/>
         </p:nvSpPr>
@@ -13187,7 +14445,7 @@
       </p:sp>
       <p:sp>
         <p:nvSpPr>
-          <p:cNvPr id="33" name="TextBox 32"/>
+          <p:cNvPr id="35" name="TextBox 34"/>
           <p:cNvSpPr txBox="1"/>
           <p:nvPr/>
         </p:nvSpPr>
@@ -13228,7 +14486,7 @@
       </p:sp>
       <p:sp>
         <p:nvSpPr>
-          <p:cNvPr id="34" name="TextBox 33"/>
+          <p:cNvPr id="36" name="TextBox 35"/>
           <p:cNvSpPr txBox="1"/>
           <p:nvPr/>
         </p:nvSpPr>
